--- a/presentation/SLIDES.pptx
+++ b/presentation/SLIDES.pptx
@@ -4,6 +4,9 @@
   <p:sldMasterIdLst>
     <p:sldMasterId id="2147483648" r:id="rId1"/>
   </p:sldMasterIdLst>
+  <p:notesMasterIdLst>
+    <p:notesMasterId r:id="rId21"/>
+  </p:notesMasterIdLst>
   <p:sldIdLst>
     <p:sldId id="256" r:id="rId2"/>
     <p:sldId id="257" r:id="rId3"/>
@@ -25,11 +28,8 @@
     <p:sldId id="273" r:id="rId19"/>
     <p:sldId id="274" r:id="rId20"/>
   </p:sldIdLst>
-  <p:notesMasterIdLst>
-    <p:notesMasterId r:id="rId21"/>
-  </p:notesMasterIdLst>
-  <p:sldSz cx="12188952" cy="6858000"/>
-  <p:notesSz cx="6858000" cy="12188952"/>
+  <p:sldSz cx="12188825" cy="6858000"/>
+  <p:notesSz cx="6858000" cy="12188825"/>
   <p:defaultTextStyle>
     <a:lvl1pPr marL="0" algn="l" defTabSz="914400" rtl="0" eaLnBrk="1" latinLnBrk="0" hangingPunct="1">
       <a:defRPr sz="1800" kern="1200">
@@ -122,6 +122,11 @@
       </a:defRPr>
     </a:lvl9pPr>
   </p:defaultTextStyle>
+  <p:extLst>
+    <p:ext uri="{EFAFB233-063F-42B5-8137-9DF3F51BA10A}">
+      <p15:sldGuideLst xmlns:p15="http://schemas.microsoft.com/office/powerpoint/2012/main"/>
+    </p:ext>
+  </p:extLst>
 </p:presentation>
 </file>
 
@@ -147,234 +152,10 @@
           <a:chExt cx="0" cy="0"/>
         </a:xfrm>
       </p:grpSpPr>
-      <p:sp>
-        <p:nvSpPr>
-          <p:cNvPr id="2" name="Header Placeholder 1"/>
-          <p:cNvSpPr>
-            <a:spLocks noGrp="1"/>
-          </p:cNvSpPr>
-          <p:nvPr>
-            <p:ph type="hdr" sz="quarter"/>
-          </p:nvPr>
-        </p:nvSpPr>
-        <p:spPr>
-          <a:xfrm>
-            <a:off x="0" y="0"/>
-            <a:ext cx="2971800" cy="458788"/>
-          </a:xfrm>
-          <a:prstGeom prst="rect">
-            <a:avLst/>
-          </a:prstGeom>
-        </p:spPr>
-        <p:txBody>
-          <a:bodyPr vert="horz" lIns="91440" tIns="45720" rIns="91440" bIns="45720" rtlCol="0"/>
-          <a:lstStyle>
-            <a:lvl1pPr algn="l">
-              <a:defRPr sz="1200"/>
-            </a:lvl1pPr>
-          </a:lstStyle>
-          <a:p>
-            <a:endParaRPr lang="en-US"/>
-          </a:p>
-        </p:txBody>
-      </p:sp>
-      <p:sp>
-        <p:nvSpPr>
-          <p:cNvPr id="3" name="Date Placeholder 2"/>
-          <p:cNvSpPr>
-            <a:spLocks noGrp="1"/>
-          </p:cNvSpPr>
-          <p:nvPr>
-            <p:ph type="dt" idx="1"/>
-          </p:nvPr>
-        </p:nvSpPr>
-        <p:spPr>
-          <a:xfrm>
-            <a:off x="3884613" y="0"/>
-            <a:ext cx="2971800" cy="458788"/>
-          </a:xfrm>
-          <a:prstGeom prst="rect">
-            <a:avLst/>
-          </a:prstGeom>
-        </p:spPr>
-        <p:txBody>
-          <a:bodyPr vert="horz" lIns="91440" tIns="45720" rIns="91440" bIns="45720" rtlCol="0"/>
-          <a:lstStyle>
-            <a:lvl1pPr algn="r">
-              <a:defRPr sz="1200"/>
-            </a:lvl1pPr>
-          </a:lstStyle>
-          <a:p>
-            <a:fld id="{5282F153-3F37-0F45-9E97-73ACFA13230C}" type="datetimeFigureOut">
-              <a:rPr lang="en-US"/>
-              <a:t>7/23/19</a:t>
-            </a:fld>
-            <a:endParaRPr lang="en-US"/>
-          </a:p>
-        </p:txBody>
-      </p:sp>
-      <p:sp>
-        <p:nvSpPr>
-          <p:cNvPr id="4" name="Slide Image Placeholder 3"/>
-          <p:cNvSpPr>
-            <a:spLocks noGrp="1" noRot="1" noChangeAspect="1"/>
-          </p:cNvSpPr>
-          <p:nvPr>
-            <p:ph type="sldImg" idx="2"/>
-          </p:nvPr>
-        </p:nvSpPr>
-        <p:spPr>
-          <a:xfrm>
-            <a:off x="685800" y="1143000"/>
-            <a:ext cx="5486400" cy="3086100"/>
-          </a:xfrm>
-          <a:prstGeom prst="rect">
-            <a:avLst/>
-          </a:prstGeom>
-          <a:noFill/>
-          <a:ln w="12700">
-            <a:solidFill>
-              <a:prstClr val="black"/>
-            </a:solidFill>
-          </a:ln>
-        </p:spPr>
-        <p:txBody>
-          <a:bodyPr vert="horz" lIns="91440" tIns="45720" rIns="91440" bIns="45720" rtlCol="0" anchor="ctr"/>
-          <a:lstStyle/>
-          <a:p>
-            <a:endParaRPr lang="en-US"/>
-          </a:p>
-        </p:txBody>
-      </p:sp>
-      <p:sp>
-        <p:nvSpPr>
-          <p:cNvPr id="5" name="Notes Placeholder 4"/>
-          <p:cNvSpPr>
-            <a:spLocks noGrp="1"/>
-          </p:cNvSpPr>
-          <p:nvPr>
-            <p:ph type="body" sz="quarter" idx="3"/>
-          </p:nvPr>
-        </p:nvSpPr>
-        <p:spPr>
-          <a:xfrm>
-            <a:off x="685800" y="4400550"/>
-            <a:ext cx="5486400" cy="3600450"/>
-          </a:xfrm>
-          <a:prstGeom prst="rect">
-            <a:avLst/>
-          </a:prstGeom>
-        </p:spPr>
-        <p:txBody>
-          <a:bodyPr vert="horz" lIns="91440" tIns="45720" rIns="91440" bIns="45720" rtlCol="0"/>
-          <a:lstStyle/>
-          <a:p>
-            <a:pPr lvl="0"/>
-            <a:r>
-              <a:rPr lang="en-US"/>
-              <a:t>Click to edit Master text styles</a:t>
-            </a:r>
-          </a:p>
-          <a:p>
-            <a:pPr lvl="1"/>
-            <a:r>
-              <a:rPr lang="en-US"/>
-              <a:t>Second level</a:t>
-            </a:r>
-          </a:p>
-          <a:p>
-            <a:pPr lvl="2"/>
-            <a:r>
-              <a:rPr lang="en-US"/>
-              <a:t>Third level</a:t>
-            </a:r>
-          </a:p>
-          <a:p>
-            <a:pPr lvl="3"/>
-            <a:r>
-              <a:rPr lang="en-US"/>
-              <a:t>Fourth level</a:t>
-            </a:r>
-          </a:p>
-          <a:p>
-            <a:pPr lvl="4"/>
-            <a:r>
-              <a:rPr lang="en-US"/>
-              <a:t>Fifth level</a:t>
-            </a:r>
-          </a:p>
-        </p:txBody>
-      </p:sp>
-      <p:sp>
-        <p:nvSpPr>
-          <p:cNvPr id="6" name="Footer Placeholder 5"/>
-          <p:cNvSpPr>
-            <a:spLocks noGrp="1"/>
-          </p:cNvSpPr>
-          <p:nvPr>
-            <p:ph type="ftr" sz="quarter" idx="4"/>
-          </p:nvPr>
-        </p:nvSpPr>
-        <p:spPr>
-          <a:xfrm>
-            <a:off x="0" y="8685213"/>
-            <a:ext cx="2971800" cy="458787"/>
-          </a:xfrm>
-          <a:prstGeom prst="rect">
-            <a:avLst/>
-          </a:prstGeom>
-        </p:spPr>
-        <p:txBody>
-          <a:bodyPr vert="horz" lIns="91440" tIns="45720" rIns="91440" bIns="45720" rtlCol="0" anchor="b"/>
-          <a:lstStyle>
-            <a:lvl1pPr algn="l">
-              <a:defRPr sz="1200"/>
-            </a:lvl1pPr>
-          </a:lstStyle>
-          <a:p>
-            <a:endParaRPr lang="en-US"/>
-          </a:p>
-        </p:txBody>
-      </p:sp>
-      <p:sp>
-        <p:nvSpPr>
-          <p:cNvPr id="7" name="Slide Number Placeholder 6"/>
-          <p:cNvSpPr>
-            <a:spLocks noGrp="1"/>
-          </p:cNvSpPr>
-          <p:nvPr>
-            <p:ph type="sldNum" sz="quarter" idx="5"/>
-          </p:nvPr>
-        </p:nvSpPr>
-        <p:spPr>
-          <a:xfrm>
-            <a:off x="3884613" y="8685213"/>
-            <a:ext cx="2971800" cy="458787"/>
-          </a:xfrm>
-          <a:prstGeom prst="rect">
-            <a:avLst/>
-          </a:prstGeom>
-        </p:spPr>
-        <p:txBody>
-          <a:bodyPr vert="horz" lIns="91440" tIns="45720" rIns="91440" bIns="45720" rtlCol="0" anchor="b"/>
-          <a:lstStyle>
-            <a:lvl1pPr algn="r">
-              <a:defRPr sz="1200"/>
-            </a:lvl1pPr>
-          </a:lstStyle>
-          <a:p>
-            <a:fld id="{CE5E9CC1-C706-0F49-92D6-E571CC5EEA8F}" type="slidenum">
-              <a:rPr lang="en-US"/>
-              <a:t>‹#›</a:t>
-            </a:fld>
-            <a:endParaRPr lang="en-US"/>
-          </a:p>
-        </p:txBody>
-      </p:sp>
     </p:spTree>
     <p:extLst>
       <p:ext uri="{BB962C8B-B14F-4D97-AF65-F5344CB8AC3E}">
-        <p14:creationId xmlns:p14="http://schemas.microsoft.com/office/powerpoint/2010/main" val="1024086991"/>
+        <p14:creationId xmlns:p14="http://schemas.microsoft.com/office/powerpoint/2010/main" val="2301111627"/>
       </p:ext>
     </p:extLst>
   </p:cSld>
@@ -522,7 +303,6 @@
               <a:rPr lang="en-US" dirty="0"/>
               <a:t>Hook: DX for teams and UX for users in the same architecture. Everything shown is a running app the audience can clone.</a:t>
             </a:r>
-            <a:endParaRPr lang="en-US" dirty="0"/>
           </a:p>
         </p:txBody>
       </p:sp>
@@ -610,7 +390,6 @@
               <a:rPr lang="en-US" dirty="0"/>
               <a:t>Kill the records remote live here. Honest caveat: all modules share a browser tab, so an infinite loop freezes everything. That is the cost of a shared runtime; most MF setups accept it.</a:t>
             </a:r>
-            <a:endParaRPr lang="en-US" dirty="0"/>
           </a:p>
         </p:txBody>
       </p:sp>
@@ -698,7 +477,6 @@
               <a:rPr lang="en-US" dirty="0"/>
               <a:t>No direct imports between modules. Events are framework-agnostic, but the event payload is still a versioned contract. The shell stays the only router owner.</a:t>
             </a:r>
-            <a:endParaRPr lang="en-US" dirty="0"/>
           </a:p>
         </p:txBody>
       </p:sp>
@@ -786,7 +564,6 @@
               <a:rPr lang="en-US" dirty="0"/>
               <a:t>The shell rewrites CSS variables on :root, persists to localStorage, exposes window.__MF_THEME__, and broadcasts themeChange. Remotes react via a hook — no shared imports, no prop drilling.</a:t>
             </a:r>
-            <a:endParaRPr lang="en-US" dirty="0"/>
           </a:p>
         </p:txBody>
       </p:sp>
@@ -874,7 +651,6 @@
               <a:rPr lang="en-US" dirty="0"/>
               <a:t>Records is already cached by the time the user clicks. Prescriptions and Analytics start loading when the cursor touches the tab.</a:t>
             </a:r>
-            <a:endParaRPr lang="en-US" dirty="0"/>
           </a:p>
         </p:txBody>
       </p:sp>
@@ -962,7 +738,6 @@
               <a:rPr lang="en-US" dirty="0"/>
               <a:t>The vitest alias trick resolves MF imports to source files. 210 tests across 21 files, all green — run pnpm test live if time allows.</a:t>
             </a:r>
-            <a:endParaRPr lang="en-US" dirty="0"/>
           </a:p>
         </p:txBody>
       </p:sp>
@@ -1050,7 +825,6 @@
               <a:rPr lang="en-US" dirty="0"/>
               <a:t>Typography: Instrument Serif for display, DM Sans body, IBM Plex Mono labels. 1px grid gaps, citrine accent, staggered fadeInUp animations, SVG grain overlay.</a:t>
             </a:r>
-            <a:endParaRPr lang="en-US" dirty="0"/>
           </a:p>
         </p:txBody>
       </p:sp>
@@ -1138,7 +912,6 @@
               <a:rPr lang="en-US" dirty="0"/>
               <a:t>Keep this slide up while switching to the browser, or skip it entirely — it's the safety net if the demo machine fails.</a:t>
             </a:r>
-            <a:endParaRPr lang="en-US" dirty="0"/>
           </a:p>
         </p:txBody>
       </p:sp>
@@ -1226,7 +999,6 @@
               <a:rPr lang="en-US" dirty="0"/>
               <a:t>Land takeaway #1 hardest: micro-frontends solve a people problem. Team size, not app size, is the signal.</a:t>
             </a:r>
-            <a:endParaRPr lang="en-US" dirty="0"/>
           </a:p>
         </p:txBody>
       </p:sp>
@@ -1314,7 +1086,6 @@
               <a:rPr lang="en-US" dirty="0"/>
               <a:t>Close with production examples: healthcare platforms, SaaS dashboards, enterprise portals, media platforms — each domain as a federated remote.</a:t>
             </a:r>
-            <a:endParaRPr lang="en-US" dirty="0"/>
           </a:p>
         </p:txBody>
       </p:sp>
@@ -1402,7 +1173,6 @@
               <a:rPr lang="en-US" dirty="0"/>
               <a:t>Share the verified repository URL in the conference materials. Invite questions about React 19 Suspense: the nearest fallback can commit sooner, then React pre-warms suspended siblings.</a:t>
             </a:r>
-            <a:endParaRPr lang="en-US" dirty="0"/>
           </a:p>
         </p:txBody>
       </p:sp>
@@ -1490,7 +1260,6 @@
               <a:rPr lang="en-US" dirty="0"/>
               <a:t>Most architecture talks start with bundle sizes. The pain that drives companies to micro-frontends is developer experience at scale. Walk the ladder slowly; the audience will recognize where they are.</a:t>
             </a:r>
-            <a:endParaRPr lang="en-US" dirty="0"/>
           </a:p>
         </p:txBody>
       </p:sp>
@@ -1578,7 +1347,6 @@
               <a:rPr lang="en-US" dirty="0"/>
               <a:t>Thesis slide. Module Federation and Suspense are usually presented separately. Combined, each remote owns its loading choreography while the shell stays simple.</a:t>
             </a:r>
-            <a:endParaRPr lang="en-US" dirty="0"/>
           </a:p>
         </p:txBody>
       </p:sp>
@@ -1666,7 +1434,6 @@
               <a:rPr lang="en-US" dirty="0"/>
               <a:t>Point at the status strip in the live demo — it shows INSTANT / EAGER / STREAMING per module. Not every module should load the same way; the shell decides by content priority.</a:t>
             </a:r>
-            <a:endParaRPr lang="en-US" dirty="0"/>
           </a:p>
         </p:txBody>
       </p:sp>
@@ -1754,7 +1521,6 @@
               <a:rPr lang="en-US" dirty="0"/>
               <a:t>cd into any package, pnpm run dev, full HMR — no shell needed. The async bootstrap pattern is what makes standalone mode possible with shared React (eager: false).</a:t>
             </a:r>
-            <a:endParaRPr lang="en-US" dirty="0"/>
           </a:p>
         </p:txBody>
       </p:sp>
@@ -1842,7 +1608,6 @@
               <a:rPr lang="en-US" dirty="0"/>
               <a:t>Everything else in rspack.config.ts is a normal bundler config. Remove ModuleFederationPlugin and you have five unrelated apps. exposes = the contract, remotes = runtime discovery, shared = deduplication.</a:t>
             </a:r>
-            <a:endParaRPr lang="en-US" dirty="0"/>
           </a:p>
         </p:txBody>
       </p:sp>
@@ -1930,7 +1695,6 @@
               <a:rPr lang="en-US" dirty="0"/>
               <a:t>The wrapper's ONLY job is to trigger Suspense. The actual UI lives in the standalone component. read() throws the promise while pending — Suspense in the shell catches it. This demo delays a client-side promise; it does not use streaming SSR.</a:t>
             </a:r>
-            <a:endParaRPr lang="en-US" dirty="0"/>
           </a:p>
         </p:txBody>
       </p:sp>
@@ -2018,7 +1782,6 @@
               <a:rPr lang="en-US" dirty="0"/>
               <a:t>Anticipate the question: why lazy() for eager modules? MF remotes are separate builds resolved at runtime via import() — you can't use a static import. Eager import() at shell init warms the cache; lazy() resolves instantly from it.</a:t>
             </a:r>
-            <a:endParaRPr lang="en-US" dirty="0"/>
           </a:p>
         </p:txBody>
       </p:sp>
@@ -2106,7 +1869,6 @@
               <a:rPr lang="en-US" dirty="0"/>
               <a:t>Ctrl+K runs kill, theme, and nav from the keyboard so the audience stays on the demo.</a:t>
             </a:r>
-            <a:endParaRPr lang="en-US" dirty="0"/>
           </a:p>
         </p:txBody>
       </p:sp>
@@ -2179,6 +1941,11 @@
 <file path=ppt/slideMasters/slideMaster1.xml><?xml version="1.0" encoding="utf-8"?>
 <p:sldMaster xmlns:a="http://schemas.openxmlformats.org/drawingml/2006/main" xmlns:r="http://schemas.openxmlformats.org/officeDocument/2006/relationships" xmlns:p="http://schemas.openxmlformats.org/presentationml/2006/main">
   <p:cSld>
+    <p:bg>
+      <p:bgRef idx="1001">
+        <a:schemeClr val="bg1"/>
+      </p:bgRef>
+    </p:bg>
     <p:spTree>
       <p:nvGrpSpPr>
         <p:cNvPr id="1" name=""/>
@@ -2461,6 +2228,7 @@
         <a:solidFill>
           <a:srgbClr val="0C0C0C"/>
         </a:solidFill>
+        <a:effectLst/>
       </p:bgPr>
     </p:bg>
     <p:spTree>
@@ -2498,11 +2266,11 @@
           <a:bodyPr wrap="square" rtlCol="0" anchor="ctr"/>
           <a:lstStyle/>
           <a:p>
-            <a:pPr indent="0" marL="0">
-              <a:buNone/>
-            </a:pPr>
-            <a:r>
-              <a:rPr lang="en-US" sz="1200" spc="500" kern="0" dirty="0">
+            <a:pPr marL="0" indent="0">
+              <a:buNone/>
+            </a:pPr>
+            <a:r>
+              <a:rPr lang="en-US" sz="1200" kern="0" spc="500" dirty="0">
                 <a:solidFill>
                   <a:srgbClr val="A8A29E"/>
                 </a:solidFill>
@@ -2535,6 +2303,13 @@
           </a:solidFill>
           <a:ln/>
         </p:spPr>
+        <p:txBody>
+          <a:bodyPr/>
+          <a:lstStyle/>
+          <a:p>
+            <a:endParaRPr lang="en-GB"/>
+          </a:p>
+        </p:txBody>
       </p:sp>
       <p:sp>
         <p:nvSpPr>
@@ -2557,7 +2332,7 @@
           <a:bodyPr wrap="square" rtlCol="0" anchor="ctr"/>
           <a:lstStyle/>
           <a:p>
-            <a:pPr indent="0" marL="0">
+            <a:pPr marL="0" indent="0">
               <a:buNone/>
             </a:pPr>
             <a:r>
@@ -2596,7 +2371,7 @@
           <a:bodyPr wrap="square" rtlCol="0" anchor="ctr"/>
           <a:lstStyle/>
           <a:p>
-            <a:pPr indent="0" marL="0">
+            <a:pPr marL="0" indent="0">
               <a:buNone/>
             </a:pPr>
             <a:r>
@@ -2635,7 +2410,7 @@
           <a:bodyPr wrap="square" rtlCol="0" anchor="t"/>
           <a:lstStyle/>
           <a:p>
-            <a:pPr algn="l" indent="0" marL="0">
+            <a:pPr marL="0" indent="0" algn="l">
               <a:lnSpc>
                 <a:spcPts val="1680"/>
               </a:lnSpc>
@@ -2655,7 +2430,7 @@
             <a:endParaRPr lang="en-US" sz="1200" dirty="0"/>
           </a:p>
           <a:p>
-            <a:pPr algn="l" indent="0" marL="0">
+            <a:pPr marL="0" indent="0" algn="l">
               <a:lnSpc>
                 <a:spcPts val="1680"/>
               </a:lnSpc>
@@ -2675,7 +2450,7 @@
             <a:endParaRPr lang="en-US" sz="1200" dirty="0"/>
           </a:p>
           <a:p>
-            <a:pPr algn="l" indent="0" marL="0">
+            <a:pPr marL="0" indent="0" algn="l">
               <a:lnSpc>
                 <a:spcPts val="1680"/>
               </a:lnSpc>
@@ -2695,7 +2470,7 @@
             <a:endParaRPr lang="en-US" sz="1200" dirty="0"/>
           </a:p>
           <a:p>
-            <a:pPr algn="l" indent="0" marL="0">
+            <a:pPr marL="0" indent="0" algn="l">
               <a:lnSpc>
                 <a:spcPts val="1680"/>
               </a:lnSpc>
@@ -2715,7 +2490,7 @@
             <a:endParaRPr lang="en-US" sz="1200" dirty="0"/>
           </a:p>
           <a:p>
-            <a:pPr algn="l" indent="0" marL="0">
+            <a:pPr marL="0" indent="0" algn="l">
               <a:lnSpc>
                 <a:spcPts val="1680"/>
               </a:lnSpc>
@@ -2757,11 +2532,11 @@
           <a:bodyPr wrap="square" rtlCol="0" anchor="ctr"/>
           <a:lstStyle/>
           <a:p>
-            <a:pPr indent="0" marL="0">
-              <a:buNone/>
-            </a:pPr>
-            <a:r>
-              <a:rPr lang="en-US" sz="1100" spc="200" kern="0" dirty="0">
+            <a:pPr marL="0" indent="0">
+              <a:buNone/>
+            </a:pPr>
+            <a:r>
+              <a:rPr lang="en-US" sz="1100" kern="0" spc="200" dirty="0">
                 <a:solidFill>
                   <a:srgbClr val="D4FF00"/>
                 </a:solidFill>
@@ -2794,6 +2569,13 @@
           </a:solidFill>
           <a:ln/>
         </p:spPr>
+        <p:txBody>
+          <a:bodyPr/>
+          <a:lstStyle/>
+          <a:p>
+            <a:endParaRPr lang="en-GB"/>
+          </a:p>
+        </p:txBody>
       </p:sp>
       <p:sp>
         <p:nvSpPr>
@@ -2816,7 +2598,7 @@
           <a:bodyPr wrap="square" rtlCol="0" anchor="ctr"/>
           <a:lstStyle/>
           <a:p>
-            <a:pPr indent="0" marL="0">
+            <a:pPr marL="0" indent="0">
               <a:buNone/>
             </a:pPr>
             <a:r>
@@ -2850,6 +2632,7 @@
         <a:solidFill>
           <a:srgbClr val="0C0C0C"/>
         </a:solidFill>
+        <a:effectLst/>
       </p:bgPr>
     </p:bg>
     <p:spTree>
@@ -2885,6 +2668,13 @@
           </a:solidFill>
           <a:ln/>
         </p:spPr>
+        <p:txBody>
+          <a:bodyPr/>
+          <a:lstStyle/>
+          <a:p>
+            <a:endParaRPr lang="en-GB"/>
+          </a:p>
+        </p:txBody>
       </p:sp>
       <p:sp>
         <p:nvSpPr>
@@ -2907,11 +2697,11 @@
           <a:bodyPr wrap="square" rtlCol="0" anchor="ctr"/>
           <a:lstStyle/>
           <a:p>
-            <a:pPr indent="0" marL="0">
-              <a:buNone/>
-            </a:pPr>
-            <a:r>
-              <a:rPr lang="en-US" sz="1050" spc="400" kern="0" dirty="0">
+            <a:pPr marL="0" indent="0">
+              <a:buNone/>
+            </a:pPr>
+            <a:r>
+              <a:rPr lang="en-US" sz="1050" kern="0" spc="400" dirty="0">
                 <a:solidFill>
                   <a:srgbClr val="A8A29E"/>
                 </a:solidFill>
@@ -2946,7 +2736,7 @@
           <a:bodyPr wrap="square" rtlCol="0" anchor="ctr"/>
           <a:lstStyle/>
           <a:p>
-            <a:pPr indent="0" marL="0">
+            <a:pPr marL="0" indent="0">
               <a:buNone/>
             </a:pPr>
             <a:r>
@@ -2985,11 +2775,11 @@
           <a:bodyPr wrap="square" rtlCol="0" anchor="ctr"/>
           <a:lstStyle/>
           <a:p>
-            <a:pPr indent="0" marL="0">
-              <a:buNone/>
-            </a:pPr>
-            <a:r>
-              <a:rPr lang="en-US" sz="850" spc="200" kern="0" dirty="0">
+            <a:pPr marL="0" indent="0">
+              <a:buNone/>
+            </a:pPr>
+            <a:r>
+              <a:rPr lang="en-US" sz="850" kern="0" spc="200" dirty="0">
                 <a:solidFill>
                   <a:srgbClr val="6B6560"/>
                 </a:solidFill>
@@ -3024,7 +2814,7 @@
           <a:bodyPr wrap="square" rtlCol="0" anchor="ctr"/>
           <a:lstStyle/>
           <a:p>
-            <a:pPr algn="r" indent="0" marL="0">
+            <a:pPr marL="0" indent="0" algn="r">
               <a:buNone/>
             </a:pPr>
             <a:r>
@@ -3058,16 +2848,34 @@
         </p:nvGraphicFramePr>
         <p:xfrm>
           <a:off x="548640" y="1691640"/>
-          <a:ext cx="11064240" cy="914400"/>
+          <a:ext cx="11064240" cy="1652016"/>
         </p:xfrm>
         <a:graphic>
           <a:graphicData uri="http://schemas.openxmlformats.org/drawingml/2006/table">
             <a:tbl>
               <a:tblPr/>
               <a:tblGrid>
-                <a:gridCol w="2011680"/>
-                <a:gridCol w="4206240"/>
-                <a:gridCol w="4846320"/>
+                <a:gridCol w="2011680">
+                  <a:extLst>
+                    <a:ext uri="{9D8B030D-6E8A-4147-A177-3AD203B41FA5}">
+                      <a16:colId xmlns:a16="http://schemas.microsoft.com/office/drawing/2014/main" val="20000"/>
+                    </a:ext>
+                  </a:extLst>
+                </a:gridCol>
+                <a:gridCol w="4206240">
+                  <a:extLst>
+                    <a:ext uri="{9D8B030D-6E8A-4147-A177-3AD203B41FA5}">
+                      <a16:colId xmlns:a16="http://schemas.microsoft.com/office/drawing/2014/main" val="20001"/>
+                    </a:ext>
+                  </a:extLst>
+                </a:gridCol>
+                <a:gridCol w="4846320">
+                  <a:extLst>
+                    <a:ext uri="{9D8B030D-6E8A-4147-A177-3AD203B41FA5}">
+                      <a16:colId xmlns:a16="http://schemas.microsoft.com/office/drawing/2014/main" val="20002"/>
+                    </a:ext>
+                  </a:extLst>
+                </a:gridCol>
               </a:tblGrid>
               <a:tr h="310896">
                 <a:tc>
@@ -3075,7 +2883,7 @@
                     <a:bodyPr/>
                     <a:lstStyle/>
                     <a:p>
-                      <a:pPr indent="0" marL="0">
+                      <a:pPr marL="0" indent="0">
                         <a:buNone/>
                       </a:pPr>
                       <a:endParaRPr lang="en-US" sz="1000" dirty="0">
@@ -3132,11 +2940,11 @@
                     <a:bodyPr/>
                     <a:lstStyle/>
                     <a:p>
-                      <a:pPr indent="0" marL="0">
+                      <a:pPr marL="0" indent="0">
                         <a:buNone/>
                       </a:pPr>
                       <a:r>
-                        <a:rPr lang="en-US" sz="1000" b="1" spc="200" kern="0" dirty="0">
+                        <a:rPr lang="en-US" sz="1000" b="1" kern="0" spc="200" dirty="0">
                           <a:solidFill>
                             <a:srgbClr val="D4FF00"/>
                           </a:solidFill>
@@ -3200,11 +3008,11 @@
                     <a:bodyPr/>
                     <a:lstStyle/>
                     <a:p>
-                      <a:pPr indent="0" marL="0">
+                      <a:pPr marL="0" indent="0">
                         <a:buNone/>
                       </a:pPr>
                       <a:r>
-                        <a:rPr lang="en-US" sz="1000" b="1" spc="200" kern="0" dirty="0">
+                        <a:rPr lang="en-US" sz="1000" b="1" kern="0" spc="200" dirty="0">
                           <a:solidFill>
                             <a:srgbClr val="D4FF00"/>
                           </a:solidFill>
@@ -3263,6 +3071,11 @@
                     </a:solidFill>
                   </a:tcPr>
                 </a:tc>
+                <a:extLst>
+                  <a:ext uri="{0D108BD9-81ED-4DB2-BD59-A6C34878D82A}">
+                    <a16:rowId xmlns:a16="http://schemas.microsoft.com/office/drawing/2014/main" val="10000"/>
+                  </a:ext>
+                </a:extLst>
               </a:tr>
               <a:tr h="310896">
                 <a:tc>
@@ -3270,7 +3083,7 @@
                     <a:bodyPr/>
                     <a:lstStyle/>
                     <a:p>
-                      <a:pPr indent="0" marL="0">
+                      <a:pPr marL="0" indent="0">
                         <a:buNone/>
                       </a:pPr>
                       <a:r>
@@ -3338,7 +3151,7 @@
                     <a:bodyPr/>
                     <a:lstStyle/>
                     <a:p>
-                      <a:pPr indent="0" marL="0">
+                      <a:pPr marL="0" indent="0">
                         <a:buNone/>
                       </a:pPr>
                       <a:r>
@@ -3406,7 +3219,7 @@
                     <a:bodyPr/>
                     <a:lstStyle/>
                     <a:p>
-                      <a:pPr indent="0" marL="0">
+                      <a:pPr marL="0" indent="0">
                         <a:buNone/>
                       </a:pPr>
                       <a:r>
@@ -3469,6 +3282,11 @@
                     </a:solidFill>
                   </a:tcPr>
                 </a:tc>
+                <a:extLst>
+                  <a:ext uri="{0D108BD9-81ED-4DB2-BD59-A6C34878D82A}">
+                    <a16:rowId xmlns:a16="http://schemas.microsoft.com/office/drawing/2014/main" val="10001"/>
+                  </a:ext>
+                </a:extLst>
               </a:tr>
               <a:tr h="310896">
                 <a:tc>
@@ -3476,7 +3294,7 @@
                     <a:bodyPr/>
                     <a:lstStyle/>
                     <a:p>
-                      <a:pPr indent="0" marL="0">
+                      <a:pPr marL="0" indent="0">
                         <a:buNone/>
                       </a:pPr>
                       <a:r>
@@ -3544,7 +3362,7 @@
                     <a:bodyPr/>
                     <a:lstStyle/>
                     <a:p>
-                      <a:pPr indent="0" marL="0">
+                      <a:pPr marL="0" indent="0">
                         <a:buNone/>
                       </a:pPr>
                       <a:r>
@@ -3612,7 +3430,7 @@
                     <a:bodyPr/>
                     <a:lstStyle/>
                     <a:p>
-                      <a:pPr indent="0" marL="0">
+                      <a:pPr marL="0" indent="0">
                         <a:buNone/>
                       </a:pPr>
                       <a:r>
@@ -3675,6 +3493,11 @@
                     </a:solidFill>
                   </a:tcPr>
                 </a:tc>
+                <a:extLst>
+                  <a:ext uri="{0D108BD9-81ED-4DB2-BD59-A6C34878D82A}">
+                    <a16:rowId xmlns:a16="http://schemas.microsoft.com/office/drawing/2014/main" val="10002"/>
+                  </a:ext>
+                </a:extLst>
               </a:tr>
               <a:tr h="310896">
                 <a:tc>
@@ -3682,7 +3505,7 @@
                     <a:bodyPr/>
                     <a:lstStyle/>
                     <a:p>
-                      <a:pPr indent="0" marL="0">
+                      <a:pPr marL="0" indent="0">
                         <a:buNone/>
                       </a:pPr>
                       <a:r>
@@ -3750,7 +3573,7 @@
                     <a:bodyPr/>
                     <a:lstStyle/>
                     <a:p>
-                      <a:pPr indent="0" marL="0">
+                      <a:pPr marL="0" indent="0">
                         <a:buNone/>
                       </a:pPr>
                       <a:r>
@@ -3818,7 +3641,7 @@
                     <a:bodyPr/>
                     <a:lstStyle/>
                     <a:p>
-                      <a:pPr indent="0" marL="0">
+                      <a:pPr marL="0" indent="0">
                         <a:buNone/>
                       </a:pPr>
                       <a:r>
@@ -3881,6 +3704,11 @@
                     </a:solidFill>
                   </a:tcPr>
                 </a:tc>
+                <a:extLst>
+                  <a:ext uri="{0D108BD9-81ED-4DB2-BD59-A6C34878D82A}">
+                    <a16:rowId xmlns:a16="http://schemas.microsoft.com/office/drawing/2014/main" val="10003"/>
+                  </a:ext>
+                </a:extLst>
               </a:tr>
               <a:tr h="310896">
                 <a:tc>
@@ -3888,7 +3716,7 @@
                     <a:bodyPr/>
                     <a:lstStyle/>
                     <a:p>
-                      <a:pPr indent="0" marL="0">
+                      <a:pPr marL="0" indent="0">
                         <a:buNone/>
                       </a:pPr>
                       <a:r>
@@ -3956,7 +3784,7 @@
                     <a:bodyPr/>
                     <a:lstStyle/>
                     <a:p>
-                      <a:pPr indent="0" marL="0">
+                      <a:pPr marL="0" indent="0">
                         <a:buNone/>
                       </a:pPr>
                       <a:r>
@@ -4024,7 +3852,7 @@
                     <a:bodyPr/>
                     <a:lstStyle/>
                     <a:p>
-                      <a:pPr indent="0" marL="0">
+                      <a:pPr marL="0" indent="0">
                         <a:buNone/>
                       </a:pPr>
                       <a:r>
@@ -4087,6 +3915,11 @@
                     </a:solidFill>
                   </a:tcPr>
                 </a:tc>
+                <a:extLst>
+                  <a:ext uri="{0D108BD9-81ED-4DB2-BD59-A6C34878D82A}">
+                    <a16:rowId xmlns:a16="http://schemas.microsoft.com/office/drawing/2014/main" val="10004"/>
+                  </a:ext>
+                </a:extLst>
               </a:tr>
             </a:tbl>
           </a:graphicData>
@@ -4119,7 +3952,7 @@
           <a:bodyPr wrap="square" lIns="127000" tIns="127000" rIns="127000" bIns="127000" rtlCol="0" anchor="t"/>
           <a:lstStyle/>
           <a:p>
-            <a:pPr algn="l" indent="0" marL="0">
+            <a:pPr marL="0" indent="0" algn="l">
               <a:lnSpc>
                 <a:spcPts val="1418"/>
               </a:lnSpc>
@@ -4139,7 +3972,7 @@
             <a:endParaRPr lang="en-US" sz="1050" dirty="0"/>
           </a:p>
           <a:p>
-            <a:pPr algn="l" indent="0" marL="0">
+            <a:pPr marL="0" indent="0" algn="l">
               <a:lnSpc>
                 <a:spcPts val="1418"/>
               </a:lnSpc>
@@ -4159,7 +3992,7 @@
             <a:endParaRPr lang="en-US" sz="1050" dirty="0"/>
           </a:p>
           <a:p>
-            <a:pPr algn="l" indent="0" marL="0">
+            <a:pPr marL="0" indent="0" algn="l">
               <a:lnSpc>
                 <a:spcPts val="1418"/>
               </a:lnSpc>
@@ -4179,7 +4012,7 @@
             <a:endParaRPr lang="en-US" sz="1050" dirty="0"/>
           </a:p>
           <a:p>
-            <a:pPr algn="l" indent="0" marL="0">
+            <a:pPr marL="0" indent="0" algn="l">
               <a:lnSpc>
                 <a:spcPts val="1418"/>
               </a:lnSpc>
@@ -4199,7 +4032,7 @@
             <a:endParaRPr lang="en-US" sz="1050" dirty="0"/>
           </a:p>
           <a:p>
-            <a:pPr algn="l" indent="0" marL="0">
+            <a:pPr marL="0" indent="0" algn="l">
               <a:lnSpc>
                 <a:spcPts val="1418"/>
               </a:lnSpc>
@@ -4239,10 +4072,17 @@
           </a:solidFill>
           <a:ln/>
         </p:spPr>
+        <p:txBody>
+          <a:bodyPr/>
+          <a:lstStyle/>
+          <a:p>
+            <a:endParaRPr lang="en-GB"/>
+          </a:p>
+        </p:txBody>
       </p:sp>
       <p:sp>
         <p:nvSpPr>
-          <p:cNvPr id="11" name="Text 7"/>
+          <p:cNvPr id="7" name="Text 7"/>
           <p:cNvSpPr/>
           <p:nvPr/>
         </p:nvSpPr>
@@ -4261,7 +4101,7 @@
           <a:bodyPr wrap="square" rtlCol="0" anchor="ctr"/>
           <a:lstStyle/>
           <a:p>
-            <a:pPr indent="0" marL="0">
+            <a:pPr marL="0" indent="0">
               <a:buNone/>
             </a:pPr>
             <a:r>
@@ -4295,6 +4135,7 @@
         <a:solidFill>
           <a:srgbClr val="0C0C0C"/>
         </a:solidFill>
+        <a:effectLst/>
       </p:bgPr>
     </p:bg>
     <p:spTree>
@@ -4330,6 +4171,13 @@
           </a:solidFill>
           <a:ln/>
         </p:spPr>
+        <p:txBody>
+          <a:bodyPr/>
+          <a:lstStyle/>
+          <a:p>
+            <a:endParaRPr lang="en-GB"/>
+          </a:p>
+        </p:txBody>
       </p:sp>
       <p:sp>
         <p:nvSpPr>
@@ -4352,11 +4200,11 @@
           <a:bodyPr wrap="square" rtlCol="0" anchor="ctr"/>
           <a:lstStyle/>
           <a:p>
-            <a:pPr indent="0" marL="0">
-              <a:buNone/>
-            </a:pPr>
-            <a:r>
-              <a:rPr lang="en-US" sz="1050" spc="400" kern="0" dirty="0">
+            <a:pPr marL="0" indent="0">
+              <a:buNone/>
+            </a:pPr>
+            <a:r>
+              <a:rPr lang="en-US" sz="1050" kern="0" spc="400" dirty="0">
                 <a:solidFill>
                   <a:srgbClr val="A8A29E"/>
                 </a:solidFill>
@@ -4391,7 +4239,7 @@
           <a:bodyPr wrap="square" rtlCol="0" anchor="ctr"/>
           <a:lstStyle/>
           <a:p>
-            <a:pPr indent="0" marL="0">
+            <a:pPr marL="0" indent="0">
               <a:buNone/>
             </a:pPr>
             <a:r>
@@ -4430,11 +4278,11 @@
           <a:bodyPr wrap="square" rtlCol="0" anchor="ctr"/>
           <a:lstStyle/>
           <a:p>
-            <a:pPr indent="0" marL="0">
-              <a:buNone/>
-            </a:pPr>
-            <a:r>
-              <a:rPr lang="en-US" sz="850" spc="200" kern="0" dirty="0">
+            <a:pPr marL="0" indent="0">
+              <a:buNone/>
+            </a:pPr>
+            <a:r>
+              <a:rPr lang="en-US" sz="850" kern="0" spc="200" dirty="0">
                 <a:solidFill>
                   <a:srgbClr val="6B6560"/>
                 </a:solidFill>
@@ -4469,7 +4317,7 @@
           <a:bodyPr wrap="square" rtlCol="0" anchor="ctr"/>
           <a:lstStyle/>
           <a:p>
-            <a:pPr algn="r" indent="0" marL="0">
+            <a:pPr marL="0" indent="0" algn="r">
               <a:buNone/>
             </a:pPr>
             <a:r>
@@ -4514,7 +4362,7 @@
           <a:bodyPr wrap="square" lIns="127000" tIns="127000" rIns="127000" bIns="127000" rtlCol="0" anchor="t"/>
           <a:lstStyle/>
           <a:p>
-            <a:pPr algn="l" indent="0" marL="0">
+            <a:pPr marL="0" indent="0" algn="l">
               <a:lnSpc>
                 <a:spcPts val="1350"/>
               </a:lnSpc>
@@ -4534,7 +4382,7 @@
             <a:endParaRPr lang="en-US" sz="1000" dirty="0"/>
           </a:p>
           <a:p>
-            <a:pPr algn="l" indent="0" marL="0">
+            <a:pPr marL="0" indent="0" algn="l">
               <a:lnSpc>
                 <a:spcPts val="1350"/>
               </a:lnSpc>
@@ -4554,7 +4402,7 @@
             <a:endParaRPr lang="en-US" sz="1000" dirty="0"/>
           </a:p>
           <a:p>
-            <a:pPr algn="l" indent="0" marL="0">
+            <a:pPr marL="0" indent="0" algn="l">
               <a:lnSpc>
                 <a:spcPts val="1350"/>
               </a:lnSpc>
@@ -4574,7 +4422,7 @@
             <a:endParaRPr lang="en-US" sz="1000" dirty="0"/>
           </a:p>
           <a:p>
-            <a:pPr algn="l" indent="0" marL="0">
+            <a:pPr marL="0" indent="0" algn="l">
               <a:lnSpc>
                 <a:spcPts val="1350"/>
               </a:lnSpc>
@@ -4594,7 +4442,7 @@
             <a:endParaRPr lang="en-US" sz="1000" dirty="0"/>
           </a:p>
           <a:p>
-            <a:pPr algn="l" indent="0" marL="0">
+            <a:pPr marL="0" indent="0" algn="l">
               <a:lnSpc>
                 <a:spcPts val="1350"/>
               </a:lnSpc>
@@ -4614,7 +4462,7 @@
             <a:endParaRPr lang="en-US" sz="1000" dirty="0"/>
           </a:p>
           <a:p>
-            <a:pPr algn="l" indent="0" marL="0">
+            <a:pPr marL="0" indent="0" algn="l">
               <a:lnSpc>
                 <a:spcPts val="1350"/>
               </a:lnSpc>
@@ -4623,7 +4471,7 @@
             <a:endParaRPr lang="en-US" sz="1000" dirty="0"/>
           </a:p>
           <a:p>
-            <a:pPr algn="l" indent="0" marL="0">
+            <a:pPr marL="0" indent="0" algn="l">
               <a:lnSpc>
                 <a:spcPts val="1350"/>
               </a:lnSpc>
@@ -4643,7 +4491,7 @@
             <a:endParaRPr lang="en-US" sz="1000" dirty="0"/>
           </a:p>
           <a:p>
-            <a:pPr algn="l" indent="0" marL="0">
+            <a:pPr marL="0" indent="0" algn="l">
               <a:lnSpc>
                 <a:spcPts val="1350"/>
               </a:lnSpc>
@@ -4663,7 +4511,7 @@
             <a:endParaRPr lang="en-US" sz="1000" dirty="0"/>
           </a:p>
           <a:p>
-            <a:pPr algn="l" indent="0" marL="0">
+            <a:pPr marL="0" indent="0" algn="l">
               <a:lnSpc>
                 <a:spcPts val="1350"/>
               </a:lnSpc>
@@ -4683,7 +4531,7 @@
             <a:endParaRPr lang="en-US" sz="1000" dirty="0"/>
           </a:p>
           <a:p>
-            <a:pPr algn="l" indent="0" marL="0">
+            <a:pPr marL="0" indent="0" algn="l">
               <a:lnSpc>
                 <a:spcPts val="1350"/>
               </a:lnSpc>
@@ -4703,7 +4551,7 @@
             <a:endParaRPr lang="en-US" sz="1000" dirty="0"/>
           </a:p>
           <a:p>
-            <a:pPr algn="l" indent="0" marL="0">
+            <a:pPr marL="0" indent="0" algn="l">
               <a:lnSpc>
                 <a:spcPts val="1350"/>
               </a:lnSpc>
@@ -4723,7 +4571,7 @@
             <a:endParaRPr lang="en-US" sz="1000" dirty="0"/>
           </a:p>
           <a:p>
-            <a:pPr algn="l" indent="0" marL="0">
+            <a:pPr marL="0" indent="0" algn="l">
               <a:lnSpc>
                 <a:spcPts val="1350"/>
               </a:lnSpc>
@@ -4743,7 +4591,7 @@
             <a:endParaRPr lang="en-US" sz="1000" dirty="0"/>
           </a:p>
           <a:p>
-            <a:pPr algn="l" indent="0" marL="0">
+            <a:pPr marL="0" indent="0" algn="l">
               <a:lnSpc>
                 <a:spcPts val="1350"/>
               </a:lnSpc>
@@ -4918,7 +4766,7 @@
           <a:bodyPr wrap="square" lIns="127000" tIns="127000" rIns="127000" bIns="127000" rtlCol="0" anchor="t"/>
           <a:lstStyle/>
           <a:p>
-            <a:pPr algn="l" indent="0" marL="0">
+            <a:pPr marL="0" indent="0" algn="l">
               <a:lnSpc>
                 <a:spcPts val="1215"/>
               </a:lnSpc>
@@ -4938,7 +4786,7 @@
             <a:endParaRPr lang="en-US" sz="900" dirty="0"/>
           </a:p>
           <a:p>
-            <a:pPr algn="l" indent="0" marL="0">
+            <a:pPr marL="0" indent="0" algn="l">
               <a:lnSpc>
                 <a:spcPts val="1215"/>
               </a:lnSpc>
@@ -4958,7 +4806,7 @@
             <a:endParaRPr lang="en-US" sz="900" dirty="0"/>
           </a:p>
           <a:p>
-            <a:pPr algn="l" indent="0" marL="0">
+            <a:pPr marL="0" indent="0" algn="l">
               <a:lnSpc>
                 <a:spcPts val="1215"/>
               </a:lnSpc>
@@ -4978,7 +4826,7 @@
             <a:endParaRPr lang="en-US" sz="900" dirty="0"/>
           </a:p>
           <a:p>
-            <a:pPr algn="l" indent="0" marL="0">
+            <a:pPr marL="0" indent="0" algn="l">
               <a:lnSpc>
                 <a:spcPts val="1215"/>
               </a:lnSpc>
@@ -4998,7 +4846,7 @@
             <a:endParaRPr lang="en-US" sz="900" dirty="0"/>
           </a:p>
           <a:p>
-            <a:pPr algn="l" indent="0" marL="0">
+            <a:pPr marL="0" indent="0" algn="l">
               <a:lnSpc>
                 <a:spcPts val="1215"/>
               </a:lnSpc>
@@ -5018,7 +4866,7 @@
             <a:endParaRPr lang="en-US" sz="900" dirty="0"/>
           </a:p>
           <a:p>
-            <a:pPr algn="l" indent="0" marL="0">
+            <a:pPr marL="0" indent="0" algn="l">
               <a:lnSpc>
                 <a:spcPts val="1215"/>
               </a:lnSpc>
@@ -5038,7 +4886,7 @@
             <a:endParaRPr lang="en-US" sz="900" dirty="0"/>
           </a:p>
           <a:p>
-            <a:pPr algn="l" indent="0" marL="0">
+            <a:pPr marL="0" indent="0" algn="l">
               <a:lnSpc>
                 <a:spcPts val="1215"/>
               </a:lnSpc>
@@ -5075,6 +4923,7 @@
         <a:solidFill>
           <a:srgbClr val="0C0C0C"/>
         </a:solidFill>
+        <a:effectLst/>
       </p:bgPr>
     </p:bg>
     <p:spTree>
@@ -5110,6 +4959,13 @@
           </a:solidFill>
           <a:ln/>
         </p:spPr>
+        <p:txBody>
+          <a:bodyPr/>
+          <a:lstStyle/>
+          <a:p>
+            <a:endParaRPr lang="en-GB"/>
+          </a:p>
+        </p:txBody>
       </p:sp>
       <p:sp>
         <p:nvSpPr>
@@ -5132,11 +4988,11 @@
           <a:bodyPr wrap="square" rtlCol="0" anchor="ctr"/>
           <a:lstStyle/>
           <a:p>
-            <a:pPr indent="0" marL="0">
-              <a:buNone/>
-            </a:pPr>
-            <a:r>
-              <a:rPr lang="en-US" sz="1050" spc="400" kern="0" dirty="0">
+            <a:pPr marL="0" indent="0">
+              <a:buNone/>
+            </a:pPr>
+            <a:r>
+              <a:rPr lang="en-US" sz="1050" kern="0" spc="400" dirty="0">
                 <a:solidFill>
                   <a:srgbClr val="A8A29E"/>
                 </a:solidFill>
@@ -5171,7 +5027,7 @@
           <a:bodyPr wrap="square" rtlCol="0" anchor="ctr"/>
           <a:lstStyle/>
           <a:p>
-            <a:pPr indent="0" marL="0">
+            <a:pPr marL="0" indent="0">
               <a:buNone/>
             </a:pPr>
             <a:r>
@@ -5210,11 +5066,11 @@
           <a:bodyPr wrap="square" rtlCol="0" anchor="ctr"/>
           <a:lstStyle/>
           <a:p>
-            <a:pPr indent="0" marL="0">
-              <a:buNone/>
-            </a:pPr>
-            <a:r>
-              <a:rPr lang="en-US" sz="850" spc="200" kern="0" dirty="0">
+            <a:pPr marL="0" indent="0">
+              <a:buNone/>
+            </a:pPr>
+            <a:r>
+              <a:rPr lang="en-US" sz="850" kern="0" spc="200" dirty="0">
                 <a:solidFill>
                   <a:srgbClr val="6B6560"/>
                 </a:solidFill>
@@ -5249,7 +5105,7 @@
           <a:bodyPr wrap="square" rtlCol="0" anchor="ctr"/>
           <a:lstStyle/>
           <a:p>
-            <a:pPr algn="r" indent="0" marL="0">
+            <a:pPr marL="0" indent="0" algn="r">
               <a:buNone/>
             </a:pPr>
             <a:r>
@@ -5288,7 +5144,7 @@
           <a:bodyPr wrap="square" rtlCol="0" anchor="t"/>
           <a:lstStyle/>
           <a:p>
-            <a:pPr algn="l" indent="0" marL="0">
+            <a:pPr marL="0" indent="0" algn="l">
               <a:lnSpc>
                 <a:spcPts val="1680"/>
               </a:lnSpc>
@@ -5308,7 +5164,7 @@
             <a:endParaRPr lang="en-US" sz="1200" dirty="0"/>
           </a:p>
           <a:p>
-            <a:pPr algn="l" indent="0" marL="0">
+            <a:pPr marL="0" indent="0" algn="l">
               <a:lnSpc>
                 <a:spcPts val="1680"/>
               </a:lnSpc>
@@ -5328,7 +5184,7 @@
             <a:endParaRPr lang="en-US" sz="1200" dirty="0"/>
           </a:p>
           <a:p>
-            <a:pPr algn="l" indent="0" marL="0">
+            <a:pPr marL="0" indent="0" algn="l">
               <a:lnSpc>
                 <a:spcPts val="1680"/>
               </a:lnSpc>
@@ -5348,7 +5204,7 @@
             <a:endParaRPr lang="en-US" sz="1200" dirty="0"/>
           </a:p>
           <a:p>
-            <a:pPr algn="l" indent="0" marL="0">
+            <a:pPr marL="0" indent="0" algn="l">
               <a:lnSpc>
                 <a:spcPts val="1680"/>
               </a:lnSpc>
@@ -5368,7 +5224,7 @@
             <a:endParaRPr lang="en-US" sz="1200" dirty="0"/>
           </a:p>
           <a:p>
-            <a:pPr algn="l" indent="0" marL="0">
+            <a:pPr marL="0" indent="0" algn="l">
               <a:lnSpc>
                 <a:spcPts val="1680"/>
               </a:lnSpc>
@@ -5388,7 +5244,7 @@
             <a:endParaRPr lang="en-US" sz="1200" dirty="0"/>
           </a:p>
           <a:p>
-            <a:pPr algn="l" indent="0" marL="0">
+            <a:pPr marL="0" indent="0" algn="l">
               <a:lnSpc>
                 <a:spcPts val="1680"/>
               </a:lnSpc>
@@ -5408,7 +5264,7 @@
             <a:endParaRPr lang="en-US" sz="1200" dirty="0"/>
           </a:p>
           <a:p>
-            <a:pPr algn="l" indent="0" marL="0">
+            <a:pPr marL="0" indent="0" algn="l">
               <a:lnSpc>
                 <a:spcPts val="1680"/>
               </a:lnSpc>
@@ -5428,7 +5284,7 @@
             <a:endParaRPr lang="en-US" sz="1200" dirty="0"/>
           </a:p>
           <a:p>
-            <a:pPr algn="l" indent="0" marL="0">
+            <a:pPr marL="0" indent="0" algn="l">
               <a:lnSpc>
                 <a:spcPts val="1680"/>
               </a:lnSpc>
@@ -5476,7 +5332,7 @@
           <a:bodyPr wrap="square" lIns="127000" tIns="127000" rIns="127000" bIns="127000" rtlCol="0" anchor="t"/>
           <a:lstStyle/>
           <a:p>
-            <a:pPr algn="l" indent="0" marL="0">
+            <a:pPr marL="0" indent="0" algn="l">
               <a:lnSpc>
                 <a:spcPts val="1283"/>
               </a:lnSpc>
@@ -5496,7 +5352,7 @@
             <a:endParaRPr lang="en-US" sz="950" dirty="0"/>
           </a:p>
           <a:p>
-            <a:pPr algn="l" indent="0" marL="0">
+            <a:pPr marL="0" indent="0" algn="l">
               <a:lnSpc>
                 <a:spcPts val="1283"/>
               </a:lnSpc>
@@ -5516,7 +5372,7 @@
             <a:endParaRPr lang="en-US" sz="950" dirty="0"/>
           </a:p>
           <a:p>
-            <a:pPr algn="l" indent="0" marL="0">
+            <a:pPr marL="0" indent="0" algn="l">
               <a:lnSpc>
                 <a:spcPts val="1283"/>
               </a:lnSpc>
@@ -5536,7 +5392,7 @@
             <a:endParaRPr lang="en-US" sz="950" dirty="0"/>
           </a:p>
           <a:p>
-            <a:pPr algn="l" indent="0" marL="0">
+            <a:pPr marL="0" indent="0" algn="l">
               <a:lnSpc>
                 <a:spcPts val="1283"/>
               </a:lnSpc>
@@ -5545,7 +5401,7 @@
             <a:endParaRPr lang="en-US" sz="950" dirty="0"/>
           </a:p>
           <a:p>
-            <a:pPr algn="l" indent="0" marL="0">
+            <a:pPr marL="0" indent="0" algn="l">
               <a:lnSpc>
                 <a:spcPts val="1283"/>
               </a:lnSpc>
@@ -5565,7 +5421,7 @@
             <a:endParaRPr lang="en-US" sz="950" dirty="0"/>
           </a:p>
           <a:p>
-            <a:pPr algn="l" indent="0" marL="0">
+            <a:pPr marL="0" indent="0" algn="l">
               <a:lnSpc>
                 <a:spcPts val="1283"/>
               </a:lnSpc>
@@ -5585,7 +5441,7 @@
             <a:endParaRPr lang="en-US" sz="950" dirty="0"/>
           </a:p>
           <a:p>
-            <a:pPr algn="l" indent="0" marL="0">
+            <a:pPr marL="0" indent="0" algn="l">
               <a:lnSpc>
                 <a:spcPts val="1283"/>
               </a:lnSpc>
@@ -5605,7 +5461,7 @@
             <a:endParaRPr lang="en-US" sz="950" dirty="0"/>
           </a:p>
           <a:p>
-            <a:pPr algn="l" indent="0" marL="0">
+            <a:pPr marL="0" indent="0" algn="l">
               <a:lnSpc>
                 <a:spcPts val="1283"/>
               </a:lnSpc>
@@ -5625,7 +5481,7 @@
             <a:endParaRPr lang="en-US" sz="950" dirty="0"/>
           </a:p>
           <a:p>
-            <a:pPr algn="l" indent="0" marL="0">
+            <a:pPr marL="0" indent="0" algn="l">
               <a:lnSpc>
                 <a:spcPts val="1283"/>
               </a:lnSpc>
@@ -5645,7 +5501,7 @@
             <a:endParaRPr lang="en-US" sz="950" dirty="0"/>
           </a:p>
           <a:p>
-            <a:pPr algn="l" indent="0" marL="0">
+            <a:pPr marL="0" indent="0" algn="l">
               <a:lnSpc>
                 <a:spcPts val="1283"/>
               </a:lnSpc>
@@ -5665,7 +5521,7 @@
             <a:endParaRPr lang="en-US" sz="950" dirty="0"/>
           </a:p>
           <a:p>
-            <a:pPr algn="l" indent="0" marL="0">
+            <a:pPr marL="0" indent="0" algn="l">
               <a:lnSpc>
                 <a:spcPts val="1283"/>
               </a:lnSpc>
@@ -5674,7 +5530,7 @@
             <a:endParaRPr lang="en-US" sz="950" dirty="0"/>
           </a:p>
           <a:p>
-            <a:pPr algn="l" indent="0" marL="0">
+            <a:pPr marL="0" indent="0" algn="l">
               <a:lnSpc>
                 <a:spcPts val="1283"/>
               </a:lnSpc>
@@ -5694,7 +5550,7 @@
             <a:endParaRPr lang="en-US" sz="950" dirty="0"/>
           </a:p>
           <a:p>
-            <a:pPr algn="l" indent="0" marL="0">
+            <a:pPr marL="0" indent="0" algn="l">
               <a:lnSpc>
                 <a:spcPts val="1283"/>
               </a:lnSpc>
@@ -5734,6 +5590,13 @@
           </a:solidFill>
           <a:ln/>
         </p:spPr>
+        <p:txBody>
+          <a:bodyPr/>
+          <a:lstStyle/>
+          <a:p>
+            <a:endParaRPr lang="en-GB"/>
+          </a:p>
+        </p:txBody>
       </p:sp>
       <p:sp>
         <p:nvSpPr>
@@ -5756,7 +5619,7 @@
           <a:bodyPr wrap="square" rtlCol="0" anchor="ctr"/>
           <a:lstStyle/>
           <a:p>
-            <a:pPr indent="0" marL="0">
+            <a:pPr marL="0" indent="0">
               <a:buNone/>
             </a:pPr>
             <a:r>
@@ -5790,6 +5653,7 @@
         <a:solidFill>
           <a:srgbClr val="0C0C0C"/>
         </a:solidFill>
+        <a:effectLst/>
       </p:bgPr>
     </p:bg>
     <p:spTree>
@@ -5825,6 +5689,13 @@
           </a:solidFill>
           <a:ln/>
         </p:spPr>
+        <p:txBody>
+          <a:bodyPr/>
+          <a:lstStyle/>
+          <a:p>
+            <a:endParaRPr lang="en-GB"/>
+          </a:p>
+        </p:txBody>
       </p:sp>
       <p:sp>
         <p:nvSpPr>
@@ -5847,11 +5718,11 @@
           <a:bodyPr wrap="square" rtlCol="0" anchor="ctr"/>
           <a:lstStyle/>
           <a:p>
-            <a:pPr indent="0" marL="0">
-              <a:buNone/>
-            </a:pPr>
-            <a:r>
-              <a:rPr lang="en-US" sz="1050" spc="400" kern="0" dirty="0">
+            <a:pPr marL="0" indent="0">
+              <a:buNone/>
+            </a:pPr>
+            <a:r>
+              <a:rPr lang="en-US" sz="1050" kern="0" spc="400" dirty="0">
                 <a:solidFill>
                   <a:srgbClr val="A8A29E"/>
                 </a:solidFill>
@@ -5886,7 +5757,7 @@
           <a:bodyPr wrap="square" rtlCol="0" anchor="ctr"/>
           <a:lstStyle/>
           <a:p>
-            <a:pPr indent="0" marL="0">
+            <a:pPr marL="0" indent="0">
               <a:buNone/>
             </a:pPr>
             <a:r>
@@ -5925,11 +5796,11 @@
           <a:bodyPr wrap="square" rtlCol="0" anchor="ctr"/>
           <a:lstStyle/>
           <a:p>
-            <a:pPr indent="0" marL="0">
-              <a:buNone/>
-            </a:pPr>
-            <a:r>
-              <a:rPr lang="en-US" sz="850" spc="200" kern="0" dirty="0">
+            <a:pPr marL="0" indent="0">
+              <a:buNone/>
+            </a:pPr>
+            <a:r>
+              <a:rPr lang="en-US" sz="850" kern="0" spc="200" dirty="0">
                 <a:solidFill>
                   <a:srgbClr val="6B6560"/>
                 </a:solidFill>
@@ -5964,7 +5835,7 @@
           <a:bodyPr wrap="square" rtlCol="0" anchor="ctr"/>
           <a:lstStyle/>
           <a:p>
-            <a:pPr algn="r" indent="0" marL="0">
+            <a:pPr marL="0" indent="0" algn="r">
               <a:buNone/>
             </a:pPr>
             <a:r>
@@ -6009,7 +5880,7 @@
           <a:bodyPr wrap="square" lIns="127000" tIns="127000" rIns="127000" bIns="127000" rtlCol="0" anchor="t"/>
           <a:lstStyle/>
           <a:p>
-            <a:pPr algn="l" indent="0" marL="0">
+            <a:pPr marL="0" indent="0" algn="l">
               <a:lnSpc>
                 <a:spcPts val="1350"/>
               </a:lnSpc>
@@ -6029,7 +5900,7 @@
             <a:endParaRPr lang="en-US" sz="1000" dirty="0"/>
           </a:p>
           <a:p>
-            <a:pPr algn="l" indent="0" marL="0">
+            <a:pPr marL="0" indent="0" algn="l">
               <a:lnSpc>
                 <a:spcPts val="1350"/>
               </a:lnSpc>
@@ -6049,7 +5920,7 @@
             <a:endParaRPr lang="en-US" sz="1000" dirty="0"/>
           </a:p>
           <a:p>
-            <a:pPr algn="l" indent="0" marL="0">
+            <a:pPr marL="0" indent="0" algn="l">
               <a:lnSpc>
                 <a:spcPts val="1350"/>
               </a:lnSpc>
@@ -6069,7 +5940,7 @@
             <a:endParaRPr lang="en-US" sz="1000" dirty="0"/>
           </a:p>
           <a:p>
-            <a:pPr algn="l" indent="0" marL="0">
+            <a:pPr marL="0" indent="0" algn="l">
               <a:lnSpc>
                 <a:spcPts val="1350"/>
               </a:lnSpc>
@@ -6089,7 +5960,7 @@
             <a:endParaRPr lang="en-US" sz="1000" dirty="0"/>
           </a:p>
           <a:p>
-            <a:pPr algn="l" indent="0" marL="0">
+            <a:pPr marL="0" indent="0" algn="l">
               <a:lnSpc>
                 <a:spcPts val="1350"/>
               </a:lnSpc>
@@ -6109,7 +5980,7 @@
             <a:endParaRPr lang="en-US" sz="1000" dirty="0"/>
           </a:p>
           <a:p>
-            <a:pPr algn="l" indent="0" marL="0">
+            <a:pPr marL="0" indent="0" algn="l">
               <a:lnSpc>
                 <a:spcPts val="1350"/>
               </a:lnSpc>
@@ -6129,7 +6000,7 @@
             <a:endParaRPr lang="en-US" sz="1000" dirty="0"/>
           </a:p>
           <a:p>
-            <a:pPr algn="l" indent="0" marL="0">
+            <a:pPr marL="0" indent="0" algn="l">
               <a:lnSpc>
                 <a:spcPts val="1350"/>
               </a:lnSpc>
@@ -6138,7 +6009,7 @@
             <a:endParaRPr lang="en-US" sz="1000" dirty="0"/>
           </a:p>
           <a:p>
-            <a:pPr algn="l" indent="0" marL="0">
+            <a:pPr marL="0" indent="0" algn="l">
               <a:lnSpc>
                 <a:spcPts val="1350"/>
               </a:lnSpc>
@@ -6158,7 +6029,7 @@
             <a:endParaRPr lang="en-US" sz="1000" dirty="0"/>
           </a:p>
           <a:p>
-            <a:pPr algn="l" indent="0" marL="0">
+            <a:pPr marL="0" indent="0" algn="l">
               <a:lnSpc>
                 <a:spcPts val="1350"/>
               </a:lnSpc>
@@ -6178,7 +6049,7 @@
             <a:endParaRPr lang="en-US" sz="1000" dirty="0"/>
           </a:p>
           <a:p>
-            <a:pPr algn="l" indent="0" marL="0">
+            <a:pPr marL="0" indent="0" algn="l">
               <a:lnSpc>
                 <a:spcPts val="1350"/>
               </a:lnSpc>
@@ -6187,7 +6058,7 @@
             <a:endParaRPr lang="en-US" sz="1000" dirty="0"/>
           </a:p>
           <a:p>
-            <a:pPr algn="l" indent="0" marL="0">
+            <a:pPr marL="0" indent="0" algn="l">
               <a:lnSpc>
                 <a:spcPts val="1350"/>
               </a:lnSpc>
@@ -6207,7 +6078,7 @@
             <a:endParaRPr lang="en-US" sz="1000" dirty="0"/>
           </a:p>
           <a:p>
-            <a:pPr algn="l" indent="0" marL="0">
+            <a:pPr marL="0" indent="0" algn="l">
               <a:lnSpc>
                 <a:spcPts val="1350"/>
               </a:lnSpc>
@@ -6244,16 +6115,34 @@
         </p:nvGraphicFramePr>
         <p:xfrm>
           <a:off x="548640" y="4754880"/>
-          <a:ext cx="11064240" cy="914400"/>
+          <a:ext cx="11064240" cy="1293876"/>
         </p:xfrm>
         <a:graphic>
           <a:graphicData uri="http://schemas.openxmlformats.org/drawingml/2006/table">
             <a:tbl>
               <a:tblPr/>
               <a:tblGrid>
-                <a:gridCol w="1645920"/>
-                <a:gridCol w="5760720"/>
-                <a:gridCol w="3657600"/>
+                <a:gridCol w="1645920">
+                  <a:extLst>
+                    <a:ext uri="{9D8B030D-6E8A-4147-A177-3AD203B41FA5}">
+                      <a16:colId xmlns:a16="http://schemas.microsoft.com/office/drawing/2014/main" val="20000"/>
+                    </a:ext>
+                  </a:extLst>
+                </a:gridCol>
+                <a:gridCol w="5760720">
+                  <a:extLst>
+                    <a:ext uri="{9D8B030D-6E8A-4147-A177-3AD203B41FA5}">
+                      <a16:colId xmlns:a16="http://schemas.microsoft.com/office/drawing/2014/main" val="20001"/>
+                    </a:ext>
+                  </a:extLst>
+                </a:gridCol>
+                <a:gridCol w="3657600">
+                  <a:extLst>
+                    <a:ext uri="{9D8B030D-6E8A-4147-A177-3AD203B41FA5}">
+                      <a16:colId xmlns:a16="http://schemas.microsoft.com/office/drawing/2014/main" val="20002"/>
+                    </a:ext>
+                  </a:extLst>
+                </a:gridCol>
               </a:tblGrid>
               <a:tr h="310896">
                 <a:tc>
@@ -6261,11 +6150,11 @@
                     <a:bodyPr/>
                     <a:lstStyle/>
                     <a:p>
-                      <a:pPr indent="0" marL="0">
+                      <a:pPr marL="0" indent="0">
                         <a:buNone/>
                       </a:pPr>
                       <a:r>
-                        <a:rPr lang="en-US" sz="950" b="1" spc="200" kern="0" dirty="0">
+                        <a:rPr lang="en-US" sz="950" b="1" kern="0" spc="200" dirty="0">
                           <a:solidFill>
                             <a:srgbClr val="D4FF00"/>
                           </a:solidFill>
@@ -6329,11 +6218,11 @@
                     <a:bodyPr/>
                     <a:lstStyle/>
                     <a:p>
-                      <a:pPr indent="0" marL="0">
+                      <a:pPr marL="0" indent="0">
                         <a:buNone/>
                       </a:pPr>
                       <a:r>
-                        <a:rPr lang="en-US" sz="950" b="1" spc="200" kern="0" dirty="0">
+                        <a:rPr lang="en-US" sz="950" b="1" kern="0" spc="200" dirty="0">
                           <a:solidFill>
                             <a:srgbClr val="D4FF00"/>
                           </a:solidFill>
@@ -6397,11 +6286,11 @@
                     <a:bodyPr/>
                     <a:lstStyle/>
                     <a:p>
-                      <a:pPr indent="0" marL="0">
+                      <a:pPr marL="0" indent="0">
                         <a:buNone/>
                       </a:pPr>
                       <a:r>
-                        <a:rPr lang="en-US" sz="950" b="1" spc="200" kern="0" dirty="0">
+                        <a:rPr lang="en-US" sz="950" b="1" kern="0" spc="200" dirty="0">
                           <a:solidFill>
                             <a:srgbClr val="D4FF00"/>
                           </a:solidFill>
@@ -6460,6 +6349,11 @@
                     </a:solidFill>
                   </a:tcPr>
                 </a:tc>
+                <a:extLst>
+                  <a:ext uri="{0D108BD9-81ED-4DB2-BD59-A6C34878D82A}">
+                    <a16:rowId xmlns:a16="http://schemas.microsoft.com/office/drawing/2014/main" val="10000"/>
+                  </a:ext>
+                </a:extLst>
               </a:tr>
               <a:tr h="310896">
                 <a:tc>
@@ -6467,7 +6361,7 @@
                     <a:bodyPr/>
                     <a:lstStyle/>
                     <a:p>
-                      <a:pPr indent="0" marL="0">
+                      <a:pPr marL="0" indent="0">
                         <a:buNone/>
                       </a:pPr>
                       <a:r>
@@ -6535,7 +6429,7 @@
                     <a:bodyPr/>
                     <a:lstStyle/>
                     <a:p>
-                      <a:pPr indent="0" marL="0">
+                      <a:pPr marL="0" indent="0">
                         <a:buNone/>
                       </a:pPr>
                       <a:r>
@@ -6603,7 +6497,7 @@
                     <a:bodyPr/>
                     <a:lstStyle/>
                     <a:p>
-                      <a:pPr indent="0" marL="0">
+                      <a:pPr marL="0" indent="0">
                         <a:buNone/>
                       </a:pPr>
                       <a:r>
@@ -6666,6 +6560,11 @@
                     </a:solidFill>
                   </a:tcPr>
                 </a:tc>
+                <a:extLst>
+                  <a:ext uri="{0D108BD9-81ED-4DB2-BD59-A6C34878D82A}">
+                    <a16:rowId xmlns:a16="http://schemas.microsoft.com/office/drawing/2014/main" val="10001"/>
+                  </a:ext>
+                </a:extLst>
               </a:tr>
               <a:tr h="310896">
                 <a:tc>
@@ -6673,7 +6572,7 @@
                     <a:bodyPr/>
                     <a:lstStyle/>
                     <a:p>
-                      <a:pPr indent="0" marL="0">
+                      <a:pPr marL="0" indent="0">
                         <a:buNone/>
                       </a:pPr>
                       <a:r>
@@ -6741,7 +6640,7 @@
                     <a:bodyPr/>
                     <a:lstStyle/>
                     <a:p>
-                      <a:pPr indent="0" marL="0">
+                      <a:pPr marL="0" indent="0">
                         <a:buNone/>
                       </a:pPr>
                       <a:r>
@@ -6809,7 +6708,7 @@
                     <a:bodyPr/>
                     <a:lstStyle/>
                     <a:p>
-                      <a:pPr indent="0" marL="0">
+                      <a:pPr marL="0" indent="0">
                         <a:buNone/>
                       </a:pPr>
                       <a:r>
@@ -6872,6 +6771,11 @@
                     </a:solidFill>
                   </a:tcPr>
                 </a:tc>
+                <a:extLst>
+                  <a:ext uri="{0D108BD9-81ED-4DB2-BD59-A6C34878D82A}">
+                    <a16:rowId xmlns:a16="http://schemas.microsoft.com/office/drawing/2014/main" val="10002"/>
+                  </a:ext>
+                </a:extLst>
               </a:tr>
               <a:tr h="310896">
                 <a:tc>
@@ -6879,7 +6783,7 @@
                     <a:bodyPr/>
                     <a:lstStyle/>
                     <a:p>
-                      <a:pPr indent="0" marL="0">
+                      <a:pPr marL="0" indent="0">
                         <a:buNone/>
                       </a:pPr>
                       <a:r>
@@ -6947,7 +6851,7 @@
                     <a:bodyPr/>
                     <a:lstStyle/>
                     <a:p>
-                      <a:pPr indent="0" marL="0">
+                      <a:pPr marL="0" indent="0">
                         <a:buNone/>
                       </a:pPr>
                       <a:r>
@@ -7015,7 +6919,7 @@
                     <a:bodyPr/>
                     <a:lstStyle/>
                     <a:p>
-                      <a:pPr indent="0" marL="0">
+                      <a:pPr marL="0" indent="0">
                         <a:buNone/>
                       </a:pPr>
                       <a:r>
@@ -7078,6 +6982,11 @@
                     </a:solidFill>
                   </a:tcPr>
                 </a:tc>
+                <a:extLst>
+                  <a:ext uri="{0D108BD9-81ED-4DB2-BD59-A6C34878D82A}">
+                    <a16:rowId xmlns:a16="http://schemas.microsoft.com/office/drawing/2014/main" val="10003"/>
+                  </a:ext>
+                </a:extLst>
               </a:tr>
             </a:tbl>
           </a:graphicData>
@@ -7099,6 +7008,7 @@
         <a:solidFill>
           <a:srgbClr val="0C0C0C"/>
         </a:solidFill>
+        <a:effectLst/>
       </p:bgPr>
     </p:bg>
     <p:spTree>
@@ -7134,6 +7044,13 @@
           </a:solidFill>
           <a:ln/>
         </p:spPr>
+        <p:txBody>
+          <a:bodyPr/>
+          <a:lstStyle/>
+          <a:p>
+            <a:endParaRPr lang="en-GB"/>
+          </a:p>
+        </p:txBody>
       </p:sp>
       <p:sp>
         <p:nvSpPr>
@@ -7156,11 +7073,11 @@
           <a:bodyPr wrap="square" rtlCol="0" anchor="ctr"/>
           <a:lstStyle/>
           <a:p>
-            <a:pPr indent="0" marL="0">
-              <a:buNone/>
-            </a:pPr>
-            <a:r>
-              <a:rPr lang="en-US" sz="1050" spc="400" kern="0" dirty="0">
+            <a:pPr marL="0" indent="0">
+              <a:buNone/>
+            </a:pPr>
+            <a:r>
+              <a:rPr lang="en-US" sz="1050" kern="0" spc="400" dirty="0">
                 <a:solidFill>
                   <a:srgbClr val="A8A29E"/>
                 </a:solidFill>
@@ -7195,7 +7112,7 @@
           <a:bodyPr wrap="square" rtlCol="0" anchor="ctr"/>
           <a:lstStyle/>
           <a:p>
-            <a:pPr indent="0" marL="0">
+            <a:pPr marL="0" indent="0">
               <a:buNone/>
             </a:pPr>
             <a:r>
@@ -7234,11 +7151,11 @@
           <a:bodyPr wrap="square" rtlCol="0" anchor="ctr"/>
           <a:lstStyle/>
           <a:p>
-            <a:pPr indent="0" marL="0">
-              <a:buNone/>
-            </a:pPr>
-            <a:r>
-              <a:rPr lang="en-US" sz="850" spc="200" kern="0" dirty="0">
+            <a:pPr marL="0" indent="0">
+              <a:buNone/>
+            </a:pPr>
+            <a:r>
+              <a:rPr lang="en-US" sz="850" kern="0" spc="200" dirty="0">
                 <a:solidFill>
                   <a:srgbClr val="6B6560"/>
                 </a:solidFill>
@@ -7273,7 +7190,7 @@
           <a:bodyPr wrap="square" rtlCol="0" anchor="ctr"/>
           <a:lstStyle/>
           <a:p>
-            <a:pPr algn="r" indent="0" marL="0">
+            <a:pPr marL="0" indent="0" algn="r">
               <a:buNone/>
             </a:pPr>
             <a:r>
@@ -7318,7 +7235,7 @@
           <a:bodyPr wrap="square" lIns="127000" tIns="127000" rIns="127000" bIns="127000" rtlCol="0" anchor="t"/>
           <a:lstStyle/>
           <a:p>
-            <a:pPr algn="l" indent="0" marL="0">
+            <a:pPr marL="0" indent="0" algn="l">
               <a:lnSpc>
                 <a:spcPts val="1350"/>
               </a:lnSpc>
@@ -7338,7 +7255,7 @@
             <a:endParaRPr lang="en-US" sz="1000" dirty="0"/>
           </a:p>
           <a:p>
-            <a:pPr algn="l" indent="0" marL="0">
+            <a:pPr marL="0" indent="0" algn="l">
               <a:lnSpc>
                 <a:spcPts val="1350"/>
               </a:lnSpc>
@@ -7358,7 +7275,7 @@
             <a:endParaRPr lang="en-US" sz="1000" dirty="0"/>
           </a:p>
           <a:p>
-            <a:pPr algn="l" indent="0" marL="0">
+            <a:pPr marL="0" indent="0" algn="l">
               <a:lnSpc>
                 <a:spcPts val="1350"/>
               </a:lnSpc>
@@ -7378,7 +7295,7 @@
             <a:endParaRPr lang="en-US" sz="1000" dirty="0"/>
           </a:p>
           <a:p>
-            <a:pPr algn="l" indent="0" marL="0">
+            <a:pPr marL="0" indent="0" algn="l">
               <a:lnSpc>
                 <a:spcPts val="1350"/>
               </a:lnSpc>
@@ -7398,7 +7315,7 @@
             <a:endParaRPr lang="en-US" sz="1000" dirty="0"/>
           </a:p>
           <a:p>
-            <a:pPr algn="l" indent="0" marL="0">
+            <a:pPr marL="0" indent="0" algn="l">
               <a:lnSpc>
                 <a:spcPts val="1350"/>
               </a:lnSpc>
@@ -7418,7 +7335,7 @@
             <a:endParaRPr lang="en-US" sz="1000" dirty="0"/>
           </a:p>
           <a:p>
-            <a:pPr algn="l" indent="0" marL="0">
+            <a:pPr marL="0" indent="0" algn="l">
               <a:lnSpc>
                 <a:spcPts val="1350"/>
               </a:lnSpc>
@@ -7438,7 +7355,7 @@
             <a:endParaRPr lang="en-US" sz="1000" dirty="0"/>
           </a:p>
           <a:p>
-            <a:pPr algn="l" indent="0" marL="0">
+            <a:pPr marL="0" indent="0" algn="l">
               <a:lnSpc>
                 <a:spcPts val="1350"/>
               </a:lnSpc>
@@ -7458,7 +7375,7 @@
             <a:endParaRPr lang="en-US" sz="1000" dirty="0"/>
           </a:p>
           <a:p>
-            <a:pPr algn="l" indent="0" marL="0">
+            <a:pPr marL="0" indent="0" algn="l">
               <a:lnSpc>
                 <a:spcPts val="1350"/>
               </a:lnSpc>
@@ -7506,7 +7423,7 @@
           <a:bodyPr wrap="square" lIns="127000" tIns="127000" rIns="127000" bIns="127000" rtlCol="0" anchor="t"/>
           <a:lstStyle/>
           <a:p>
-            <a:pPr algn="l" indent="0" marL="0">
+            <a:pPr marL="0" indent="0" algn="l">
               <a:lnSpc>
                 <a:spcPts val="1350"/>
               </a:lnSpc>
@@ -7526,7 +7443,7 @@
             <a:endParaRPr lang="en-US" sz="1000" dirty="0"/>
           </a:p>
           <a:p>
-            <a:pPr algn="l" indent="0" marL="0">
+            <a:pPr marL="0" indent="0" algn="l">
               <a:lnSpc>
                 <a:spcPts val="1350"/>
               </a:lnSpc>
@@ -7546,7 +7463,7 @@
             <a:endParaRPr lang="en-US" sz="1000" dirty="0"/>
           </a:p>
           <a:p>
-            <a:pPr algn="l" indent="0" marL="0">
+            <a:pPr marL="0" indent="0" algn="l">
               <a:lnSpc>
                 <a:spcPts val="1350"/>
               </a:lnSpc>
@@ -7566,7 +7483,7 @@
             <a:endParaRPr lang="en-US" sz="1000" dirty="0"/>
           </a:p>
           <a:p>
-            <a:pPr algn="l" indent="0" marL="0">
+            <a:pPr marL="0" indent="0" algn="l">
               <a:lnSpc>
                 <a:spcPts val="1350"/>
               </a:lnSpc>
@@ -7586,7 +7503,7 @@
             <a:endParaRPr lang="en-US" sz="1000" dirty="0"/>
           </a:p>
           <a:p>
-            <a:pPr algn="l" indent="0" marL="0">
+            <a:pPr marL="0" indent="0" algn="l">
               <a:lnSpc>
                 <a:spcPts val="1350"/>
               </a:lnSpc>
@@ -7606,7 +7523,7 @@
             <a:endParaRPr lang="en-US" sz="1000" dirty="0"/>
           </a:p>
           <a:p>
-            <a:pPr algn="l" indent="0" marL="0">
+            <a:pPr marL="0" indent="0" algn="l">
               <a:lnSpc>
                 <a:spcPts val="1350"/>
               </a:lnSpc>
@@ -7626,7 +7543,7 @@
             <a:endParaRPr lang="en-US" sz="1000" dirty="0"/>
           </a:p>
           <a:p>
-            <a:pPr algn="l" indent="0" marL="0">
+            <a:pPr marL="0" indent="0" algn="l">
               <a:lnSpc>
                 <a:spcPts val="1350"/>
               </a:lnSpc>
@@ -7668,7 +7585,7 @@
           <a:bodyPr wrap="square" rtlCol="0" anchor="ctr"/>
           <a:lstStyle/>
           <a:p>
-            <a:pPr indent="0" marL="0">
+            <a:pPr marL="0" indent="0">
               <a:buNone/>
             </a:pPr>
             <a:r>
@@ -7702,6 +7619,7 @@
         <a:solidFill>
           <a:srgbClr val="0C0C0C"/>
         </a:solidFill>
+        <a:effectLst/>
       </p:bgPr>
     </p:bg>
     <p:spTree>
@@ -7737,6 +7655,13 @@
           </a:solidFill>
           <a:ln/>
         </p:spPr>
+        <p:txBody>
+          <a:bodyPr/>
+          <a:lstStyle/>
+          <a:p>
+            <a:endParaRPr lang="en-GB"/>
+          </a:p>
+        </p:txBody>
       </p:sp>
       <p:sp>
         <p:nvSpPr>
@@ -7759,11 +7684,11 @@
           <a:bodyPr wrap="square" rtlCol="0" anchor="ctr"/>
           <a:lstStyle/>
           <a:p>
-            <a:pPr indent="0" marL="0">
-              <a:buNone/>
-            </a:pPr>
-            <a:r>
-              <a:rPr lang="en-US" sz="1050" spc="400" kern="0" dirty="0">
+            <a:pPr marL="0" indent="0">
+              <a:buNone/>
+            </a:pPr>
+            <a:r>
+              <a:rPr lang="en-US" sz="1050" kern="0" spc="400" dirty="0">
                 <a:solidFill>
                   <a:srgbClr val="A8A29E"/>
                 </a:solidFill>
@@ -7798,7 +7723,7 @@
           <a:bodyPr wrap="square" rtlCol="0" anchor="ctr"/>
           <a:lstStyle/>
           <a:p>
-            <a:pPr indent="0" marL="0">
+            <a:pPr marL="0" indent="0">
               <a:buNone/>
             </a:pPr>
             <a:r>
@@ -7837,11 +7762,11 @@
           <a:bodyPr wrap="square" rtlCol="0" anchor="ctr"/>
           <a:lstStyle/>
           <a:p>
-            <a:pPr indent="0" marL="0">
-              <a:buNone/>
-            </a:pPr>
-            <a:r>
-              <a:rPr lang="en-US" sz="850" spc="200" kern="0" dirty="0">
+            <a:pPr marL="0" indent="0">
+              <a:buNone/>
+            </a:pPr>
+            <a:r>
+              <a:rPr lang="en-US" sz="850" kern="0" spc="200" dirty="0">
                 <a:solidFill>
                   <a:srgbClr val="6B6560"/>
                 </a:solidFill>
@@ -7876,7 +7801,7 @@
           <a:bodyPr wrap="square" rtlCol="0" anchor="ctr"/>
           <a:lstStyle/>
           <a:p>
-            <a:pPr algn="r" indent="0" marL="0">
+            <a:pPr marL="0" indent="0" algn="r">
               <a:buNone/>
             </a:pPr>
             <a:r>
@@ -7917,8 +7842,20 @@
             <a:tbl>
               <a:tblPr/>
               <a:tblGrid>
-                <a:gridCol w="2194560"/>
-                <a:gridCol w="8869680"/>
+                <a:gridCol w="2194560">
+                  <a:extLst>
+                    <a:ext uri="{9D8B030D-6E8A-4147-A177-3AD203B41FA5}">
+                      <a16:colId xmlns:a16="http://schemas.microsoft.com/office/drawing/2014/main" val="20000"/>
+                    </a:ext>
+                  </a:extLst>
+                </a:gridCol>
+                <a:gridCol w="8869680">
+                  <a:extLst>
+                    <a:ext uri="{9D8B030D-6E8A-4147-A177-3AD203B41FA5}">
+                      <a16:colId xmlns:a16="http://schemas.microsoft.com/office/drawing/2014/main" val="20001"/>
+                    </a:ext>
+                  </a:extLst>
+                </a:gridCol>
               </a:tblGrid>
               <a:tr h="310896">
                 <a:tc>
@@ -7926,11 +7863,11 @@
                     <a:bodyPr/>
                     <a:lstStyle/>
                     <a:p>
-                      <a:pPr indent="0" marL="0">
+                      <a:pPr marL="0" indent="0">
                         <a:buNone/>
                       </a:pPr>
                       <a:r>
-                        <a:rPr lang="en-US" sz="1000" b="1" spc="200" kern="0" dirty="0">
+                        <a:rPr lang="en-US" sz="1000" b="1" kern="0" spc="200" dirty="0">
                           <a:solidFill>
                             <a:srgbClr val="D4FF00"/>
                           </a:solidFill>
@@ -7994,11 +7931,11 @@
                     <a:bodyPr/>
                     <a:lstStyle/>
                     <a:p>
-                      <a:pPr indent="0" marL="0">
+                      <a:pPr marL="0" indent="0">
                         <a:buNone/>
                       </a:pPr>
                       <a:r>
-                        <a:rPr lang="en-US" sz="1000" b="1" spc="200" kern="0" dirty="0">
+                        <a:rPr lang="en-US" sz="1000" b="1" kern="0" spc="200" dirty="0">
                           <a:solidFill>
                             <a:srgbClr val="D4FF00"/>
                           </a:solidFill>
@@ -8057,6 +7994,11 @@
                     </a:solidFill>
                   </a:tcPr>
                 </a:tc>
+                <a:extLst>
+                  <a:ext uri="{0D108BD9-81ED-4DB2-BD59-A6C34878D82A}">
+                    <a16:rowId xmlns:a16="http://schemas.microsoft.com/office/drawing/2014/main" val="10000"/>
+                  </a:ext>
+                </a:extLst>
               </a:tr>
               <a:tr h="310896">
                 <a:tc>
@@ -8064,7 +8006,7 @@
                     <a:bodyPr/>
                     <a:lstStyle/>
                     <a:p>
-                      <a:pPr indent="0" marL="0">
+                      <a:pPr marL="0" indent="0">
                         <a:buNone/>
                       </a:pPr>
                       <a:r>
@@ -8132,7 +8074,7 @@
                     <a:bodyPr/>
                     <a:lstStyle/>
                     <a:p>
-                      <a:pPr indent="0" marL="0">
+                      <a:pPr marL="0" indent="0">
                         <a:buNone/>
                       </a:pPr>
                       <a:r>
@@ -8195,6 +8137,11 @@
                     </a:solidFill>
                   </a:tcPr>
                 </a:tc>
+                <a:extLst>
+                  <a:ext uri="{0D108BD9-81ED-4DB2-BD59-A6C34878D82A}">
+                    <a16:rowId xmlns:a16="http://schemas.microsoft.com/office/drawing/2014/main" val="10001"/>
+                  </a:ext>
+                </a:extLst>
               </a:tr>
               <a:tr h="310896">
                 <a:tc>
@@ -8202,7 +8149,7 @@
                     <a:bodyPr/>
                     <a:lstStyle/>
                     <a:p>
-                      <a:pPr indent="0" marL="0">
+                      <a:pPr marL="0" indent="0">
                         <a:buNone/>
                       </a:pPr>
                       <a:r>
@@ -8270,7 +8217,7 @@
                     <a:bodyPr/>
                     <a:lstStyle/>
                     <a:p>
-                      <a:pPr indent="0" marL="0">
+                      <a:pPr marL="0" indent="0">
                         <a:buNone/>
                       </a:pPr>
                       <a:r>
@@ -8333,6 +8280,11 @@
                     </a:solidFill>
                   </a:tcPr>
                 </a:tc>
+                <a:extLst>
+                  <a:ext uri="{0D108BD9-81ED-4DB2-BD59-A6C34878D82A}">
+                    <a16:rowId xmlns:a16="http://schemas.microsoft.com/office/drawing/2014/main" val="10002"/>
+                  </a:ext>
+                </a:extLst>
               </a:tr>
               <a:tr h="310896">
                 <a:tc>
@@ -8340,7 +8292,7 @@
                     <a:bodyPr/>
                     <a:lstStyle/>
                     <a:p>
-                      <a:pPr indent="0" marL="0">
+                      <a:pPr marL="0" indent="0">
                         <a:buNone/>
                       </a:pPr>
                       <a:r>
@@ -8408,7 +8360,7 @@
                     <a:bodyPr/>
                     <a:lstStyle/>
                     <a:p>
-                      <a:pPr indent="0" marL="0">
+                      <a:pPr marL="0" indent="0">
                         <a:buNone/>
                       </a:pPr>
                       <a:r>
@@ -8471,6 +8423,11 @@
                     </a:solidFill>
                   </a:tcPr>
                 </a:tc>
+                <a:extLst>
+                  <a:ext uri="{0D108BD9-81ED-4DB2-BD59-A6C34878D82A}">
+                    <a16:rowId xmlns:a16="http://schemas.microsoft.com/office/drawing/2014/main" val="10003"/>
+                  </a:ext>
+                </a:extLst>
               </a:tr>
               <a:tr h="310896">
                 <a:tc>
@@ -8478,7 +8435,7 @@
                     <a:bodyPr/>
                     <a:lstStyle/>
                     <a:p>
-                      <a:pPr indent="0" marL="0">
+                      <a:pPr marL="0" indent="0">
                         <a:buNone/>
                       </a:pPr>
                       <a:r>
@@ -8546,7 +8503,7 @@
                     <a:bodyPr/>
                     <a:lstStyle/>
                     <a:p>
-                      <a:pPr indent="0" marL="0">
+                      <a:pPr marL="0" indent="0">
                         <a:buNone/>
                       </a:pPr>
                       <a:r>
@@ -8609,6 +8566,11 @@
                     </a:solidFill>
                   </a:tcPr>
                 </a:tc>
+                <a:extLst>
+                  <a:ext uri="{0D108BD9-81ED-4DB2-BD59-A6C34878D82A}">
+                    <a16:rowId xmlns:a16="http://schemas.microsoft.com/office/drawing/2014/main" val="10004"/>
+                  </a:ext>
+                </a:extLst>
               </a:tr>
             </a:tbl>
           </a:graphicData>
@@ -8638,6 +8600,13 @@
             <a:prstDash val="solid"/>
           </a:ln>
         </p:spPr>
+        <p:txBody>
+          <a:bodyPr/>
+          <a:lstStyle/>
+          <a:p>
+            <a:endParaRPr lang="en-GB"/>
+          </a:p>
+        </p:txBody>
       </p:sp>
       <p:sp>
         <p:nvSpPr>
@@ -8660,7 +8629,7 @@
           <a:bodyPr wrap="square" rtlCol="0" anchor="ctr"/>
           <a:lstStyle/>
           <a:p>
-            <a:pPr algn="ctr" indent="0" marL="0">
+            <a:pPr marL="0" indent="0" algn="ctr">
               <a:buNone/>
             </a:pPr>
             <a:r>
@@ -8677,7 +8646,7 @@
             <a:endParaRPr lang="en-US" sz="850" dirty="0"/>
           </a:p>
           <a:p>
-            <a:pPr algn="ctr" indent="0" marL="0">
+            <a:pPr marL="0" indent="0" algn="ctr">
               <a:buNone/>
             </a:pPr>
             <a:r>
@@ -8719,6 +8688,13 @@
             <a:prstDash val="solid"/>
           </a:ln>
         </p:spPr>
+        <p:txBody>
+          <a:bodyPr/>
+          <a:lstStyle/>
+          <a:p>
+            <a:endParaRPr lang="en-GB"/>
+          </a:p>
+        </p:txBody>
       </p:sp>
       <p:sp>
         <p:nvSpPr>
@@ -8741,7 +8717,7 @@
           <a:bodyPr wrap="square" rtlCol="0" anchor="ctr"/>
           <a:lstStyle/>
           <a:p>
-            <a:pPr algn="ctr" indent="0" marL="0">
+            <a:pPr marL="0" indent="0" algn="ctr">
               <a:buNone/>
             </a:pPr>
             <a:r>
@@ -8758,7 +8734,7 @@
             <a:endParaRPr lang="en-US" sz="850" dirty="0"/>
           </a:p>
           <a:p>
-            <a:pPr algn="ctr" indent="0" marL="0">
+            <a:pPr marL="0" indent="0" algn="ctr">
               <a:buNone/>
             </a:pPr>
             <a:r>
@@ -8800,6 +8776,13 @@
             <a:prstDash val="solid"/>
           </a:ln>
         </p:spPr>
+        <p:txBody>
+          <a:bodyPr/>
+          <a:lstStyle/>
+          <a:p>
+            <a:endParaRPr lang="en-GB"/>
+          </a:p>
+        </p:txBody>
       </p:sp>
       <p:sp>
         <p:nvSpPr>
@@ -8822,7 +8805,7 @@
           <a:bodyPr wrap="square" rtlCol="0" anchor="ctr"/>
           <a:lstStyle/>
           <a:p>
-            <a:pPr algn="ctr" indent="0" marL="0">
+            <a:pPr marL="0" indent="0" algn="ctr">
               <a:buNone/>
             </a:pPr>
             <a:r>
@@ -8839,7 +8822,7 @@
             <a:endParaRPr lang="en-US" sz="850" dirty="0"/>
           </a:p>
           <a:p>
-            <a:pPr algn="ctr" indent="0" marL="0">
+            <a:pPr marL="0" indent="0" algn="ctr">
               <a:buNone/>
             </a:pPr>
             <a:r>
@@ -8881,10 +8864,17 @@
             <a:prstDash val="solid"/>
           </a:ln>
         </p:spPr>
+        <p:txBody>
+          <a:bodyPr/>
+          <a:lstStyle/>
+          <a:p>
+            <a:endParaRPr lang="en-GB"/>
+          </a:p>
+        </p:txBody>
       </p:sp>
       <p:sp>
         <p:nvSpPr>
-          <p:cNvPr id="16" name="Text 12"/>
+          <p:cNvPr id="7" name="Text 12"/>
           <p:cNvSpPr/>
           <p:nvPr/>
         </p:nvSpPr>
@@ -8903,7 +8893,7 @@
           <a:bodyPr wrap="square" rtlCol="0" anchor="ctr"/>
           <a:lstStyle/>
           <a:p>
-            <a:pPr algn="ctr" indent="0" marL="0">
+            <a:pPr marL="0" indent="0" algn="ctr">
               <a:buNone/>
             </a:pPr>
             <a:r>
@@ -8920,7 +8910,7 @@
             <a:endParaRPr lang="en-US" sz="850" dirty="0"/>
           </a:p>
           <a:p>
-            <a:pPr algn="ctr" indent="0" marL="0">
+            <a:pPr marL="0" indent="0" algn="ctr">
               <a:buNone/>
             </a:pPr>
             <a:r>
@@ -8962,6 +8952,13 @@
             <a:prstDash val="solid"/>
           </a:ln>
         </p:spPr>
+        <p:txBody>
+          <a:bodyPr/>
+          <a:lstStyle/>
+          <a:p>
+            <a:endParaRPr lang="en-GB"/>
+          </a:p>
+        </p:txBody>
       </p:sp>
       <p:sp>
         <p:nvSpPr>
@@ -8984,7 +8981,7 @@
           <a:bodyPr wrap="square" rtlCol="0" anchor="ctr"/>
           <a:lstStyle/>
           <a:p>
-            <a:pPr algn="ctr" indent="0" marL="0">
+            <a:pPr marL="0" indent="0" algn="ctr">
               <a:buNone/>
             </a:pPr>
             <a:r>
@@ -9001,7 +8998,7 @@
             <a:endParaRPr lang="en-US" sz="850" dirty="0"/>
           </a:p>
           <a:p>
-            <a:pPr algn="ctr" indent="0" marL="0">
+            <a:pPr marL="0" indent="0" algn="ctr">
               <a:buNone/>
             </a:pPr>
             <a:r>
@@ -9043,6 +9040,13 @@
             <a:prstDash val="solid"/>
           </a:ln>
         </p:spPr>
+        <p:txBody>
+          <a:bodyPr/>
+          <a:lstStyle/>
+          <a:p>
+            <a:endParaRPr lang="en-GB"/>
+          </a:p>
+        </p:txBody>
       </p:sp>
       <p:sp>
         <p:nvSpPr>
@@ -9065,7 +9069,7 @@
           <a:bodyPr wrap="square" rtlCol="0" anchor="ctr"/>
           <a:lstStyle/>
           <a:p>
-            <a:pPr algn="ctr" indent="0" marL="0">
+            <a:pPr marL="0" indent="0" algn="ctr">
               <a:buNone/>
             </a:pPr>
             <a:r>
@@ -9082,7 +9086,7 @@
             <a:endParaRPr lang="en-US" sz="850" dirty="0"/>
           </a:p>
           <a:p>
-            <a:pPr algn="ctr" indent="0" marL="0">
+            <a:pPr marL="0" indent="0" algn="ctr">
               <a:buNone/>
             </a:pPr>
             <a:r>
@@ -9124,6 +9128,13 @@
             <a:prstDash val="solid"/>
           </a:ln>
         </p:spPr>
+        <p:txBody>
+          <a:bodyPr/>
+          <a:lstStyle/>
+          <a:p>
+            <a:endParaRPr lang="en-GB"/>
+          </a:p>
+        </p:txBody>
       </p:sp>
       <p:sp>
         <p:nvSpPr>
@@ -9146,7 +9157,7 @@
           <a:bodyPr wrap="square" rtlCol="0" anchor="ctr"/>
           <a:lstStyle/>
           <a:p>
-            <a:pPr algn="ctr" indent="0" marL="0">
+            <a:pPr marL="0" indent="0" algn="ctr">
               <a:buNone/>
             </a:pPr>
             <a:r>
@@ -9163,7 +9174,7 @@
             <a:endParaRPr lang="en-US" sz="850" dirty="0"/>
           </a:p>
           <a:p>
-            <a:pPr algn="ctr" indent="0" marL="0">
+            <a:pPr marL="0" indent="0" algn="ctr">
               <a:buNone/>
             </a:pPr>
             <a:r>
@@ -9205,6 +9216,13 @@
             <a:prstDash val="solid"/>
           </a:ln>
         </p:spPr>
+        <p:txBody>
+          <a:bodyPr/>
+          <a:lstStyle/>
+          <a:p>
+            <a:endParaRPr lang="en-GB"/>
+          </a:p>
+        </p:txBody>
       </p:sp>
       <p:sp>
         <p:nvSpPr>
@@ -9227,7 +9245,7 @@
           <a:bodyPr wrap="square" rtlCol="0" anchor="ctr"/>
           <a:lstStyle/>
           <a:p>
-            <a:pPr algn="ctr" indent="0" marL="0">
+            <a:pPr marL="0" indent="0" algn="ctr">
               <a:buNone/>
             </a:pPr>
             <a:r>
@@ -9244,7 +9262,7 @@
             <a:endParaRPr lang="en-US" sz="850" dirty="0"/>
           </a:p>
           <a:p>
-            <a:pPr algn="ctr" indent="0" marL="0">
+            <a:pPr marL="0" indent="0" algn="ctr">
               <a:buNone/>
             </a:pPr>
             <a:r>
@@ -9278,6 +9296,7 @@
         <a:solidFill>
           <a:srgbClr val="0C0C0C"/>
         </a:solidFill>
+        <a:effectLst/>
       </p:bgPr>
     </p:bg>
     <p:spTree>
@@ -9313,6 +9332,13 @@
           </a:solidFill>
           <a:ln/>
         </p:spPr>
+        <p:txBody>
+          <a:bodyPr/>
+          <a:lstStyle/>
+          <a:p>
+            <a:endParaRPr lang="en-GB"/>
+          </a:p>
+        </p:txBody>
       </p:sp>
       <p:sp>
         <p:nvSpPr>
@@ -9335,11 +9361,11 @@
           <a:bodyPr wrap="square" rtlCol="0" anchor="ctr"/>
           <a:lstStyle/>
           <a:p>
-            <a:pPr indent="0" marL="0">
-              <a:buNone/>
-            </a:pPr>
-            <a:r>
-              <a:rPr lang="en-US" sz="1050" spc="400" kern="0" dirty="0">
+            <a:pPr marL="0" indent="0">
+              <a:buNone/>
+            </a:pPr>
+            <a:r>
+              <a:rPr lang="en-US" sz="1050" kern="0" spc="400" dirty="0">
                 <a:solidFill>
                   <a:srgbClr val="A8A29E"/>
                 </a:solidFill>
@@ -9374,7 +9400,7 @@
           <a:bodyPr wrap="square" rtlCol="0" anchor="ctr"/>
           <a:lstStyle/>
           <a:p>
-            <a:pPr indent="0" marL="0">
+            <a:pPr marL="0" indent="0">
               <a:buNone/>
             </a:pPr>
             <a:r>
@@ -9413,11 +9439,11 @@
           <a:bodyPr wrap="square" rtlCol="0" anchor="ctr"/>
           <a:lstStyle/>
           <a:p>
-            <a:pPr indent="0" marL="0">
-              <a:buNone/>
-            </a:pPr>
-            <a:r>
-              <a:rPr lang="en-US" sz="850" spc="200" kern="0" dirty="0">
+            <a:pPr marL="0" indent="0">
+              <a:buNone/>
+            </a:pPr>
+            <a:r>
+              <a:rPr lang="en-US" sz="850" kern="0" spc="200" dirty="0">
                 <a:solidFill>
                   <a:srgbClr val="6B6560"/>
                 </a:solidFill>
@@ -9452,7 +9478,7 @@
           <a:bodyPr wrap="square" rtlCol="0" anchor="ctr"/>
           <a:lstStyle/>
           <a:p>
-            <a:pPr algn="r" indent="0" marL="0">
+            <a:pPr marL="0" indent="0" algn="r">
               <a:buNone/>
             </a:pPr>
             <a:r>
@@ -9493,10 +9519,34 @@
             <a:tbl>
               <a:tblPr/>
               <a:tblGrid>
-                <a:gridCol w="457200"/>
-                <a:gridCol w="3108960"/>
-                <a:gridCol w="822960"/>
-                <a:gridCol w="6675120"/>
+                <a:gridCol w="457200">
+                  <a:extLst>
+                    <a:ext uri="{9D8B030D-6E8A-4147-A177-3AD203B41FA5}">
+                      <a16:colId xmlns:a16="http://schemas.microsoft.com/office/drawing/2014/main" val="20000"/>
+                    </a:ext>
+                  </a:extLst>
+                </a:gridCol>
+                <a:gridCol w="3108960">
+                  <a:extLst>
+                    <a:ext uri="{9D8B030D-6E8A-4147-A177-3AD203B41FA5}">
+                      <a16:colId xmlns:a16="http://schemas.microsoft.com/office/drawing/2014/main" val="20001"/>
+                    </a:ext>
+                  </a:extLst>
+                </a:gridCol>
+                <a:gridCol w="822960">
+                  <a:extLst>
+                    <a:ext uri="{9D8B030D-6E8A-4147-A177-3AD203B41FA5}">
+                      <a16:colId xmlns:a16="http://schemas.microsoft.com/office/drawing/2014/main" val="20002"/>
+                    </a:ext>
+                  </a:extLst>
+                </a:gridCol>
+                <a:gridCol w="6675120">
+                  <a:extLst>
+                    <a:ext uri="{9D8B030D-6E8A-4147-A177-3AD203B41FA5}">
+                      <a16:colId xmlns:a16="http://schemas.microsoft.com/office/drawing/2014/main" val="20003"/>
+                    </a:ext>
+                  </a:extLst>
+                </a:gridCol>
               </a:tblGrid>
               <a:tr h="310896">
                 <a:tc>
@@ -9504,11 +9554,11 @@
                     <a:bodyPr/>
                     <a:lstStyle/>
                     <a:p>
-                      <a:pPr indent="0" marL="0">
+                      <a:pPr marL="0" indent="0">
                         <a:buNone/>
                       </a:pPr>
                       <a:r>
-                        <a:rPr lang="en-US" sz="950" b="1" spc="200" kern="0" dirty="0">
+                        <a:rPr lang="en-US" sz="950" b="1" kern="0" spc="200" dirty="0">
                           <a:solidFill>
                             <a:srgbClr val="D4FF00"/>
                           </a:solidFill>
@@ -9572,11 +9622,11 @@
                     <a:bodyPr/>
                     <a:lstStyle/>
                     <a:p>
-                      <a:pPr indent="0" marL="0">
+                      <a:pPr marL="0" indent="0">
                         <a:buNone/>
                       </a:pPr>
                       <a:r>
-                        <a:rPr lang="en-US" sz="950" b="1" spc="200" kern="0" dirty="0">
+                        <a:rPr lang="en-US" sz="950" b="1" kern="0" spc="200" dirty="0">
                           <a:solidFill>
                             <a:srgbClr val="D4FF00"/>
                           </a:solidFill>
@@ -9640,11 +9690,11 @@
                     <a:bodyPr/>
                     <a:lstStyle/>
                     <a:p>
-                      <a:pPr indent="0" marL="0">
+                      <a:pPr marL="0" indent="0">
                         <a:buNone/>
                       </a:pPr>
                       <a:r>
-                        <a:rPr lang="en-US" sz="950" b="1" spc="200" kern="0" dirty="0">
+                        <a:rPr lang="en-US" sz="950" b="1" kern="0" spc="200" dirty="0">
                           <a:solidFill>
                             <a:srgbClr val="D4FF00"/>
                           </a:solidFill>
@@ -9708,11 +9758,11 @@
                     <a:bodyPr/>
                     <a:lstStyle/>
                     <a:p>
-                      <a:pPr indent="0" marL="0">
+                      <a:pPr marL="0" indent="0">
                         <a:buNone/>
                       </a:pPr>
                       <a:r>
-                        <a:rPr lang="en-US" sz="950" b="1" spc="200" kern="0" dirty="0">
+                        <a:rPr lang="en-US" sz="950" b="1" kern="0" spc="200" dirty="0">
                           <a:solidFill>
                             <a:srgbClr val="D4FF00"/>
                           </a:solidFill>
@@ -9771,6 +9821,11 @@
                     </a:solidFill>
                   </a:tcPr>
                 </a:tc>
+                <a:extLst>
+                  <a:ext uri="{0D108BD9-81ED-4DB2-BD59-A6C34878D82A}">
+                    <a16:rowId xmlns:a16="http://schemas.microsoft.com/office/drawing/2014/main" val="10000"/>
+                  </a:ext>
+                </a:extLst>
               </a:tr>
               <a:tr h="310896">
                 <a:tc>
@@ -9778,7 +9833,7 @@
                     <a:bodyPr/>
                     <a:lstStyle/>
                     <a:p>
-                      <a:pPr indent="0" marL="0">
+                      <a:pPr marL="0" indent="0">
                         <a:buNone/>
                       </a:pPr>
                       <a:r>
@@ -9846,7 +9901,7 @@
                     <a:bodyPr/>
                     <a:lstStyle/>
                     <a:p>
-                      <a:pPr indent="0" marL="0">
+                      <a:pPr marL="0" indent="0">
                         <a:buNone/>
                       </a:pPr>
                       <a:r>
@@ -9914,7 +9969,7 @@
                     <a:bodyPr/>
                     <a:lstStyle/>
                     <a:p>
-                      <a:pPr indent="0" marL="0">
+                      <a:pPr marL="0" indent="0">
                         <a:buNone/>
                       </a:pPr>
                       <a:r>
@@ -9982,7 +10037,7 @@
                     <a:bodyPr/>
                     <a:lstStyle/>
                     <a:p>
-                      <a:pPr indent="0" marL="0">
+                      <a:pPr marL="0" indent="0">
                         <a:buNone/>
                       </a:pPr>
                       <a:r>
@@ -10045,6 +10100,11 @@
                     </a:solidFill>
                   </a:tcPr>
                 </a:tc>
+                <a:extLst>
+                  <a:ext uri="{0D108BD9-81ED-4DB2-BD59-A6C34878D82A}">
+                    <a16:rowId xmlns:a16="http://schemas.microsoft.com/office/drawing/2014/main" val="10001"/>
+                  </a:ext>
+                </a:extLst>
               </a:tr>
               <a:tr h="310896">
                 <a:tc>
@@ -10052,7 +10112,7 @@
                     <a:bodyPr/>
                     <a:lstStyle/>
                     <a:p>
-                      <a:pPr indent="0" marL="0">
+                      <a:pPr marL="0" indent="0">
                         <a:buNone/>
                       </a:pPr>
                       <a:r>
@@ -10120,7 +10180,7 @@
                     <a:bodyPr/>
                     <a:lstStyle/>
                     <a:p>
-                      <a:pPr indent="0" marL="0">
+                      <a:pPr marL="0" indent="0">
                         <a:buNone/>
                       </a:pPr>
                       <a:r>
@@ -10188,7 +10248,7 @@
                     <a:bodyPr/>
                     <a:lstStyle/>
                     <a:p>
-                      <a:pPr indent="0" marL="0">
+                      <a:pPr marL="0" indent="0">
                         <a:buNone/>
                       </a:pPr>
                       <a:r>
@@ -10256,7 +10316,7 @@
                     <a:bodyPr/>
                     <a:lstStyle/>
                     <a:p>
-                      <a:pPr indent="0" marL="0">
+                      <a:pPr marL="0" indent="0">
                         <a:buNone/>
                       </a:pPr>
                       <a:r>
@@ -10319,6 +10379,11 @@
                     </a:solidFill>
                   </a:tcPr>
                 </a:tc>
+                <a:extLst>
+                  <a:ext uri="{0D108BD9-81ED-4DB2-BD59-A6C34878D82A}">
+                    <a16:rowId xmlns:a16="http://schemas.microsoft.com/office/drawing/2014/main" val="10002"/>
+                  </a:ext>
+                </a:extLst>
               </a:tr>
               <a:tr h="310896">
                 <a:tc>
@@ -10326,7 +10391,7 @@
                     <a:bodyPr/>
                     <a:lstStyle/>
                     <a:p>
-                      <a:pPr indent="0" marL="0">
+                      <a:pPr marL="0" indent="0">
                         <a:buNone/>
                       </a:pPr>
                       <a:r>
@@ -10394,7 +10459,7 @@
                     <a:bodyPr/>
                     <a:lstStyle/>
                     <a:p>
-                      <a:pPr indent="0" marL="0">
+                      <a:pPr marL="0" indent="0">
                         <a:buNone/>
                       </a:pPr>
                       <a:r>
@@ -10462,7 +10527,7 @@
                     <a:bodyPr/>
                     <a:lstStyle/>
                     <a:p>
-                      <a:pPr indent="0" marL="0">
+                      <a:pPr marL="0" indent="0">
                         <a:buNone/>
                       </a:pPr>
                       <a:r>
@@ -10530,7 +10595,7 @@
                     <a:bodyPr/>
                     <a:lstStyle/>
                     <a:p>
-                      <a:pPr indent="0" marL="0">
+                      <a:pPr marL="0" indent="0">
                         <a:buNone/>
                       </a:pPr>
                       <a:r>
@@ -10593,6 +10658,11 @@
                     </a:solidFill>
                   </a:tcPr>
                 </a:tc>
+                <a:extLst>
+                  <a:ext uri="{0D108BD9-81ED-4DB2-BD59-A6C34878D82A}">
+                    <a16:rowId xmlns:a16="http://schemas.microsoft.com/office/drawing/2014/main" val="10003"/>
+                  </a:ext>
+                </a:extLst>
               </a:tr>
               <a:tr h="310896">
                 <a:tc>
@@ -10600,7 +10670,7 @@
                     <a:bodyPr/>
                     <a:lstStyle/>
                     <a:p>
-                      <a:pPr indent="0" marL="0">
+                      <a:pPr marL="0" indent="0">
                         <a:buNone/>
                       </a:pPr>
                       <a:r>
@@ -10668,7 +10738,7 @@
                     <a:bodyPr/>
                     <a:lstStyle/>
                     <a:p>
-                      <a:pPr indent="0" marL="0">
+                      <a:pPr marL="0" indent="0">
                         <a:buNone/>
                       </a:pPr>
                       <a:r>
@@ -10736,7 +10806,7 @@
                     <a:bodyPr/>
                     <a:lstStyle/>
                     <a:p>
-                      <a:pPr indent="0" marL="0">
+                      <a:pPr marL="0" indent="0">
                         <a:buNone/>
                       </a:pPr>
                       <a:r>
@@ -10804,7 +10874,7 @@
                     <a:bodyPr/>
                     <a:lstStyle/>
                     <a:p>
-                      <a:pPr indent="0" marL="0">
+                      <a:pPr marL="0" indent="0">
                         <a:buNone/>
                       </a:pPr>
                       <a:r>
@@ -10867,6 +10937,11 @@
                     </a:solidFill>
                   </a:tcPr>
                 </a:tc>
+                <a:extLst>
+                  <a:ext uri="{0D108BD9-81ED-4DB2-BD59-A6C34878D82A}">
+                    <a16:rowId xmlns:a16="http://schemas.microsoft.com/office/drawing/2014/main" val="10004"/>
+                  </a:ext>
+                </a:extLst>
               </a:tr>
               <a:tr h="310896">
                 <a:tc>
@@ -10874,7 +10949,7 @@
                     <a:bodyPr/>
                     <a:lstStyle/>
                     <a:p>
-                      <a:pPr indent="0" marL="0">
+                      <a:pPr marL="0" indent="0">
                         <a:buNone/>
                       </a:pPr>
                       <a:r>
@@ -10942,7 +11017,7 @@
                     <a:bodyPr/>
                     <a:lstStyle/>
                     <a:p>
-                      <a:pPr indent="0" marL="0">
+                      <a:pPr marL="0" indent="0">
                         <a:buNone/>
                       </a:pPr>
                       <a:r>
@@ -11010,7 +11085,7 @@
                     <a:bodyPr/>
                     <a:lstStyle/>
                     <a:p>
-                      <a:pPr indent="0" marL="0">
+                      <a:pPr marL="0" indent="0">
                         <a:buNone/>
                       </a:pPr>
                       <a:r>
@@ -11078,7 +11153,7 @@
                     <a:bodyPr/>
                     <a:lstStyle/>
                     <a:p>
-                      <a:pPr indent="0" marL="0">
+                      <a:pPr marL="0" indent="0">
                         <a:buNone/>
                       </a:pPr>
                       <a:r>
@@ -11141,6 +11216,11 @@
                     </a:solidFill>
                   </a:tcPr>
                 </a:tc>
+                <a:extLst>
+                  <a:ext uri="{0D108BD9-81ED-4DB2-BD59-A6C34878D82A}">
+                    <a16:rowId xmlns:a16="http://schemas.microsoft.com/office/drawing/2014/main" val="10005"/>
+                  </a:ext>
+                </a:extLst>
               </a:tr>
               <a:tr h="310896">
                 <a:tc>
@@ -11148,7 +11228,7 @@
                     <a:bodyPr/>
                     <a:lstStyle/>
                     <a:p>
-                      <a:pPr indent="0" marL="0">
+                      <a:pPr marL="0" indent="0">
                         <a:buNone/>
                       </a:pPr>
                       <a:r>
@@ -11216,7 +11296,7 @@
                     <a:bodyPr/>
                     <a:lstStyle/>
                     <a:p>
-                      <a:pPr indent="0" marL="0">
+                      <a:pPr marL="0" indent="0">
                         <a:buNone/>
                       </a:pPr>
                       <a:r>
@@ -11284,7 +11364,7 @@
                     <a:bodyPr/>
                     <a:lstStyle/>
                     <a:p>
-                      <a:pPr indent="0" marL="0">
+                      <a:pPr marL="0" indent="0">
                         <a:buNone/>
                       </a:pPr>
                       <a:r>
@@ -11352,7 +11432,7 @@
                     <a:bodyPr/>
                     <a:lstStyle/>
                     <a:p>
-                      <a:pPr indent="0" marL="0">
+                      <a:pPr marL="0" indent="0">
                         <a:buNone/>
                       </a:pPr>
                       <a:r>
@@ -11415,6 +11495,11 @@
                     </a:solidFill>
                   </a:tcPr>
                 </a:tc>
+                <a:extLst>
+                  <a:ext uri="{0D108BD9-81ED-4DB2-BD59-A6C34878D82A}">
+                    <a16:rowId xmlns:a16="http://schemas.microsoft.com/office/drawing/2014/main" val="10006"/>
+                  </a:ext>
+                </a:extLst>
               </a:tr>
             </a:tbl>
           </a:graphicData>
@@ -11436,6 +11521,7 @@
         <a:solidFill>
           <a:srgbClr val="0C0C0C"/>
         </a:solidFill>
+        <a:effectLst/>
       </p:bgPr>
     </p:bg>
     <p:spTree>
@@ -11471,6 +11557,13 @@
           </a:solidFill>
           <a:ln/>
         </p:spPr>
+        <p:txBody>
+          <a:bodyPr/>
+          <a:lstStyle/>
+          <a:p>
+            <a:endParaRPr lang="en-GB"/>
+          </a:p>
+        </p:txBody>
       </p:sp>
       <p:sp>
         <p:nvSpPr>
@@ -11493,11 +11586,11 @@
           <a:bodyPr wrap="square" rtlCol="0" anchor="ctr"/>
           <a:lstStyle/>
           <a:p>
-            <a:pPr indent="0" marL="0">
-              <a:buNone/>
-            </a:pPr>
-            <a:r>
-              <a:rPr lang="en-US" sz="1050" spc="400" kern="0" dirty="0">
+            <a:pPr marL="0" indent="0">
+              <a:buNone/>
+            </a:pPr>
+            <a:r>
+              <a:rPr lang="en-US" sz="1050" kern="0" spc="400" dirty="0">
                 <a:solidFill>
                   <a:srgbClr val="A8A29E"/>
                 </a:solidFill>
@@ -11532,7 +11625,7 @@
           <a:bodyPr wrap="square" rtlCol="0" anchor="ctr"/>
           <a:lstStyle/>
           <a:p>
-            <a:pPr indent="0" marL="0">
+            <a:pPr marL="0" indent="0">
               <a:buNone/>
             </a:pPr>
             <a:r>
@@ -11571,11 +11664,11 @@
           <a:bodyPr wrap="square" rtlCol="0" anchor="ctr"/>
           <a:lstStyle/>
           <a:p>
-            <a:pPr indent="0" marL="0">
-              <a:buNone/>
-            </a:pPr>
-            <a:r>
-              <a:rPr lang="en-US" sz="850" spc="200" kern="0" dirty="0">
+            <a:pPr marL="0" indent="0">
+              <a:buNone/>
+            </a:pPr>
+            <a:r>
+              <a:rPr lang="en-US" sz="850" kern="0" spc="200" dirty="0">
                 <a:solidFill>
                   <a:srgbClr val="6B6560"/>
                 </a:solidFill>
@@ -11610,7 +11703,7 @@
           <a:bodyPr wrap="square" rtlCol="0" anchor="ctr"/>
           <a:lstStyle/>
           <a:p>
-            <a:pPr algn="r" indent="0" marL="0">
+            <a:pPr marL="0" indent="0" algn="r">
               <a:buNone/>
             </a:pPr>
             <a:r>
@@ -11813,6 +11906,7 @@
         <a:solidFill>
           <a:srgbClr val="0C0C0C"/>
         </a:solidFill>
+        <a:effectLst/>
       </p:bgPr>
     </p:bg>
     <p:spTree>
@@ -11848,6 +11942,13 @@
           </a:solidFill>
           <a:ln/>
         </p:spPr>
+        <p:txBody>
+          <a:bodyPr/>
+          <a:lstStyle/>
+          <a:p>
+            <a:endParaRPr lang="en-GB"/>
+          </a:p>
+        </p:txBody>
       </p:sp>
       <p:sp>
         <p:nvSpPr>
@@ -11870,11 +11971,11 @@
           <a:bodyPr wrap="square" rtlCol="0" anchor="ctr"/>
           <a:lstStyle/>
           <a:p>
-            <a:pPr indent="0" marL="0">
-              <a:buNone/>
-            </a:pPr>
-            <a:r>
-              <a:rPr lang="en-US" sz="1050" spc="400" kern="0" dirty="0">
+            <a:pPr marL="0" indent="0">
+              <a:buNone/>
+            </a:pPr>
+            <a:r>
+              <a:rPr lang="en-US" sz="1050" kern="0" spc="400" dirty="0">
                 <a:solidFill>
                   <a:srgbClr val="A8A29E"/>
                 </a:solidFill>
@@ -11909,7 +12010,7 @@
           <a:bodyPr wrap="square" rtlCol="0" anchor="ctr"/>
           <a:lstStyle/>
           <a:p>
-            <a:pPr indent="0" marL="0">
+            <a:pPr marL="0" indent="0">
               <a:buNone/>
             </a:pPr>
             <a:r>
@@ -11948,11 +12049,11 @@
           <a:bodyPr wrap="square" rtlCol="0" anchor="ctr"/>
           <a:lstStyle/>
           <a:p>
-            <a:pPr indent="0" marL="0">
-              <a:buNone/>
-            </a:pPr>
-            <a:r>
-              <a:rPr lang="en-US" sz="850" spc="200" kern="0" dirty="0">
+            <a:pPr marL="0" indent="0">
+              <a:buNone/>
+            </a:pPr>
+            <a:r>
+              <a:rPr lang="en-US" sz="850" kern="0" spc="200" dirty="0">
                 <a:solidFill>
                   <a:srgbClr val="6B6560"/>
                 </a:solidFill>
@@ -11987,7 +12088,7 @@
           <a:bodyPr wrap="square" rtlCol="0" anchor="ctr"/>
           <a:lstStyle/>
           <a:p>
-            <a:pPr algn="r" indent="0" marL="0">
+            <a:pPr marL="0" indent="0" algn="r">
               <a:buNone/>
             </a:pPr>
             <a:r>
@@ -12028,8 +12129,20 @@
             <a:tbl>
               <a:tblPr/>
               <a:tblGrid>
-                <a:gridCol w="5760720"/>
-                <a:gridCol w="5303520"/>
+                <a:gridCol w="5760720">
+                  <a:extLst>
+                    <a:ext uri="{9D8B030D-6E8A-4147-A177-3AD203B41FA5}">
+                      <a16:colId xmlns:a16="http://schemas.microsoft.com/office/drawing/2014/main" val="20000"/>
+                    </a:ext>
+                  </a:extLst>
+                </a:gridCol>
+                <a:gridCol w="5303520">
+                  <a:extLst>
+                    <a:ext uri="{9D8B030D-6E8A-4147-A177-3AD203B41FA5}">
+                      <a16:colId xmlns:a16="http://schemas.microsoft.com/office/drawing/2014/main" val="20001"/>
+                    </a:ext>
+                  </a:extLst>
+                </a:gridCol>
               </a:tblGrid>
               <a:tr h="310896">
                 <a:tc>
@@ -12037,11 +12150,11 @@
                     <a:bodyPr/>
                     <a:lstStyle/>
                     <a:p>
-                      <a:pPr indent="0" marL="0">
+                      <a:pPr marL="0" indent="0">
                         <a:buNone/>
                       </a:pPr>
                       <a:r>
-                        <a:rPr lang="en-US" sz="950" b="1" spc="200" kern="0" dirty="0">
+                        <a:rPr lang="en-US" sz="950" b="1" kern="0" spc="200" dirty="0">
                           <a:solidFill>
                             <a:srgbClr val="D4FF00"/>
                           </a:solidFill>
@@ -12105,11 +12218,11 @@
                     <a:bodyPr/>
                     <a:lstStyle/>
                     <a:p>
-                      <a:pPr indent="0" marL="0">
+                      <a:pPr marL="0" indent="0">
                         <a:buNone/>
                       </a:pPr>
                       <a:r>
-                        <a:rPr lang="en-US" sz="950" b="1" spc="200" kern="0" dirty="0">
+                        <a:rPr lang="en-US" sz="950" b="1" kern="0" spc="200" dirty="0">
                           <a:solidFill>
                             <a:srgbClr val="D4FF00"/>
                           </a:solidFill>
@@ -12168,6 +12281,11 @@
                     </a:solidFill>
                   </a:tcPr>
                 </a:tc>
+                <a:extLst>
+                  <a:ext uri="{0D108BD9-81ED-4DB2-BD59-A6C34878D82A}">
+                    <a16:rowId xmlns:a16="http://schemas.microsoft.com/office/drawing/2014/main" val="10000"/>
+                  </a:ext>
+                </a:extLst>
               </a:tr>
               <a:tr h="310896">
                 <a:tc>
@@ -12175,7 +12293,7 @@
                     <a:bodyPr/>
                     <a:lstStyle/>
                     <a:p>
-                      <a:pPr indent="0" marL="0">
+                      <a:pPr marL="0" indent="0">
                         <a:buNone/>
                       </a:pPr>
                       <a:r>
@@ -12243,7 +12361,7 @@
                     <a:bodyPr/>
                     <a:lstStyle/>
                     <a:p>
-                      <a:pPr indent="0" marL="0">
+                      <a:pPr marL="0" indent="0">
                         <a:buNone/>
                       </a:pPr>
                       <a:r>
@@ -12306,6 +12424,11 @@
                     </a:solidFill>
                   </a:tcPr>
                 </a:tc>
+                <a:extLst>
+                  <a:ext uri="{0D108BD9-81ED-4DB2-BD59-A6C34878D82A}">
+                    <a16:rowId xmlns:a16="http://schemas.microsoft.com/office/drawing/2014/main" val="10001"/>
+                  </a:ext>
+                </a:extLst>
               </a:tr>
               <a:tr h="310896">
                 <a:tc>
@@ -12313,7 +12436,7 @@
                     <a:bodyPr/>
                     <a:lstStyle/>
                     <a:p>
-                      <a:pPr indent="0" marL="0">
+                      <a:pPr marL="0" indent="0">
                         <a:buNone/>
                       </a:pPr>
                       <a:r>
@@ -12381,7 +12504,7 @@
                     <a:bodyPr/>
                     <a:lstStyle/>
                     <a:p>
-                      <a:pPr indent="0" marL="0">
+                      <a:pPr marL="0" indent="0">
                         <a:buNone/>
                       </a:pPr>
                       <a:r>
@@ -12444,6 +12567,11 @@
                     </a:solidFill>
                   </a:tcPr>
                 </a:tc>
+                <a:extLst>
+                  <a:ext uri="{0D108BD9-81ED-4DB2-BD59-A6C34878D82A}">
+                    <a16:rowId xmlns:a16="http://schemas.microsoft.com/office/drawing/2014/main" val="10002"/>
+                  </a:ext>
+                </a:extLst>
               </a:tr>
               <a:tr h="310896">
                 <a:tc>
@@ -12451,7 +12579,7 @@
                     <a:bodyPr/>
                     <a:lstStyle/>
                     <a:p>
-                      <a:pPr indent="0" marL="0">
+                      <a:pPr marL="0" indent="0">
                         <a:buNone/>
                       </a:pPr>
                       <a:r>
@@ -12519,7 +12647,7 @@
                     <a:bodyPr/>
                     <a:lstStyle/>
                     <a:p>
-                      <a:pPr indent="0" marL="0">
+                      <a:pPr marL="0" indent="0">
                         <a:buNone/>
                       </a:pPr>
                       <a:r>
@@ -12582,6 +12710,11 @@
                     </a:solidFill>
                   </a:tcPr>
                 </a:tc>
+                <a:extLst>
+                  <a:ext uri="{0D108BD9-81ED-4DB2-BD59-A6C34878D82A}">
+                    <a16:rowId xmlns:a16="http://schemas.microsoft.com/office/drawing/2014/main" val="10003"/>
+                  </a:ext>
+                </a:extLst>
               </a:tr>
               <a:tr h="310896">
                 <a:tc>
@@ -12589,7 +12722,7 @@
                     <a:bodyPr/>
                     <a:lstStyle/>
                     <a:p>
-                      <a:pPr indent="0" marL="0">
+                      <a:pPr marL="0" indent="0">
                         <a:buNone/>
                       </a:pPr>
                       <a:r>
@@ -12657,7 +12790,7 @@
                     <a:bodyPr/>
                     <a:lstStyle/>
                     <a:p>
-                      <a:pPr indent="0" marL="0">
+                      <a:pPr marL="0" indent="0">
                         <a:buNone/>
                       </a:pPr>
                       <a:r>
@@ -12720,6 +12853,11 @@
                     </a:solidFill>
                   </a:tcPr>
                 </a:tc>
+                <a:extLst>
+                  <a:ext uri="{0D108BD9-81ED-4DB2-BD59-A6C34878D82A}">
+                    <a16:rowId xmlns:a16="http://schemas.microsoft.com/office/drawing/2014/main" val="10004"/>
+                  </a:ext>
+                </a:extLst>
               </a:tr>
               <a:tr h="310896">
                 <a:tc>
@@ -12727,7 +12865,7 @@
                     <a:bodyPr/>
                     <a:lstStyle/>
                     <a:p>
-                      <a:pPr indent="0" marL="0">
+                      <a:pPr marL="0" indent="0">
                         <a:buNone/>
                       </a:pPr>
                       <a:r>
@@ -12795,7 +12933,7 @@
                     <a:bodyPr/>
                     <a:lstStyle/>
                     <a:p>
-                      <a:pPr indent="0" marL="0">
+                      <a:pPr marL="0" indent="0">
                         <a:buNone/>
                       </a:pPr>
                       <a:r>
@@ -12858,6 +12996,11 @@
                     </a:solidFill>
                   </a:tcPr>
                 </a:tc>
+                <a:extLst>
+                  <a:ext uri="{0D108BD9-81ED-4DB2-BD59-A6C34878D82A}">
+                    <a16:rowId xmlns:a16="http://schemas.microsoft.com/office/drawing/2014/main" val="10005"/>
+                  </a:ext>
+                </a:extLst>
               </a:tr>
               <a:tr h="310896">
                 <a:tc>
@@ -12865,7 +13008,7 @@
                     <a:bodyPr/>
                     <a:lstStyle/>
                     <a:p>
-                      <a:pPr indent="0" marL="0">
+                      <a:pPr marL="0" indent="0">
                         <a:buNone/>
                       </a:pPr>
                       <a:r>
@@ -12933,7 +13076,7 @@
                     <a:bodyPr/>
                     <a:lstStyle/>
                     <a:p>
-                      <a:pPr indent="0" marL="0">
+                      <a:pPr marL="0" indent="0">
                         <a:buNone/>
                       </a:pPr>
                       <a:r>
@@ -12996,6 +13139,11 @@
                     </a:solidFill>
                   </a:tcPr>
                 </a:tc>
+                <a:extLst>
+                  <a:ext uri="{0D108BD9-81ED-4DB2-BD59-A6C34878D82A}">
+                    <a16:rowId xmlns:a16="http://schemas.microsoft.com/office/drawing/2014/main" val="10006"/>
+                  </a:ext>
+                </a:extLst>
               </a:tr>
             </a:tbl>
           </a:graphicData>
@@ -13022,11 +13170,11 @@
           <a:bodyPr wrap="square" rtlCol="0" anchor="ctr"/>
           <a:lstStyle/>
           <a:p>
-            <a:pPr indent="0" marL="0">
-              <a:buNone/>
-            </a:pPr>
-            <a:r>
-              <a:rPr lang="en-US" sz="1050" spc="100" kern="0" dirty="0">
+            <a:pPr marL="0" indent="0">
+              <a:buNone/>
+            </a:pPr>
+            <a:r>
+              <a:rPr lang="en-US" sz="1050" kern="0" spc="100" dirty="0">
                 <a:solidFill>
                   <a:srgbClr val="A8A29E"/>
                 </a:solidFill>
@@ -13056,6 +13204,7 @@
         <a:solidFill>
           <a:srgbClr val="0C0C0C"/>
         </a:solidFill>
+        <a:effectLst/>
       </p:bgPr>
     </p:bg>
     <p:spTree>
@@ -13091,6 +13240,13 @@
           </a:solidFill>
           <a:ln/>
         </p:spPr>
+        <p:txBody>
+          <a:bodyPr/>
+          <a:lstStyle/>
+          <a:p>
+            <a:endParaRPr lang="en-GB"/>
+          </a:p>
+        </p:txBody>
       </p:sp>
       <p:sp>
         <p:nvSpPr>
@@ -13113,7 +13269,7 @@
           <a:bodyPr wrap="square" rtlCol="0" anchor="ctr"/>
           <a:lstStyle/>
           <a:p>
-            <a:pPr indent="0" marL="0">
+            <a:pPr marL="0" indent="0">
               <a:buNone/>
             </a:pPr>
             <a:r>
@@ -13152,7 +13308,7 @@
           <a:bodyPr wrap="square" rtlCol="0" anchor="ctr"/>
           <a:lstStyle/>
           <a:p>
-            <a:pPr indent="0" marL="0">
+            <a:pPr marL="0" indent="0">
               <a:buNone/>
             </a:pPr>
             <a:r>
@@ -13164,7 +13320,7 @@
                 <a:ea typeface="DM Sans" pitchFamily="34" charset="-122"/>
                 <a:cs typeface="DM Sans" pitchFamily="34" charset="-120"/>
               </a:rPr>
-              <a:t>Clone it, kill a remote, watch the rest keep running.</a:t>
+              <a:t>@DevlinDuldulao</a:t>
             </a:r>
             <a:endParaRPr lang="en-US" sz="2000" dirty="0"/>
           </a:p>
@@ -13191,11 +13347,11 @@
           <a:bodyPr wrap="square" rtlCol="0" anchor="ctr"/>
           <a:lstStyle/>
           <a:p>
-            <a:pPr indent="0" marL="0">
-              <a:buNone/>
-            </a:pPr>
-            <a:r>
-              <a:rPr lang="en-US" sz="1300" spc="100" kern="0" dirty="0">
+            <a:pPr marL="0" indent="0">
+              <a:buNone/>
+            </a:pPr>
+            <a:r>
+              <a:rPr lang="en-US" sz="1300" kern="0" spc="100" dirty="0">
                 <a:solidFill>
                   <a:srgbClr val="D4FF00"/>
                 </a:solidFill>
@@ -13203,12 +13359,48 @@
                 <a:ea typeface="IBM Plex Mono" pitchFamily="34" charset="-122"/>
                 <a:cs typeface="IBM Plex Mono" pitchFamily="34" charset="-120"/>
               </a:rPr>
-              <a:t>Repository link in the session materials</a:t>
+              <a:t>Social links</a:t>
             </a:r>
             <a:endParaRPr lang="en-US" sz="1300" dirty="0"/>
           </a:p>
         </p:txBody>
       </p:sp>
+      <p:pic>
+        <p:nvPicPr>
+          <p:cNvPr id="7" name="Picture 6">
+            <a:extLst>
+              <a:ext uri="{FF2B5EF4-FFF2-40B4-BE49-F238E27FC236}">
+                <a16:creationId xmlns:a16="http://schemas.microsoft.com/office/drawing/2014/main" id="{7C2162D8-6628-077A-0F25-26D5C44D48DC}"/>
+              </a:ext>
+            </a:extLst>
+          </p:cNvPr>
+          <p:cNvPicPr>
+            <a:picLocks noChangeAspect="1"/>
+          </p:cNvPicPr>
+          <p:nvPr/>
+        </p:nvPicPr>
+        <p:blipFill>
+          <a:blip r:embed="rId3">
+            <a:extLst>
+              <a:ext uri="{28A0092B-C50C-407E-A947-70E740481C1C}">
+                <a14:useLocalDpi xmlns:a14="http://schemas.microsoft.com/office/drawing/2010/main" val="0"/>
+              </a:ext>
+            </a:extLst>
+          </a:blip>
+          <a:stretch>
+            <a:fillRect/>
+          </a:stretch>
+        </p:blipFill>
+        <p:spPr>
+          <a:xfrm>
+            <a:off x="6673825" y="717220"/>
+            <a:ext cx="4874920" cy="4874920"/>
+          </a:xfrm>
+          <a:prstGeom prst="rect">
+            <a:avLst/>
+          </a:prstGeom>
+        </p:spPr>
+      </p:pic>
     </p:spTree>
   </p:cSld>
   <p:clrMapOvr>
@@ -13225,6 +13417,7 @@
         <a:solidFill>
           <a:srgbClr val="0C0C0C"/>
         </a:solidFill>
+        <a:effectLst/>
       </p:bgPr>
     </p:bg>
     <p:spTree>
@@ -13260,6 +13453,13 @@
           </a:solidFill>
           <a:ln/>
         </p:spPr>
+        <p:txBody>
+          <a:bodyPr/>
+          <a:lstStyle/>
+          <a:p>
+            <a:endParaRPr lang="en-GB"/>
+          </a:p>
+        </p:txBody>
       </p:sp>
       <p:sp>
         <p:nvSpPr>
@@ -13282,11 +13482,11 @@
           <a:bodyPr wrap="square" rtlCol="0" anchor="ctr"/>
           <a:lstStyle/>
           <a:p>
-            <a:pPr indent="0" marL="0">
-              <a:buNone/>
-            </a:pPr>
-            <a:r>
-              <a:rPr lang="en-US" sz="1050" spc="400" kern="0" dirty="0">
+            <a:pPr marL="0" indent="0">
+              <a:buNone/>
+            </a:pPr>
+            <a:r>
+              <a:rPr lang="en-US" sz="1050" kern="0" spc="400" dirty="0">
                 <a:solidFill>
                   <a:srgbClr val="A8A29E"/>
                 </a:solidFill>
@@ -13321,7 +13521,7 @@
           <a:bodyPr wrap="square" rtlCol="0" anchor="ctr"/>
           <a:lstStyle/>
           <a:p>
-            <a:pPr indent="0" marL="0">
+            <a:pPr marL="0" indent="0">
               <a:buNone/>
             </a:pPr>
             <a:r>
@@ -13360,11 +13560,11 @@
           <a:bodyPr wrap="square" rtlCol="0" anchor="ctr"/>
           <a:lstStyle/>
           <a:p>
-            <a:pPr indent="0" marL="0">
-              <a:buNone/>
-            </a:pPr>
-            <a:r>
-              <a:rPr lang="en-US" sz="850" spc="200" kern="0" dirty="0">
+            <a:pPr marL="0" indent="0">
+              <a:buNone/>
+            </a:pPr>
+            <a:r>
+              <a:rPr lang="en-US" sz="850" kern="0" spc="200" dirty="0">
                 <a:solidFill>
                   <a:srgbClr val="6B6560"/>
                 </a:solidFill>
@@ -13399,7 +13599,7 @@
           <a:bodyPr wrap="square" rtlCol="0" anchor="ctr"/>
           <a:lstStyle/>
           <a:p>
-            <a:pPr algn="r" indent="0" marL="0">
+            <a:pPr marL="0" indent="0" algn="r">
               <a:buNone/>
             </a:pPr>
             <a:r>
@@ -13438,7 +13638,7 @@
           <a:bodyPr wrap="square" rtlCol="0" anchor="t"/>
           <a:lstStyle/>
           <a:p>
-            <a:pPr algn="l" indent="0" marL="0">
+            <a:pPr marL="0" indent="0" algn="l">
               <a:lnSpc>
                 <a:spcPts val="1820"/>
               </a:lnSpc>
@@ -13458,7 +13658,7 @@
             <a:endParaRPr lang="en-US" sz="1300" dirty="0"/>
           </a:p>
           <a:p>
-            <a:pPr algn="l" indent="0" marL="0">
+            <a:pPr marL="0" indent="0" algn="l">
               <a:lnSpc>
                 <a:spcPts val="1820"/>
               </a:lnSpc>
@@ -13478,7 +13678,7 @@
             <a:endParaRPr lang="en-US" sz="1300" dirty="0"/>
           </a:p>
           <a:p>
-            <a:pPr algn="l" indent="0" marL="0">
+            <a:pPr marL="0" indent="0" algn="l">
               <a:lnSpc>
                 <a:spcPts val="1820"/>
               </a:lnSpc>
@@ -13498,7 +13698,7 @@
             <a:endParaRPr lang="en-US" sz="1300" dirty="0"/>
           </a:p>
           <a:p>
-            <a:pPr algn="l" indent="0" marL="0">
+            <a:pPr marL="0" indent="0" algn="l">
               <a:lnSpc>
                 <a:spcPts val="1820"/>
               </a:lnSpc>
@@ -13518,7 +13718,7 @@
             <a:endParaRPr lang="en-US" sz="1300" dirty="0"/>
           </a:p>
           <a:p>
-            <a:pPr algn="l" indent="0" marL="0">
+            <a:pPr marL="0" indent="0" algn="l">
               <a:lnSpc>
                 <a:spcPts val="1820"/>
               </a:lnSpc>
@@ -13541,7 +13741,7 @@
       </p:sp>
       <p:graphicFrame>
         <p:nvGraphicFramePr>
-          <p:cNvPr id="3" name="Table 0"/>
+          <p:cNvPr id="7" name="Table 0"/>
           <p:cNvGraphicFramePr>
             <a:graphicFrameLocks noGrp="1"/>
           </p:cNvGraphicFramePr>
@@ -13555,15 +13755,27 @@
         </p:nvGraphicFramePr>
         <p:xfrm>
           <a:off x="548640" y="3246120"/>
-          <a:ext cx="11064240" cy="914400"/>
+          <a:ext cx="11064240" cy="1652016"/>
         </p:xfrm>
         <a:graphic>
           <a:graphicData uri="http://schemas.openxmlformats.org/drawingml/2006/table">
             <a:tbl>
               <a:tblPr/>
               <a:tblGrid>
-                <a:gridCol w="5532120"/>
-                <a:gridCol w="5532120"/>
+                <a:gridCol w="5532120">
+                  <a:extLst>
+                    <a:ext uri="{9D8B030D-6E8A-4147-A177-3AD203B41FA5}">
+                      <a16:colId xmlns:a16="http://schemas.microsoft.com/office/drawing/2014/main" val="20000"/>
+                    </a:ext>
+                  </a:extLst>
+                </a:gridCol>
+                <a:gridCol w="5532120">
+                  <a:extLst>
+                    <a:ext uri="{9D8B030D-6E8A-4147-A177-3AD203B41FA5}">
+                      <a16:colId xmlns:a16="http://schemas.microsoft.com/office/drawing/2014/main" val="20001"/>
+                    </a:ext>
+                  </a:extLst>
+                </a:gridCol>
               </a:tblGrid>
               <a:tr h="310896">
                 <a:tc>
@@ -13571,11 +13783,11 @@
                     <a:bodyPr/>
                     <a:lstStyle/>
                     <a:p>
-                      <a:pPr indent="0" marL="0">
+                      <a:pPr marL="0" indent="0">
                         <a:buNone/>
                       </a:pPr>
                       <a:r>
-                        <a:rPr lang="en-US" sz="1000" b="1" spc="200" kern="0" dirty="0">
+                        <a:rPr lang="en-US" sz="1000" b="1" kern="0" spc="200" dirty="0">
                           <a:solidFill>
                             <a:srgbClr val="D4FF00"/>
                           </a:solidFill>
@@ -13639,11 +13851,11 @@
                     <a:bodyPr/>
                     <a:lstStyle/>
                     <a:p>
-                      <a:pPr indent="0" marL="0">
+                      <a:pPr marL="0" indent="0">
                         <a:buNone/>
                       </a:pPr>
                       <a:r>
-                        <a:rPr lang="en-US" sz="1000" b="1" spc="200" kern="0" dirty="0">
+                        <a:rPr lang="en-US" sz="1000" b="1" kern="0" spc="200" dirty="0">
                           <a:solidFill>
                             <a:srgbClr val="D4FF00"/>
                           </a:solidFill>
@@ -13702,6 +13914,11 @@
                     </a:solidFill>
                   </a:tcPr>
                 </a:tc>
+                <a:extLst>
+                  <a:ext uri="{0D108BD9-81ED-4DB2-BD59-A6C34878D82A}">
+                    <a16:rowId xmlns:a16="http://schemas.microsoft.com/office/drawing/2014/main" val="10000"/>
+                  </a:ext>
+                </a:extLst>
               </a:tr>
               <a:tr h="310896">
                 <a:tc>
@@ -13709,7 +13926,7 @@
                     <a:bodyPr/>
                     <a:lstStyle/>
                     <a:p>
-                      <a:pPr indent="0" marL="0">
+                      <a:pPr marL="0" indent="0">
                         <a:buNone/>
                       </a:pPr>
                       <a:r>
@@ -13777,7 +13994,7 @@
                     <a:bodyPr/>
                     <a:lstStyle/>
                     <a:p>
-                      <a:pPr indent="0" marL="0">
+                      <a:pPr marL="0" indent="0">
                         <a:buNone/>
                       </a:pPr>
                       <a:r>
@@ -13840,6 +14057,11 @@
                     </a:solidFill>
                   </a:tcPr>
                 </a:tc>
+                <a:extLst>
+                  <a:ext uri="{0D108BD9-81ED-4DB2-BD59-A6C34878D82A}">
+                    <a16:rowId xmlns:a16="http://schemas.microsoft.com/office/drawing/2014/main" val="10001"/>
+                  </a:ext>
+                </a:extLst>
               </a:tr>
               <a:tr h="310896">
                 <a:tc>
@@ -13847,7 +14069,7 @@
                     <a:bodyPr/>
                     <a:lstStyle/>
                     <a:p>
-                      <a:pPr indent="0" marL="0">
+                      <a:pPr marL="0" indent="0">
                         <a:buNone/>
                       </a:pPr>
                       <a:r>
@@ -13915,7 +14137,7 @@
                     <a:bodyPr/>
                     <a:lstStyle/>
                     <a:p>
-                      <a:pPr indent="0" marL="0">
+                      <a:pPr marL="0" indent="0">
                         <a:buNone/>
                       </a:pPr>
                       <a:r>
@@ -13978,6 +14200,11 @@
                     </a:solidFill>
                   </a:tcPr>
                 </a:tc>
+                <a:extLst>
+                  <a:ext uri="{0D108BD9-81ED-4DB2-BD59-A6C34878D82A}">
+                    <a16:rowId xmlns:a16="http://schemas.microsoft.com/office/drawing/2014/main" val="10002"/>
+                  </a:ext>
+                </a:extLst>
               </a:tr>
               <a:tr h="310896">
                 <a:tc>
@@ -13985,7 +14212,7 @@
                     <a:bodyPr/>
                     <a:lstStyle/>
                     <a:p>
-                      <a:pPr indent="0" marL="0">
+                      <a:pPr marL="0" indent="0">
                         <a:buNone/>
                       </a:pPr>
                       <a:r>
@@ -14053,7 +14280,7 @@
                     <a:bodyPr/>
                     <a:lstStyle/>
                     <a:p>
-                      <a:pPr indent="0" marL="0">
+                      <a:pPr marL="0" indent="0">
                         <a:buNone/>
                       </a:pPr>
                       <a:r>
@@ -14116,6 +14343,11 @@
                     </a:solidFill>
                   </a:tcPr>
                 </a:tc>
+                <a:extLst>
+                  <a:ext uri="{0D108BD9-81ED-4DB2-BD59-A6C34878D82A}">
+                    <a16:rowId xmlns:a16="http://schemas.microsoft.com/office/drawing/2014/main" val="10003"/>
+                  </a:ext>
+                </a:extLst>
               </a:tr>
               <a:tr h="310896">
                 <a:tc>
@@ -14123,7 +14355,7 @@
                     <a:bodyPr/>
                     <a:lstStyle/>
                     <a:p>
-                      <a:pPr indent="0" marL="0">
+                      <a:pPr marL="0" indent="0">
                         <a:buNone/>
                       </a:pPr>
                       <a:r>
@@ -14191,7 +14423,7 @@
                     <a:bodyPr/>
                     <a:lstStyle/>
                     <a:p>
-                      <a:pPr indent="0" marL="0">
+                      <a:pPr marL="0" indent="0">
                         <a:buNone/>
                       </a:pPr>
                       <a:r>
@@ -14254,6 +14486,11 @@
                     </a:solidFill>
                   </a:tcPr>
                 </a:tc>
+                <a:extLst>
+                  <a:ext uri="{0D108BD9-81ED-4DB2-BD59-A6C34878D82A}">
+                    <a16:rowId xmlns:a16="http://schemas.microsoft.com/office/drawing/2014/main" val="10004"/>
+                  </a:ext>
+                </a:extLst>
               </a:tr>
             </a:tbl>
           </a:graphicData>
@@ -14278,6 +14515,13 @@
           </a:solidFill>
           <a:ln/>
         </p:spPr>
+        <p:txBody>
+          <a:bodyPr/>
+          <a:lstStyle/>
+          <a:p>
+            <a:endParaRPr lang="en-GB"/>
+          </a:p>
+        </p:txBody>
       </p:sp>
       <p:sp>
         <p:nvSpPr>
@@ -14300,7 +14544,7 @@
           <a:bodyPr wrap="square" rtlCol="0" anchor="ctr"/>
           <a:lstStyle/>
           <a:p>
-            <a:pPr indent="0" marL="0">
+            <a:pPr marL="0" indent="0">
               <a:buNone/>
             </a:pPr>
             <a:r>
@@ -14334,6 +14578,7 @@
         <a:solidFill>
           <a:srgbClr val="0C0C0C"/>
         </a:solidFill>
+        <a:effectLst/>
       </p:bgPr>
     </p:bg>
     <p:spTree>
@@ -14369,6 +14614,13 @@
           </a:solidFill>
           <a:ln/>
         </p:spPr>
+        <p:txBody>
+          <a:bodyPr/>
+          <a:lstStyle/>
+          <a:p>
+            <a:endParaRPr lang="en-GB"/>
+          </a:p>
+        </p:txBody>
       </p:sp>
       <p:sp>
         <p:nvSpPr>
@@ -14391,11 +14643,11 @@
           <a:bodyPr wrap="square" rtlCol="0" anchor="ctr"/>
           <a:lstStyle/>
           <a:p>
-            <a:pPr indent="0" marL="0">
-              <a:buNone/>
-            </a:pPr>
-            <a:r>
-              <a:rPr lang="en-US" sz="1050" spc="400" kern="0" dirty="0">
+            <a:pPr marL="0" indent="0">
+              <a:buNone/>
+            </a:pPr>
+            <a:r>
+              <a:rPr lang="en-US" sz="1050" kern="0" spc="400" dirty="0">
                 <a:solidFill>
                   <a:srgbClr val="A8A29E"/>
                 </a:solidFill>
@@ -14430,7 +14682,7 @@
           <a:bodyPr wrap="square" rtlCol="0" anchor="ctr"/>
           <a:lstStyle/>
           <a:p>
-            <a:pPr indent="0" marL="0">
+            <a:pPr marL="0" indent="0">
               <a:buNone/>
             </a:pPr>
             <a:r>
@@ -14469,11 +14721,11 @@
           <a:bodyPr wrap="square" rtlCol="0" anchor="ctr"/>
           <a:lstStyle/>
           <a:p>
-            <a:pPr indent="0" marL="0">
-              <a:buNone/>
-            </a:pPr>
-            <a:r>
-              <a:rPr lang="en-US" sz="850" spc="200" kern="0" dirty="0">
+            <a:pPr marL="0" indent="0">
+              <a:buNone/>
+            </a:pPr>
+            <a:r>
+              <a:rPr lang="en-US" sz="850" kern="0" spc="200" dirty="0">
                 <a:solidFill>
                   <a:srgbClr val="6B6560"/>
                 </a:solidFill>
@@ -14508,7 +14760,7 @@
           <a:bodyPr wrap="square" rtlCol="0" anchor="ctr"/>
           <a:lstStyle/>
           <a:p>
-            <a:pPr algn="r" indent="0" marL="0">
+            <a:pPr marL="0" indent="0" algn="r">
               <a:buNone/>
             </a:pPr>
             <a:r>
@@ -14528,7 +14780,7 @@
       </p:sp>
       <p:graphicFrame>
         <p:nvGraphicFramePr>
-          <p:cNvPr id="4" name="Table 0"/>
+          <p:cNvPr id="7" name="Table 0"/>
           <p:cNvGraphicFramePr>
             <a:graphicFrameLocks noGrp="1"/>
           </p:cNvGraphicFramePr>
@@ -14542,16 +14794,34 @@
         </p:nvGraphicFramePr>
         <p:xfrm>
           <a:off x="548640" y="1737360"/>
-          <a:ext cx="11064240" cy="914400"/>
+          <a:ext cx="11064240" cy="1234440"/>
         </p:xfrm>
         <a:graphic>
           <a:graphicData uri="http://schemas.openxmlformats.org/drawingml/2006/table">
             <a:tbl>
               <a:tblPr/>
               <a:tblGrid>
-                <a:gridCol w="2834640"/>
-                <a:gridCol w="2743200"/>
-                <a:gridCol w="5486400"/>
+                <a:gridCol w="2834640">
+                  <a:extLst>
+                    <a:ext uri="{9D8B030D-6E8A-4147-A177-3AD203B41FA5}">
+                      <a16:colId xmlns:a16="http://schemas.microsoft.com/office/drawing/2014/main" val="20000"/>
+                    </a:ext>
+                  </a:extLst>
+                </a:gridCol>
+                <a:gridCol w="2743200">
+                  <a:extLst>
+                    <a:ext uri="{9D8B030D-6E8A-4147-A177-3AD203B41FA5}">
+                      <a16:colId xmlns:a16="http://schemas.microsoft.com/office/drawing/2014/main" val="20001"/>
+                    </a:ext>
+                  </a:extLst>
+                </a:gridCol>
+                <a:gridCol w="5486400">
+                  <a:extLst>
+                    <a:ext uri="{9D8B030D-6E8A-4147-A177-3AD203B41FA5}">
+                      <a16:colId xmlns:a16="http://schemas.microsoft.com/office/drawing/2014/main" val="20002"/>
+                    </a:ext>
+                  </a:extLst>
+                </a:gridCol>
               </a:tblGrid>
               <a:tr h="411480">
                 <a:tc>
@@ -14559,11 +14829,11 @@
                     <a:bodyPr/>
                     <a:lstStyle/>
                     <a:p>
-                      <a:pPr indent="0" marL="0">
+                      <a:pPr marL="0" indent="0">
                         <a:buNone/>
                       </a:pPr>
                       <a:r>
-                        <a:rPr lang="en-US" sz="1100" b="1" spc="200" kern="0" dirty="0">
+                        <a:rPr lang="en-US" sz="1100" b="1" kern="0" spc="200" dirty="0">
                           <a:solidFill>
                             <a:srgbClr val="D4FF00"/>
                           </a:solidFill>
@@ -14627,11 +14897,11 @@
                     <a:bodyPr/>
                     <a:lstStyle/>
                     <a:p>
-                      <a:pPr indent="0" marL="0">
+                      <a:pPr marL="0" indent="0">
                         <a:buNone/>
                       </a:pPr>
                       <a:r>
-                        <a:rPr lang="en-US" sz="1100" b="1" spc="200" kern="0" dirty="0">
+                        <a:rPr lang="en-US" sz="1100" b="1" kern="0" spc="200" dirty="0">
                           <a:solidFill>
                             <a:srgbClr val="D4FF00"/>
                           </a:solidFill>
@@ -14695,11 +14965,11 @@
                     <a:bodyPr/>
                     <a:lstStyle/>
                     <a:p>
-                      <a:pPr indent="0" marL="0">
+                      <a:pPr marL="0" indent="0">
                         <a:buNone/>
                       </a:pPr>
                       <a:r>
-                        <a:rPr lang="en-US" sz="1100" b="1" spc="200" kern="0" dirty="0">
+                        <a:rPr lang="en-US" sz="1100" b="1" kern="0" spc="200" dirty="0">
                           <a:solidFill>
                             <a:srgbClr val="D4FF00"/>
                           </a:solidFill>
@@ -14758,6 +15028,11 @@
                     </a:solidFill>
                   </a:tcPr>
                 </a:tc>
+                <a:extLst>
+                  <a:ext uri="{0D108BD9-81ED-4DB2-BD59-A6C34878D82A}">
+                    <a16:rowId xmlns:a16="http://schemas.microsoft.com/office/drawing/2014/main" val="10000"/>
+                  </a:ext>
+                </a:extLst>
               </a:tr>
               <a:tr h="411480">
                 <a:tc>
@@ -14765,7 +15040,7 @@
                     <a:bodyPr/>
                     <a:lstStyle/>
                     <a:p>
-                      <a:pPr indent="0" marL="0">
+                      <a:pPr marL="0" indent="0">
                         <a:buNone/>
                       </a:pPr>
                       <a:r>
@@ -14833,7 +15108,7 @@
                     <a:bodyPr/>
                     <a:lstStyle/>
                     <a:p>
-                      <a:pPr indent="0" marL="0">
+                      <a:pPr marL="0" indent="0">
                         <a:buNone/>
                       </a:pPr>
                       <a:r>
@@ -14901,7 +15176,7 @@
                     <a:bodyPr/>
                     <a:lstStyle/>
                     <a:p>
-                      <a:pPr indent="0" marL="0">
+                      <a:pPr marL="0" indent="0">
                         <a:buNone/>
                       </a:pPr>
                       <a:r>
@@ -14964,6 +15239,11 @@
                     </a:solidFill>
                   </a:tcPr>
                 </a:tc>
+                <a:extLst>
+                  <a:ext uri="{0D108BD9-81ED-4DB2-BD59-A6C34878D82A}">
+                    <a16:rowId xmlns:a16="http://schemas.microsoft.com/office/drawing/2014/main" val="10001"/>
+                  </a:ext>
+                </a:extLst>
               </a:tr>
               <a:tr h="411480">
                 <a:tc>
@@ -14971,7 +15251,7 @@
                     <a:bodyPr/>
                     <a:lstStyle/>
                     <a:p>
-                      <a:pPr indent="0" marL="0">
+                      <a:pPr marL="0" indent="0">
                         <a:buNone/>
                       </a:pPr>
                       <a:r>
@@ -15039,7 +15319,7 @@
                     <a:bodyPr/>
                     <a:lstStyle/>
                     <a:p>
-                      <a:pPr indent="0" marL="0">
+                      <a:pPr marL="0" indent="0">
                         <a:buNone/>
                       </a:pPr>
                       <a:r>
@@ -15107,7 +15387,7 @@
                     <a:bodyPr/>
                     <a:lstStyle/>
                     <a:p>
-                      <a:pPr indent="0" marL="0">
+                      <a:pPr marL="0" indent="0">
                         <a:buNone/>
                       </a:pPr>
                       <a:r>
@@ -15170,6 +15450,11 @@
                     </a:solidFill>
                   </a:tcPr>
                 </a:tc>
+                <a:extLst>
+                  <a:ext uri="{0D108BD9-81ED-4DB2-BD59-A6C34878D82A}">
+                    <a16:rowId xmlns:a16="http://schemas.microsoft.com/office/drawing/2014/main" val="10002"/>
+                  </a:ext>
+                </a:extLst>
               </a:tr>
             </a:tbl>
           </a:graphicData>
@@ -15196,7 +15481,7 @@
           <a:bodyPr wrap="square" rtlCol="0" anchor="t"/>
           <a:lstStyle/>
           <a:p>
-            <a:pPr algn="l" indent="0" marL="0">
+            <a:pPr marL="0" indent="0" algn="l">
               <a:lnSpc>
                 <a:spcPts val="1750"/>
               </a:lnSpc>
@@ -15216,7 +15501,7 @@
             <a:endParaRPr lang="en-US" sz="1250" dirty="0"/>
           </a:p>
           <a:p>
-            <a:pPr algn="l" indent="0" marL="0">
+            <a:pPr marL="0" indent="0" algn="l">
               <a:lnSpc>
                 <a:spcPts val="1750"/>
               </a:lnSpc>
@@ -15236,7 +15521,7 @@
             <a:endParaRPr lang="en-US" sz="1250" dirty="0"/>
           </a:p>
           <a:p>
-            <a:pPr algn="l" indent="0" marL="0">
+            <a:pPr marL="0" indent="0" algn="l">
               <a:lnSpc>
                 <a:spcPts val="1750"/>
               </a:lnSpc>
@@ -15245,7 +15530,7 @@
             <a:endParaRPr lang="en-US" sz="1250" dirty="0"/>
           </a:p>
           <a:p>
-            <a:pPr algn="l" indent="0" marL="0">
+            <a:pPr marL="0" indent="0" algn="l">
               <a:lnSpc>
                 <a:spcPts val="1750"/>
               </a:lnSpc>
@@ -15265,7 +15550,7 @@
             <a:endParaRPr lang="en-US" sz="1250" dirty="0"/>
           </a:p>
           <a:p>
-            <a:pPr algn="l" indent="0" marL="0">
+            <a:pPr marL="0" indent="0" algn="l">
               <a:lnSpc>
                 <a:spcPts val="1750"/>
               </a:lnSpc>
@@ -15305,6 +15590,13 @@
           </a:solidFill>
           <a:ln/>
         </p:spPr>
+        <p:txBody>
+          <a:bodyPr/>
+          <a:lstStyle/>
+          <a:p>
+            <a:endParaRPr lang="en-GB"/>
+          </a:p>
+        </p:txBody>
       </p:sp>
       <p:sp>
         <p:nvSpPr>
@@ -15327,7 +15619,7 @@
           <a:bodyPr wrap="square" rtlCol="0" anchor="ctr"/>
           <a:lstStyle/>
           <a:p>
-            <a:pPr indent="0" marL="0">
+            <a:pPr marL="0" indent="0">
               <a:buNone/>
             </a:pPr>
             <a:r>
@@ -15361,6 +15653,7 @@
         <a:solidFill>
           <a:srgbClr val="0C0C0C"/>
         </a:solidFill>
+        <a:effectLst/>
       </p:bgPr>
     </p:bg>
     <p:spTree>
@@ -15396,6 +15689,13 @@
           </a:solidFill>
           <a:ln/>
         </p:spPr>
+        <p:txBody>
+          <a:bodyPr/>
+          <a:lstStyle/>
+          <a:p>
+            <a:endParaRPr lang="en-GB"/>
+          </a:p>
+        </p:txBody>
       </p:sp>
       <p:sp>
         <p:nvSpPr>
@@ -15418,11 +15718,11 @@
           <a:bodyPr wrap="square" rtlCol="0" anchor="ctr"/>
           <a:lstStyle/>
           <a:p>
-            <a:pPr indent="0" marL="0">
-              <a:buNone/>
-            </a:pPr>
-            <a:r>
-              <a:rPr lang="en-US" sz="1050" spc="400" kern="0" dirty="0">
+            <a:pPr marL="0" indent="0">
+              <a:buNone/>
+            </a:pPr>
+            <a:r>
+              <a:rPr lang="en-US" sz="1050" kern="0" spc="400" dirty="0">
                 <a:solidFill>
                   <a:srgbClr val="A8A29E"/>
                 </a:solidFill>
@@ -15457,7 +15757,7 @@
           <a:bodyPr wrap="square" rtlCol="0" anchor="ctr"/>
           <a:lstStyle/>
           <a:p>
-            <a:pPr indent="0" marL="0">
+            <a:pPr marL="0" indent="0">
               <a:buNone/>
             </a:pPr>
             <a:r>
@@ -15496,11 +15796,11 @@
           <a:bodyPr wrap="square" rtlCol="0" anchor="ctr"/>
           <a:lstStyle/>
           <a:p>
-            <a:pPr indent="0" marL="0">
-              <a:buNone/>
-            </a:pPr>
-            <a:r>
-              <a:rPr lang="en-US" sz="850" spc="200" kern="0" dirty="0">
+            <a:pPr marL="0" indent="0">
+              <a:buNone/>
+            </a:pPr>
+            <a:r>
+              <a:rPr lang="en-US" sz="850" kern="0" spc="200" dirty="0">
                 <a:solidFill>
                   <a:srgbClr val="6B6560"/>
                 </a:solidFill>
@@ -15535,7 +15835,7 @@
           <a:bodyPr wrap="square" rtlCol="0" anchor="ctr"/>
           <a:lstStyle/>
           <a:p>
-            <a:pPr algn="r" indent="0" marL="0">
+            <a:pPr marL="0" indent="0" algn="r">
               <a:buNone/>
             </a:pPr>
             <a:r>
@@ -15574,7 +15874,7 @@
           <a:bodyPr wrap="square" rtlCol="0" anchor="t"/>
           <a:lstStyle/>
           <a:p>
-            <a:pPr algn="l" indent="0" marL="0">
+            <a:pPr marL="0" indent="0" algn="l">
               <a:lnSpc>
                 <a:spcPts val="1610"/>
               </a:lnSpc>
@@ -15594,7 +15894,7 @@
             <a:endParaRPr lang="en-US" sz="1150" dirty="0"/>
           </a:p>
           <a:p>
-            <a:pPr algn="l" indent="0" marL="0">
+            <a:pPr marL="0" indent="0" algn="l">
               <a:lnSpc>
                 <a:spcPts val="1610"/>
               </a:lnSpc>
@@ -15614,7 +15914,7 @@
             <a:endParaRPr lang="en-US" sz="1150" dirty="0"/>
           </a:p>
           <a:p>
-            <a:pPr algn="l" indent="0" marL="0">
+            <a:pPr marL="0" indent="0" algn="l">
               <a:lnSpc>
                 <a:spcPts val="1610"/>
               </a:lnSpc>
@@ -15634,7 +15934,7 @@
             <a:endParaRPr lang="en-US" sz="1150" dirty="0"/>
           </a:p>
           <a:p>
-            <a:pPr algn="l" indent="0" marL="0">
+            <a:pPr marL="0" indent="0" algn="l">
               <a:lnSpc>
                 <a:spcPts val="1610"/>
               </a:lnSpc>
@@ -15654,7 +15954,7 @@
             <a:endParaRPr lang="en-US" sz="1150" dirty="0"/>
           </a:p>
           <a:p>
-            <a:pPr algn="l" indent="0" marL="0">
+            <a:pPr marL="0" indent="0" algn="l">
               <a:lnSpc>
                 <a:spcPts val="1610"/>
               </a:lnSpc>
@@ -15674,7 +15974,7 @@
             <a:endParaRPr lang="en-US" sz="1150" dirty="0"/>
           </a:p>
           <a:p>
-            <a:pPr algn="l" indent="0" marL="0">
+            <a:pPr marL="0" indent="0" algn="l">
               <a:lnSpc>
                 <a:spcPts val="1610"/>
               </a:lnSpc>
@@ -15694,7 +15994,7 @@
             <a:endParaRPr lang="en-US" sz="1150" dirty="0"/>
           </a:p>
           <a:p>
-            <a:pPr algn="l" indent="0" marL="0">
+            <a:pPr marL="0" indent="0" algn="l">
               <a:lnSpc>
                 <a:spcPts val="1610"/>
               </a:lnSpc>
@@ -15714,7 +16014,7 @@
             <a:endParaRPr lang="en-US" sz="1150" dirty="0"/>
           </a:p>
           <a:p>
-            <a:pPr algn="l" indent="0" marL="0">
+            <a:pPr marL="0" indent="0" algn="l">
               <a:lnSpc>
                 <a:spcPts val="1610"/>
               </a:lnSpc>
@@ -15734,7 +16034,7 @@
             <a:endParaRPr lang="en-US" sz="1150" dirty="0"/>
           </a:p>
           <a:p>
-            <a:pPr algn="l" indent="0" marL="0">
+            <a:pPr marL="0" indent="0" algn="l">
               <a:lnSpc>
                 <a:spcPts val="1610"/>
               </a:lnSpc>
@@ -15754,7 +16054,7 @@
             <a:endParaRPr lang="en-US" sz="1150" dirty="0"/>
           </a:p>
           <a:p>
-            <a:pPr algn="l" indent="0" marL="0">
+            <a:pPr marL="0" indent="0" algn="l">
               <a:lnSpc>
                 <a:spcPts val="1610"/>
               </a:lnSpc>
@@ -15774,7 +16074,7 @@
             <a:endParaRPr lang="en-US" sz="1150" dirty="0"/>
           </a:p>
           <a:p>
-            <a:pPr algn="l" indent="0" marL="0">
+            <a:pPr marL="0" indent="0" algn="l">
               <a:lnSpc>
                 <a:spcPts val="1610"/>
               </a:lnSpc>
@@ -15797,7 +16097,7 @@
       </p:sp>
       <p:graphicFrame>
         <p:nvGraphicFramePr>
-          <p:cNvPr id="5" name="Table 0"/>
+          <p:cNvPr id="7" name="Table 0"/>
           <p:cNvGraphicFramePr>
             <a:graphicFrameLocks noGrp="1"/>
           </p:cNvGraphicFramePr>
@@ -15811,16 +16111,34 @@
         </p:nvGraphicFramePr>
         <p:xfrm>
           <a:off x="548640" y="4617720"/>
-          <a:ext cx="11064240" cy="914400"/>
+          <a:ext cx="11064240" cy="1293876"/>
         </p:xfrm>
         <a:graphic>
           <a:graphicData uri="http://schemas.openxmlformats.org/drawingml/2006/table">
             <a:tbl>
               <a:tblPr/>
               <a:tblGrid>
-                <a:gridCol w="1554480"/>
-                <a:gridCol w="2743200"/>
-                <a:gridCol w="6766560"/>
+                <a:gridCol w="1554480">
+                  <a:extLst>
+                    <a:ext uri="{9D8B030D-6E8A-4147-A177-3AD203B41FA5}">
+                      <a16:colId xmlns:a16="http://schemas.microsoft.com/office/drawing/2014/main" val="20000"/>
+                    </a:ext>
+                  </a:extLst>
+                </a:gridCol>
+                <a:gridCol w="2743200">
+                  <a:extLst>
+                    <a:ext uri="{9D8B030D-6E8A-4147-A177-3AD203B41FA5}">
+                      <a16:colId xmlns:a16="http://schemas.microsoft.com/office/drawing/2014/main" val="20001"/>
+                    </a:ext>
+                  </a:extLst>
+                </a:gridCol>
+                <a:gridCol w="6766560">
+                  <a:extLst>
+                    <a:ext uri="{9D8B030D-6E8A-4147-A177-3AD203B41FA5}">
+                      <a16:colId xmlns:a16="http://schemas.microsoft.com/office/drawing/2014/main" val="20002"/>
+                    </a:ext>
+                  </a:extLst>
+                </a:gridCol>
               </a:tblGrid>
               <a:tr h="310896">
                 <a:tc>
@@ -15828,11 +16146,11 @@
                     <a:bodyPr/>
                     <a:lstStyle/>
                     <a:p>
-                      <a:pPr indent="0" marL="0">
+                      <a:pPr marL="0" indent="0">
                         <a:buNone/>
                       </a:pPr>
                       <a:r>
-                        <a:rPr lang="en-US" sz="950" b="1" spc="200" kern="0" dirty="0">
+                        <a:rPr lang="en-US" sz="950" b="1" kern="0" spc="200" dirty="0">
                           <a:solidFill>
                             <a:srgbClr val="D4FF00"/>
                           </a:solidFill>
@@ -15896,11 +16214,11 @@
                     <a:bodyPr/>
                     <a:lstStyle/>
                     <a:p>
-                      <a:pPr indent="0" marL="0">
+                      <a:pPr marL="0" indent="0">
                         <a:buNone/>
                       </a:pPr>
                       <a:r>
-                        <a:rPr lang="en-US" sz="950" b="1" spc="200" kern="0" dirty="0">
+                        <a:rPr lang="en-US" sz="950" b="1" kern="0" spc="200" dirty="0">
                           <a:solidFill>
                             <a:srgbClr val="D4FF00"/>
                           </a:solidFill>
@@ -15964,11 +16282,11 @@
                     <a:bodyPr/>
                     <a:lstStyle/>
                     <a:p>
-                      <a:pPr indent="0" marL="0">
+                      <a:pPr marL="0" indent="0">
                         <a:buNone/>
                       </a:pPr>
                       <a:r>
-                        <a:rPr lang="en-US" sz="950" b="1" spc="200" kern="0" dirty="0">
+                        <a:rPr lang="en-US" sz="950" b="1" kern="0" spc="200" dirty="0">
                           <a:solidFill>
                             <a:srgbClr val="D4FF00"/>
                           </a:solidFill>
@@ -16027,6 +16345,11 @@
                     </a:solidFill>
                   </a:tcPr>
                 </a:tc>
+                <a:extLst>
+                  <a:ext uri="{0D108BD9-81ED-4DB2-BD59-A6C34878D82A}">
+                    <a16:rowId xmlns:a16="http://schemas.microsoft.com/office/drawing/2014/main" val="10000"/>
+                  </a:ext>
+                </a:extLst>
               </a:tr>
               <a:tr h="310896">
                 <a:tc>
@@ -16034,7 +16357,7 @@
                     <a:bodyPr/>
                     <a:lstStyle/>
                     <a:p>
-                      <a:pPr indent="0" marL="0">
+                      <a:pPr marL="0" indent="0">
                         <a:buNone/>
                       </a:pPr>
                       <a:r>
@@ -16102,7 +16425,7 @@
                     <a:bodyPr/>
                     <a:lstStyle/>
                     <a:p>
-                      <a:pPr indent="0" marL="0">
+                      <a:pPr marL="0" indent="0">
                         <a:buNone/>
                       </a:pPr>
                       <a:r>
@@ -16170,7 +16493,7 @@
                     <a:bodyPr/>
                     <a:lstStyle/>
                     <a:p>
-                      <a:pPr indent="0" marL="0">
+                      <a:pPr marL="0" indent="0">
                         <a:buNone/>
                       </a:pPr>
                       <a:r>
@@ -16233,6 +16556,11 @@
                     </a:solidFill>
                   </a:tcPr>
                 </a:tc>
+                <a:extLst>
+                  <a:ext uri="{0D108BD9-81ED-4DB2-BD59-A6C34878D82A}">
+                    <a16:rowId xmlns:a16="http://schemas.microsoft.com/office/drawing/2014/main" val="10001"/>
+                  </a:ext>
+                </a:extLst>
               </a:tr>
               <a:tr h="310896">
                 <a:tc>
@@ -16240,7 +16568,7 @@
                     <a:bodyPr/>
                     <a:lstStyle/>
                     <a:p>
-                      <a:pPr indent="0" marL="0">
+                      <a:pPr marL="0" indent="0">
                         <a:buNone/>
                       </a:pPr>
                       <a:r>
@@ -16308,7 +16636,7 @@
                     <a:bodyPr/>
                     <a:lstStyle/>
                     <a:p>
-                      <a:pPr indent="0" marL="0">
+                      <a:pPr marL="0" indent="0">
                         <a:buNone/>
                       </a:pPr>
                       <a:r>
@@ -16376,7 +16704,7 @@
                     <a:bodyPr/>
                     <a:lstStyle/>
                     <a:p>
-                      <a:pPr indent="0" marL="0">
+                      <a:pPr marL="0" indent="0">
                         <a:buNone/>
                       </a:pPr>
                       <a:r>
@@ -16439,6 +16767,11 @@
                     </a:solidFill>
                   </a:tcPr>
                 </a:tc>
+                <a:extLst>
+                  <a:ext uri="{0D108BD9-81ED-4DB2-BD59-A6C34878D82A}">
+                    <a16:rowId xmlns:a16="http://schemas.microsoft.com/office/drawing/2014/main" val="10002"/>
+                  </a:ext>
+                </a:extLst>
               </a:tr>
               <a:tr h="310896">
                 <a:tc>
@@ -16446,7 +16779,7 @@
                     <a:bodyPr/>
                     <a:lstStyle/>
                     <a:p>
-                      <a:pPr indent="0" marL="0">
+                      <a:pPr marL="0" indent="0">
                         <a:buNone/>
                       </a:pPr>
                       <a:r>
@@ -16514,7 +16847,7 @@
                     <a:bodyPr/>
                     <a:lstStyle/>
                     <a:p>
-                      <a:pPr indent="0" marL="0">
+                      <a:pPr marL="0" indent="0">
                         <a:buNone/>
                       </a:pPr>
                       <a:r>
@@ -16582,7 +16915,7 @@
                     <a:bodyPr/>
                     <a:lstStyle/>
                     <a:p>
-                      <a:pPr indent="0" marL="0">
+                      <a:pPr marL="0" indent="0">
                         <a:buNone/>
                       </a:pPr>
                       <a:r>
@@ -16645,6 +16978,11 @@
                     </a:solidFill>
                   </a:tcPr>
                 </a:tc>
+                <a:extLst>
+                  <a:ext uri="{0D108BD9-81ED-4DB2-BD59-A6C34878D82A}">
+                    <a16:rowId xmlns:a16="http://schemas.microsoft.com/office/drawing/2014/main" val="10003"/>
+                  </a:ext>
+                </a:extLst>
               </a:tr>
             </a:tbl>
           </a:graphicData>
@@ -16666,6 +17004,7 @@
         <a:solidFill>
           <a:srgbClr val="0C0C0C"/>
         </a:solidFill>
+        <a:effectLst/>
       </p:bgPr>
     </p:bg>
     <p:spTree>
@@ -16701,6 +17040,13 @@
           </a:solidFill>
           <a:ln/>
         </p:spPr>
+        <p:txBody>
+          <a:bodyPr/>
+          <a:lstStyle/>
+          <a:p>
+            <a:endParaRPr lang="en-GB"/>
+          </a:p>
+        </p:txBody>
       </p:sp>
       <p:sp>
         <p:nvSpPr>
@@ -16723,11 +17069,11 @@
           <a:bodyPr wrap="square" rtlCol="0" anchor="ctr"/>
           <a:lstStyle/>
           <a:p>
-            <a:pPr indent="0" marL="0">
-              <a:buNone/>
-            </a:pPr>
-            <a:r>
-              <a:rPr lang="en-US" sz="1050" spc="400" kern="0" dirty="0">
+            <a:pPr marL="0" indent="0">
+              <a:buNone/>
+            </a:pPr>
+            <a:r>
+              <a:rPr lang="en-US" sz="1050" kern="0" spc="400" dirty="0">
                 <a:solidFill>
                   <a:srgbClr val="A8A29E"/>
                 </a:solidFill>
@@ -16762,7 +17108,7 @@
           <a:bodyPr wrap="square" rtlCol="0" anchor="ctr"/>
           <a:lstStyle/>
           <a:p>
-            <a:pPr indent="0" marL="0">
+            <a:pPr marL="0" indent="0">
               <a:buNone/>
             </a:pPr>
             <a:r>
@@ -16801,11 +17147,11 @@
           <a:bodyPr wrap="square" rtlCol="0" anchor="ctr"/>
           <a:lstStyle/>
           <a:p>
-            <a:pPr indent="0" marL="0">
-              <a:buNone/>
-            </a:pPr>
-            <a:r>
-              <a:rPr lang="en-US" sz="850" spc="200" kern="0" dirty="0">
+            <a:pPr marL="0" indent="0">
+              <a:buNone/>
+            </a:pPr>
+            <a:r>
+              <a:rPr lang="en-US" sz="850" kern="0" spc="200" dirty="0">
                 <a:solidFill>
                   <a:srgbClr val="6B6560"/>
                 </a:solidFill>
@@ -16840,7 +17186,7 @@
           <a:bodyPr wrap="square" rtlCol="0" anchor="ctr"/>
           <a:lstStyle/>
           <a:p>
-            <a:pPr algn="r" indent="0" marL="0">
+            <a:pPr marL="0" indent="0" algn="r">
               <a:buNone/>
             </a:pPr>
             <a:r>
@@ -16860,7 +17206,7 @@
       </p:sp>
       <p:graphicFrame>
         <p:nvGraphicFramePr>
-          <p:cNvPr id="6" name="Table 0"/>
+          <p:cNvPr id="7" name="Table 0"/>
           <p:cNvGraphicFramePr>
             <a:graphicFrameLocks noGrp="1"/>
           </p:cNvGraphicFramePr>
@@ -16881,9 +17227,27 @@
             <a:tbl>
               <a:tblPr/>
               <a:tblGrid>
-                <a:gridCol w="2194560"/>
-                <a:gridCol w="1371600"/>
-                <a:gridCol w="7498080"/>
+                <a:gridCol w="2194560">
+                  <a:extLst>
+                    <a:ext uri="{9D8B030D-6E8A-4147-A177-3AD203B41FA5}">
+                      <a16:colId xmlns:a16="http://schemas.microsoft.com/office/drawing/2014/main" val="20000"/>
+                    </a:ext>
+                  </a:extLst>
+                </a:gridCol>
+                <a:gridCol w="1371600">
+                  <a:extLst>
+                    <a:ext uri="{9D8B030D-6E8A-4147-A177-3AD203B41FA5}">
+                      <a16:colId xmlns:a16="http://schemas.microsoft.com/office/drawing/2014/main" val="20001"/>
+                    </a:ext>
+                  </a:extLst>
+                </a:gridCol>
+                <a:gridCol w="7498080">
+                  <a:extLst>
+                    <a:ext uri="{9D8B030D-6E8A-4147-A177-3AD203B41FA5}">
+                      <a16:colId xmlns:a16="http://schemas.microsoft.com/office/drawing/2014/main" val="20002"/>
+                    </a:ext>
+                  </a:extLst>
+                </a:gridCol>
               </a:tblGrid>
               <a:tr h="310896">
                 <a:tc>
@@ -16891,11 +17255,11 @@
                     <a:bodyPr/>
                     <a:lstStyle/>
                     <a:p>
-                      <a:pPr indent="0" marL="0">
+                      <a:pPr marL="0" indent="0">
                         <a:buNone/>
                       </a:pPr>
                       <a:r>
-                        <a:rPr lang="en-US" sz="1000" b="1" spc="200" kern="0" dirty="0">
+                        <a:rPr lang="en-US" sz="1000" b="1" kern="0" spc="200" dirty="0">
                           <a:solidFill>
                             <a:srgbClr val="D4FF00"/>
                           </a:solidFill>
@@ -16959,11 +17323,11 @@
                     <a:bodyPr/>
                     <a:lstStyle/>
                     <a:p>
-                      <a:pPr indent="0" marL="0">
+                      <a:pPr marL="0" indent="0">
                         <a:buNone/>
                       </a:pPr>
                       <a:r>
-                        <a:rPr lang="en-US" sz="1000" b="1" spc="200" kern="0" dirty="0">
+                        <a:rPr lang="en-US" sz="1000" b="1" kern="0" spc="200" dirty="0">
                           <a:solidFill>
                             <a:srgbClr val="D4FF00"/>
                           </a:solidFill>
@@ -17027,11 +17391,11 @@
                     <a:bodyPr/>
                     <a:lstStyle/>
                     <a:p>
-                      <a:pPr indent="0" marL="0">
+                      <a:pPr marL="0" indent="0">
                         <a:buNone/>
                       </a:pPr>
                       <a:r>
-                        <a:rPr lang="en-US" sz="1000" b="1" spc="200" kern="0" dirty="0">
+                        <a:rPr lang="en-US" sz="1000" b="1" kern="0" spc="200" dirty="0">
                           <a:solidFill>
                             <a:srgbClr val="D4FF00"/>
                           </a:solidFill>
@@ -17090,6 +17454,11 @@
                     </a:solidFill>
                   </a:tcPr>
                 </a:tc>
+                <a:extLst>
+                  <a:ext uri="{0D108BD9-81ED-4DB2-BD59-A6C34878D82A}">
+                    <a16:rowId xmlns:a16="http://schemas.microsoft.com/office/drawing/2014/main" val="10000"/>
+                  </a:ext>
+                </a:extLst>
               </a:tr>
               <a:tr h="310896">
                 <a:tc>
@@ -17097,7 +17466,7 @@
                     <a:bodyPr/>
                     <a:lstStyle/>
                     <a:p>
-                      <a:pPr indent="0" marL="0">
+                      <a:pPr marL="0" indent="0">
                         <a:buNone/>
                       </a:pPr>
                       <a:r>
@@ -17165,7 +17534,7 @@
                     <a:bodyPr/>
                     <a:lstStyle/>
                     <a:p>
-                      <a:pPr indent="0" marL="0">
+                      <a:pPr marL="0" indent="0">
                         <a:buNone/>
                       </a:pPr>
                       <a:r>
@@ -17233,7 +17602,7 @@
                     <a:bodyPr/>
                     <a:lstStyle/>
                     <a:p>
-                      <a:pPr indent="0" marL="0">
+                      <a:pPr marL="0" indent="0">
                         <a:buNone/>
                       </a:pPr>
                       <a:r>
@@ -17296,6 +17665,11 @@
                     </a:solidFill>
                   </a:tcPr>
                 </a:tc>
+                <a:extLst>
+                  <a:ext uri="{0D108BD9-81ED-4DB2-BD59-A6C34878D82A}">
+                    <a16:rowId xmlns:a16="http://schemas.microsoft.com/office/drawing/2014/main" val="10001"/>
+                  </a:ext>
+                </a:extLst>
               </a:tr>
               <a:tr h="310896">
                 <a:tc>
@@ -17303,7 +17677,7 @@
                     <a:bodyPr/>
                     <a:lstStyle/>
                     <a:p>
-                      <a:pPr indent="0" marL="0">
+                      <a:pPr marL="0" indent="0">
                         <a:buNone/>
                       </a:pPr>
                       <a:r>
@@ -17371,7 +17745,7 @@
                     <a:bodyPr/>
                     <a:lstStyle/>
                     <a:p>
-                      <a:pPr indent="0" marL="0">
+                      <a:pPr marL="0" indent="0">
                         <a:buNone/>
                       </a:pPr>
                       <a:r>
@@ -17439,7 +17813,7 @@
                     <a:bodyPr/>
                     <a:lstStyle/>
                     <a:p>
-                      <a:pPr indent="0" marL="0">
+                      <a:pPr marL="0" indent="0">
                         <a:buNone/>
                       </a:pPr>
                       <a:r>
@@ -17502,6 +17876,11 @@
                     </a:solidFill>
                   </a:tcPr>
                 </a:tc>
+                <a:extLst>
+                  <a:ext uri="{0D108BD9-81ED-4DB2-BD59-A6C34878D82A}">
+                    <a16:rowId xmlns:a16="http://schemas.microsoft.com/office/drawing/2014/main" val="10002"/>
+                  </a:ext>
+                </a:extLst>
               </a:tr>
               <a:tr h="310896">
                 <a:tc>
@@ -17509,7 +17888,7 @@
                     <a:bodyPr/>
                     <a:lstStyle/>
                     <a:p>
-                      <a:pPr indent="0" marL="0">
+                      <a:pPr marL="0" indent="0">
                         <a:buNone/>
                       </a:pPr>
                       <a:r>
@@ -17577,7 +17956,7 @@
                     <a:bodyPr/>
                     <a:lstStyle/>
                     <a:p>
-                      <a:pPr indent="0" marL="0">
+                      <a:pPr marL="0" indent="0">
                         <a:buNone/>
                       </a:pPr>
                       <a:r>
@@ -17645,7 +18024,7 @@
                     <a:bodyPr/>
                     <a:lstStyle/>
                     <a:p>
-                      <a:pPr indent="0" marL="0">
+                      <a:pPr marL="0" indent="0">
                         <a:buNone/>
                       </a:pPr>
                       <a:r>
@@ -17708,6 +18087,11 @@
                     </a:solidFill>
                   </a:tcPr>
                 </a:tc>
+                <a:extLst>
+                  <a:ext uri="{0D108BD9-81ED-4DB2-BD59-A6C34878D82A}">
+                    <a16:rowId xmlns:a16="http://schemas.microsoft.com/office/drawing/2014/main" val="10003"/>
+                  </a:ext>
+                </a:extLst>
               </a:tr>
               <a:tr h="310896">
                 <a:tc>
@@ -17715,7 +18099,7 @@
                     <a:bodyPr/>
                     <a:lstStyle/>
                     <a:p>
-                      <a:pPr indent="0" marL="0">
+                      <a:pPr marL="0" indent="0">
                         <a:buNone/>
                       </a:pPr>
                       <a:r>
@@ -17783,7 +18167,7 @@
                     <a:bodyPr/>
                     <a:lstStyle/>
                     <a:p>
-                      <a:pPr indent="0" marL="0">
+                      <a:pPr marL="0" indent="0">
                         <a:buNone/>
                       </a:pPr>
                       <a:r>
@@ -17851,7 +18235,7 @@
                     <a:bodyPr/>
                     <a:lstStyle/>
                     <a:p>
-                      <a:pPr indent="0" marL="0">
+                      <a:pPr marL="0" indent="0">
                         <a:buNone/>
                       </a:pPr>
                       <a:r>
@@ -17914,6 +18298,11 @@
                     </a:solidFill>
                   </a:tcPr>
                 </a:tc>
+                <a:extLst>
+                  <a:ext uri="{0D108BD9-81ED-4DB2-BD59-A6C34878D82A}">
+                    <a16:rowId xmlns:a16="http://schemas.microsoft.com/office/drawing/2014/main" val="10004"/>
+                  </a:ext>
+                </a:extLst>
               </a:tr>
               <a:tr h="310896">
                 <a:tc>
@@ -17921,7 +18310,7 @@
                     <a:bodyPr/>
                     <a:lstStyle/>
                     <a:p>
-                      <a:pPr indent="0" marL="0">
+                      <a:pPr marL="0" indent="0">
                         <a:buNone/>
                       </a:pPr>
                       <a:r>
@@ -17989,7 +18378,7 @@
                     <a:bodyPr/>
                     <a:lstStyle/>
                     <a:p>
-                      <a:pPr indent="0" marL="0">
+                      <a:pPr marL="0" indent="0">
                         <a:buNone/>
                       </a:pPr>
                       <a:r>
@@ -18057,7 +18446,7 @@
                     <a:bodyPr/>
                     <a:lstStyle/>
                     <a:p>
-                      <a:pPr indent="0" marL="0">
+                      <a:pPr marL="0" indent="0">
                         <a:buNone/>
                       </a:pPr>
                       <a:r>
@@ -18120,6 +18509,11 @@
                     </a:solidFill>
                   </a:tcPr>
                 </a:tc>
+                <a:extLst>
+                  <a:ext uri="{0D108BD9-81ED-4DB2-BD59-A6C34878D82A}">
+                    <a16:rowId xmlns:a16="http://schemas.microsoft.com/office/drawing/2014/main" val="10005"/>
+                  </a:ext>
+                </a:extLst>
               </a:tr>
             </a:tbl>
           </a:graphicData>
@@ -18152,7 +18546,7 @@
           <a:bodyPr wrap="square" lIns="127000" tIns="127000" rIns="127000" bIns="127000" rtlCol="0" anchor="t"/>
           <a:lstStyle/>
           <a:p>
-            <a:pPr algn="l" indent="0" marL="0">
+            <a:pPr marL="0" indent="0" algn="l">
               <a:lnSpc>
                 <a:spcPts val="1418"/>
               </a:lnSpc>
@@ -18172,7 +18566,7 @@
             <a:endParaRPr lang="en-US" sz="1050" dirty="0"/>
           </a:p>
           <a:p>
-            <a:pPr algn="l" indent="0" marL="0">
+            <a:pPr marL="0" indent="0" algn="l">
               <a:lnSpc>
                 <a:spcPts val="1418"/>
               </a:lnSpc>
@@ -18192,7 +18586,7 @@
             <a:endParaRPr lang="en-US" sz="1050" dirty="0"/>
           </a:p>
           <a:p>
-            <a:pPr algn="l" indent="0" marL="0">
+            <a:pPr marL="0" indent="0" algn="l">
               <a:lnSpc>
                 <a:spcPts val="1418"/>
               </a:lnSpc>
@@ -18201,7 +18595,7 @@
             <a:endParaRPr lang="en-US" sz="1050" dirty="0"/>
           </a:p>
           <a:p>
-            <a:pPr algn="l" indent="0" marL="0">
+            <a:pPr marL="0" indent="0" algn="l">
               <a:lnSpc>
                 <a:spcPts val="1418"/>
               </a:lnSpc>
@@ -18221,7 +18615,7 @@
             <a:endParaRPr lang="en-US" sz="1050" dirty="0"/>
           </a:p>
           <a:p>
-            <a:pPr algn="l" indent="0" marL="0">
+            <a:pPr marL="0" indent="0" algn="l">
               <a:lnSpc>
                 <a:spcPts val="1418"/>
               </a:lnSpc>
@@ -18241,7 +18635,7 @@
             <a:endParaRPr lang="en-US" sz="1050" dirty="0"/>
           </a:p>
           <a:p>
-            <a:pPr algn="l" indent="0" marL="0">
+            <a:pPr marL="0" indent="0" algn="l">
               <a:lnSpc>
                 <a:spcPts val="1418"/>
               </a:lnSpc>
@@ -18261,7 +18655,7 @@
             <a:endParaRPr lang="en-US" sz="1050" dirty="0"/>
           </a:p>
           <a:p>
-            <a:pPr algn="l" indent="0" marL="0">
+            <a:pPr marL="0" indent="0" algn="l">
               <a:lnSpc>
                 <a:spcPts val="1418"/>
               </a:lnSpc>
@@ -18281,7 +18675,7 @@
             <a:endParaRPr lang="en-US" sz="1050" dirty="0"/>
           </a:p>
           <a:p>
-            <a:pPr algn="l" indent="0" marL="0">
+            <a:pPr marL="0" indent="0" algn="l">
               <a:lnSpc>
                 <a:spcPts val="1418"/>
               </a:lnSpc>
@@ -18403,6 +18797,7 @@
         <a:solidFill>
           <a:srgbClr val="0C0C0C"/>
         </a:solidFill>
+        <a:effectLst/>
       </p:bgPr>
     </p:bg>
     <p:spTree>
@@ -18438,6 +18833,13 @@
           </a:solidFill>
           <a:ln/>
         </p:spPr>
+        <p:txBody>
+          <a:bodyPr/>
+          <a:lstStyle/>
+          <a:p>
+            <a:endParaRPr lang="en-GB"/>
+          </a:p>
+        </p:txBody>
       </p:sp>
       <p:sp>
         <p:nvSpPr>
@@ -18460,11 +18862,11 @@
           <a:bodyPr wrap="square" rtlCol="0" anchor="ctr"/>
           <a:lstStyle/>
           <a:p>
-            <a:pPr indent="0" marL="0">
-              <a:buNone/>
-            </a:pPr>
-            <a:r>
-              <a:rPr lang="en-US" sz="1050" spc="400" kern="0" dirty="0">
+            <a:pPr marL="0" indent="0">
+              <a:buNone/>
+            </a:pPr>
+            <a:r>
+              <a:rPr lang="en-US" sz="1050" kern="0" spc="400" dirty="0">
                 <a:solidFill>
                   <a:srgbClr val="A8A29E"/>
                 </a:solidFill>
@@ -18499,7 +18901,7 @@
           <a:bodyPr wrap="square" rtlCol="0" anchor="ctr"/>
           <a:lstStyle/>
           <a:p>
-            <a:pPr indent="0" marL="0">
+            <a:pPr marL="0" indent="0">
               <a:buNone/>
             </a:pPr>
             <a:r>
@@ -18538,11 +18940,11 @@
           <a:bodyPr wrap="square" rtlCol="0" anchor="ctr"/>
           <a:lstStyle/>
           <a:p>
-            <a:pPr indent="0" marL="0">
-              <a:buNone/>
-            </a:pPr>
-            <a:r>
-              <a:rPr lang="en-US" sz="850" spc="200" kern="0" dirty="0">
+            <a:pPr marL="0" indent="0">
+              <a:buNone/>
+            </a:pPr>
+            <a:r>
+              <a:rPr lang="en-US" sz="850" kern="0" spc="200" dirty="0">
                 <a:solidFill>
                   <a:srgbClr val="6B6560"/>
                 </a:solidFill>
@@ -18577,7 +18979,7 @@
           <a:bodyPr wrap="square" rtlCol="0" anchor="ctr"/>
           <a:lstStyle/>
           <a:p>
-            <a:pPr algn="r" indent="0" marL="0">
+            <a:pPr marL="0" indent="0" algn="r">
               <a:buNone/>
             </a:pPr>
             <a:r>
@@ -18618,9 +19020,27 @@
             <a:tbl>
               <a:tblPr/>
               <a:tblGrid>
-                <a:gridCol w="1554480"/>
-                <a:gridCol w="1371600"/>
-                <a:gridCol w="8138160"/>
+                <a:gridCol w="1554480">
+                  <a:extLst>
+                    <a:ext uri="{9D8B030D-6E8A-4147-A177-3AD203B41FA5}">
+                      <a16:colId xmlns:a16="http://schemas.microsoft.com/office/drawing/2014/main" val="20000"/>
+                    </a:ext>
+                  </a:extLst>
+                </a:gridCol>
+                <a:gridCol w="1371600">
+                  <a:extLst>
+                    <a:ext uri="{9D8B030D-6E8A-4147-A177-3AD203B41FA5}">
+                      <a16:colId xmlns:a16="http://schemas.microsoft.com/office/drawing/2014/main" val="20001"/>
+                    </a:ext>
+                  </a:extLst>
+                </a:gridCol>
+                <a:gridCol w="8138160">
+                  <a:extLst>
+                    <a:ext uri="{9D8B030D-6E8A-4147-A177-3AD203B41FA5}">
+                      <a16:colId xmlns:a16="http://schemas.microsoft.com/office/drawing/2014/main" val="20002"/>
+                    </a:ext>
+                  </a:extLst>
+                </a:gridCol>
               </a:tblGrid>
               <a:tr h="310896">
                 <a:tc>
@@ -18628,11 +19048,11 @@
                     <a:bodyPr/>
                     <a:lstStyle/>
                     <a:p>
-                      <a:pPr indent="0" marL="0">
+                      <a:pPr marL="0" indent="0">
                         <a:buNone/>
                       </a:pPr>
                       <a:r>
-                        <a:rPr lang="en-US" sz="1000" b="1" spc="200" kern="0" dirty="0">
+                        <a:rPr lang="en-US" sz="1000" b="1" kern="0" spc="200" dirty="0">
                           <a:solidFill>
                             <a:srgbClr val="D4FF00"/>
                           </a:solidFill>
@@ -18696,11 +19116,11 @@
                     <a:bodyPr/>
                     <a:lstStyle/>
                     <a:p>
-                      <a:pPr indent="0" marL="0">
+                      <a:pPr marL="0" indent="0">
                         <a:buNone/>
                       </a:pPr>
                       <a:r>
-                        <a:rPr lang="en-US" sz="1000" b="1" spc="200" kern="0" dirty="0">
+                        <a:rPr lang="en-US" sz="1000" b="1" kern="0" spc="200" dirty="0">
                           <a:solidFill>
                             <a:srgbClr val="D4FF00"/>
                           </a:solidFill>
@@ -18764,11 +19184,11 @@
                     <a:bodyPr/>
                     <a:lstStyle/>
                     <a:p>
-                      <a:pPr indent="0" marL="0">
+                      <a:pPr marL="0" indent="0">
                         <a:buNone/>
                       </a:pPr>
                       <a:r>
-                        <a:rPr lang="en-US" sz="1000" b="1" spc="200" kern="0" dirty="0">
+                        <a:rPr lang="en-US" sz="1000" b="1" kern="0" spc="200" dirty="0">
                           <a:solidFill>
                             <a:srgbClr val="D4FF00"/>
                           </a:solidFill>
@@ -18827,6 +19247,11 @@
                     </a:solidFill>
                   </a:tcPr>
                 </a:tc>
+                <a:extLst>
+                  <a:ext uri="{0D108BD9-81ED-4DB2-BD59-A6C34878D82A}">
+                    <a16:rowId xmlns:a16="http://schemas.microsoft.com/office/drawing/2014/main" val="10000"/>
+                  </a:ext>
+                </a:extLst>
               </a:tr>
               <a:tr h="310896">
                 <a:tc>
@@ -18834,7 +19259,7 @@
                     <a:bodyPr/>
                     <a:lstStyle/>
                     <a:p>
-                      <a:pPr indent="0" marL="0">
+                      <a:pPr marL="0" indent="0">
                         <a:buNone/>
                       </a:pPr>
                       <a:r>
@@ -18902,7 +19327,7 @@
                     <a:bodyPr/>
                     <a:lstStyle/>
                     <a:p>
-                      <a:pPr indent="0" marL="0">
+                      <a:pPr marL="0" indent="0">
                         <a:buNone/>
                       </a:pPr>
                       <a:r>
@@ -18970,7 +19395,7 @@
                     <a:bodyPr/>
                     <a:lstStyle/>
                     <a:p>
-                      <a:pPr indent="0" marL="0">
+                      <a:pPr marL="0" indent="0">
                         <a:buNone/>
                       </a:pPr>
                       <a:r>
@@ -19033,6 +19458,11 @@
                     </a:solidFill>
                   </a:tcPr>
                 </a:tc>
+                <a:extLst>
+                  <a:ext uri="{0D108BD9-81ED-4DB2-BD59-A6C34878D82A}">
+                    <a16:rowId xmlns:a16="http://schemas.microsoft.com/office/drawing/2014/main" val="10001"/>
+                  </a:ext>
+                </a:extLst>
               </a:tr>
               <a:tr h="310896">
                 <a:tc>
@@ -19040,7 +19470,7 @@
                     <a:bodyPr/>
                     <a:lstStyle/>
                     <a:p>
-                      <a:pPr indent="0" marL="0">
+                      <a:pPr marL="0" indent="0">
                         <a:buNone/>
                       </a:pPr>
                       <a:r>
@@ -19108,7 +19538,7 @@
                     <a:bodyPr/>
                     <a:lstStyle/>
                     <a:p>
-                      <a:pPr indent="0" marL="0">
+                      <a:pPr marL="0" indent="0">
                         <a:buNone/>
                       </a:pPr>
                       <a:r>
@@ -19176,7 +19606,7 @@
                     <a:bodyPr/>
                     <a:lstStyle/>
                     <a:p>
-                      <a:pPr indent="0" marL="0">
+                      <a:pPr marL="0" indent="0">
                         <a:buNone/>
                       </a:pPr>
                       <a:r>
@@ -19239,6 +19669,11 @@
                     </a:solidFill>
                   </a:tcPr>
                 </a:tc>
+                <a:extLst>
+                  <a:ext uri="{0D108BD9-81ED-4DB2-BD59-A6C34878D82A}">
+                    <a16:rowId xmlns:a16="http://schemas.microsoft.com/office/drawing/2014/main" val="10002"/>
+                  </a:ext>
+                </a:extLst>
               </a:tr>
               <a:tr h="310896">
                 <a:tc>
@@ -19246,7 +19681,7 @@
                     <a:bodyPr/>
                     <a:lstStyle/>
                     <a:p>
-                      <a:pPr indent="0" marL="0">
+                      <a:pPr marL="0" indent="0">
                         <a:buNone/>
                       </a:pPr>
                       <a:r>
@@ -19314,7 +19749,7 @@
                     <a:bodyPr/>
                     <a:lstStyle/>
                     <a:p>
-                      <a:pPr indent="0" marL="0">
+                      <a:pPr marL="0" indent="0">
                         <a:buNone/>
                       </a:pPr>
                       <a:r>
@@ -19382,7 +19817,7 @@
                     <a:bodyPr/>
                     <a:lstStyle/>
                     <a:p>
-                      <a:pPr indent="0" marL="0">
+                      <a:pPr marL="0" indent="0">
                         <a:buNone/>
                       </a:pPr>
                       <a:r>
@@ -19445,6 +19880,11 @@
                     </a:solidFill>
                   </a:tcPr>
                 </a:tc>
+                <a:extLst>
+                  <a:ext uri="{0D108BD9-81ED-4DB2-BD59-A6C34878D82A}">
+                    <a16:rowId xmlns:a16="http://schemas.microsoft.com/office/drawing/2014/main" val="10003"/>
+                  </a:ext>
+                </a:extLst>
               </a:tr>
             </a:tbl>
           </a:graphicData>
@@ -19477,7 +19917,7 @@
           <a:bodyPr wrap="square" lIns="127000" tIns="127000" rIns="127000" bIns="127000" rtlCol="0" anchor="t"/>
           <a:lstStyle/>
           <a:p>
-            <a:pPr algn="l" indent="0" marL="0">
+            <a:pPr marL="0" indent="0" algn="l">
               <a:lnSpc>
                 <a:spcPts val="1350"/>
               </a:lnSpc>
@@ -19497,7 +19937,7 @@
             <a:endParaRPr lang="en-US" sz="1000" dirty="0"/>
           </a:p>
           <a:p>
-            <a:pPr algn="l" indent="0" marL="0">
+            <a:pPr marL="0" indent="0" algn="l">
               <a:lnSpc>
                 <a:spcPts val="1350"/>
               </a:lnSpc>
@@ -19517,7 +19957,7 @@
             <a:endParaRPr lang="en-US" sz="1000" dirty="0"/>
           </a:p>
           <a:p>
-            <a:pPr algn="l" indent="0" marL="0">
+            <a:pPr marL="0" indent="0" algn="l">
               <a:lnSpc>
                 <a:spcPts val="1350"/>
               </a:lnSpc>
@@ -19537,7 +19977,7 @@
             <a:endParaRPr lang="en-US" sz="1000" dirty="0"/>
           </a:p>
           <a:p>
-            <a:pPr algn="l" indent="0" marL="0">
+            <a:pPr marL="0" indent="0" algn="l">
               <a:lnSpc>
                 <a:spcPts val="1350"/>
               </a:lnSpc>
@@ -19557,7 +19997,7 @@
             <a:endParaRPr lang="en-US" sz="1000" dirty="0"/>
           </a:p>
           <a:p>
-            <a:pPr algn="l" indent="0" marL="0">
+            <a:pPr marL="0" indent="0" algn="l">
               <a:lnSpc>
                 <a:spcPts val="1350"/>
               </a:lnSpc>
@@ -19577,7 +20017,7 @@
             <a:endParaRPr lang="en-US" sz="1000" dirty="0"/>
           </a:p>
           <a:p>
-            <a:pPr algn="l" indent="0" marL="0">
+            <a:pPr marL="0" indent="0" algn="l">
               <a:lnSpc>
                 <a:spcPts val="1350"/>
               </a:lnSpc>
@@ -19597,7 +20037,7 @@
             <a:endParaRPr lang="en-US" sz="1000" dirty="0"/>
           </a:p>
           <a:p>
-            <a:pPr algn="l" indent="0" marL="0">
+            <a:pPr marL="0" indent="0" algn="l">
               <a:lnSpc>
                 <a:spcPts val="1350"/>
               </a:lnSpc>
@@ -19617,7 +20057,7 @@
             <a:endParaRPr lang="en-US" sz="1000" dirty="0"/>
           </a:p>
           <a:p>
-            <a:pPr algn="l" indent="0" marL="0">
+            <a:pPr marL="0" indent="0" algn="l">
               <a:lnSpc>
                 <a:spcPts val="1350"/>
               </a:lnSpc>
@@ -19637,7 +20077,7 @@
             <a:endParaRPr lang="en-US" sz="1000" dirty="0"/>
           </a:p>
           <a:p>
-            <a:pPr algn="l" indent="0" marL="0">
+            <a:pPr marL="0" indent="0" algn="l">
               <a:lnSpc>
                 <a:spcPts val="1350"/>
               </a:lnSpc>
@@ -19657,7 +20097,7 @@
             <a:endParaRPr lang="en-US" sz="1000" dirty="0"/>
           </a:p>
           <a:p>
-            <a:pPr algn="l" indent="0" marL="0">
+            <a:pPr marL="0" indent="0" algn="l">
               <a:lnSpc>
                 <a:spcPts val="1350"/>
               </a:lnSpc>
@@ -19677,7 +20117,7 @@
             <a:endParaRPr lang="en-US" sz="1000" dirty="0"/>
           </a:p>
           <a:p>
-            <a:pPr algn="l" indent="0" marL="0">
+            <a:pPr marL="0" indent="0" algn="l">
               <a:lnSpc>
                 <a:spcPts val="1350"/>
               </a:lnSpc>
@@ -19725,7 +20165,7 @@
           <a:bodyPr wrap="square" lIns="127000" tIns="127000" rIns="127000" bIns="127000" rtlCol="0" anchor="t"/>
           <a:lstStyle/>
           <a:p>
-            <a:pPr algn="l" indent="0" marL="0">
+            <a:pPr marL="0" indent="0" algn="l">
               <a:lnSpc>
                 <a:spcPts val="1350"/>
               </a:lnSpc>
@@ -19745,7 +20185,7 @@
             <a:endParaRPr lang="en-US" sz="1000" dirty="0"/>
           </a:p>
           <a:p>
-            <a:pPr algn="l" indent="0" marL="0">
+            <a:pPr marL="0" indent="0" algn="l">
               <a:lnSpc>
                 <a:spcPts val="1350"/>
               </a:lnSpc>
@@ -19765,7 +20205,7 @@
             <a:endParaRPr lang="en-US" sz="1000" dirty="0"/>
           </a:p>
           <a:p>
-            <a:pPr algn="l" indent="0" marL="0">
+            <a:pPr marL="0" indent="0" algn="l">
               <a:lnSpc>
                 <a:spcPts val="1350"/>
               </a:lnSpc>
@@ -19785,7 +20225,7 @@
             <a:endParaRPr lang="en-US" sz="1000" dirty="0"/>
           </a:p>
           <a:p>
-            <a:pPr algn="l" indent="0" marL="0">
+            <a:pPr marL="0" indent="0" algn="l">
               <a:lnSpc>
                 <a:spcPts val="1350"/>
               </a:lnSpc>
@@ -19805,7 +20245,7 @@
             <a:endParaRPr lang="en-US" sz="1000" dirty="0"/>
           </a:p>
           <a:p>
-            <a:pPr algn="l" indent="0" marL="0">
+            <a:pPr marL="0" indent="0" algn="l">
               <a:lnSpc>
                 <a:spcPts val="1350"/>
               </a:lnSpc>
@@ -19825,7 +20265,7 @@
             <a:endParaRPr lang="en-US" sz="1000" dirty="0"/>
           </a:p>
           <a:p>
-            <a:pPr algn="l" indent="0" marL="0">
+            <a:pPr marL="0" indent="0" algn="l">
               <a:lnSpc>
                 <a:spcPts val="1350"/>
               </a:lnSpc>
@@ -19845,7 +20285,7 @@
             <a:endParaRPr lang="en-US" sz="1000" dirty="0"/>
           </a:p>
           <a:p>
-            <a:pPr algn="l" indent="0" marL="0">
+            <a:pPr marL="0" indent="0" algn="l">
               <a:lnSpc>
                 <a:spcPts val="1350"/>
               </a:lnSpc>
@@ -19865,7 +20305,7 @@
             <a:endParaRPr lang="en-US" sz="1000" dirty="0"/>
           </a:p>
           <a:p>
-            <a:pPr algn="l" indent="0" marL="0">
+            <a:pPr marL="0" indent="0" algn="l">
               <a:lnSpc>
                 <a:spcPts val="1350"/>
               </a:lnSpc>
@@ -19885,7 +20325,7 @@
             <a:endParaRPr lang="en-US" sz="1000" dirty="0"/>
           </a:p>
           <a:p>
-            <a:pPr algn="l" indent="0" marL="0">
+            <a:pPr marL="0" indent="0" algn="l">
               <a:lnSpc>
                 <a:spcPts val="1350"/>
               </a:lnSpc>
@@ -19905,7 +20345,7 @@
             <a:endParaRPr lang="en-US" sz="1000" dirty="0"/>
           </a:p>
           <a:p>
-            <a:pPr algn="l" indent="0" marL="0">
+            <a:pPr marL="0" indent="0" algn="l">
               <a:lnSpc>
                 <a:spcPts val="1350"/>
               </a:lnSpc>
@@ -19925,7 +20365,7 @@
             <a:endParaRPr lang="en-US" sz="1000" dirty="0"/>
           </a:p>
           <a:p>
-            <a:pPr algn="l" indent="0" marL="0">
+            <a:pPr marL="0" indent="0" algn="l">
               <a:lnSpc>
                 <a:spcPts val="1350"/>
               </a:lnSpc>
@@ -19962,6 +20402,7 @@
         <a:solidFill>
           <a:srgbClr val="0C0C0C"/>
         </a:solidFill>
+        <a:effectLst/>
       </p:bgPr>
     </p:bg>
     <p:spTree>
@@ -19997,6 +20438,13 @@
           </a:solidFill>
           <a:ln/>
         </p:spPr>
+        <p:txBody>
+          <a:bodyPr/>
+          <a:lstStyle/>
+          <a:p>
+            <a:endParaRPr lang="en-GB"/>
+          </a:p>
+        </p:txBody>
       </p:sp>
       <p:sp>
         <p:nvSpPr>
@@ -20019,11 +20467,11 @@
           <a:bodyPr wrap="square" rtlCol="0" anchor="ctr"/>
           <a:lstStyle/>
           <a:p>
-            <a:pPr indent="0" marL="0">
-              <a:buNone/>
-            </a:pPr>
-            <a:r>
-              <a:rPr lang="en-US" sz="1050" spc="400" kern="0" dirty="0">
+            <a:pPr marL="0" indent="0">
+              <a:buNone/>
+            </a:pPr>
+            <a:r>
+              <a:rPr lang="en-US" sz="1050" kern="0" spc="400" dirty="0">
                 <a:solidFill>
                   <a:srgbClr val="A8A29E"/>
                 </a:solidFill>
@@ -20058,7 +20506,7 @@
           <a:bodyPr wrap="square" rtlCol="0" anchor="ctr"/>
           <a:lstStyle/>
           <a:p>
-            <a:pPr indent="0" marL="0">
+            <a:pPr marL="0" indent="0">
               <a:buNone/>
             </a:pPr>
             <a:r>
@@ -20097,11 +20545,11 @@
           <a:bodyPr wrap="square" rtlCol="0" anchor="ctr"/>
           <a:lstStyle/>
           <a:p>
-            <a:pPr indent="0" marL="0">
-              <a:buNone/>
-            </a:pPr>
-            <a:r>
-              <a:rPr lang="en-US" sz="850" spc="200" kern="0" dirty="0">
+            <a:pPr marL="0" indent="0">
+              <a:buNone/>
+            </a:pPr>
+            <a:r>
+              <a:rPr lang="en-US" sz="850" kern="0" spc="200" dirty="0">
                 <a:solidFill>
                   <a:srgbClr val="6B6560"/>
                 </a:solidFill>
@@ -20136,7 +20584,7 @@
           <a:bodyPr wrap="square" rtlCol="0" anchor="ctr"/>
           <a:lstStyle/>
           <a:p>
-            <a:pPr algn="r" indent="0" marL="0">
+            <a:pPr marL="0" indent="0" algn="r">
               <a:buNone/>
             </a:pPr>
             <a:r>
@@ -20181,7 +20629,7 @@
           <a:bodyPr wrap="square" lIns="127000" tIns="127000" rIns="127000" bIns="127000" rtlCol="0" anchor="t"/>
           <a:lstStyle/>
           <a:p>
-            <a:pPr algn="l" indent="0" marL="0">
+            <a:pPr marL="0" indent="0" algn="l">
               <a:lnSpc>
                 <a:spcPts val="1350"/>
               </a:lnSpc>
@@ -20201,7 +20649,7 @@
             <a:endParaRPr lang="en-US" sz="1000" dirty="0"/>
           </a:p>
           <a:p>
-            <a:pPr algn="l" indent="0" marL="0">
+            <a:pPr marL="0" indent="0" algn="l">
               <a:lnSpc>
                 <a:spcPts val="1350"/>
               </a:lnSpc>
@@ -20221,7 +20669,7 @@
             <a:endParaRPr lang="en-US" sz="1000" dirty="0"/>
           </a:p>
           <a:p>
-            <a:pPr algn="l" indent="0" marL="0">
+            <a:pPr marL="0" indent="0" algn="l">
               <a:lnSpc>
                 <a:spcPts val="1350"/>
               </a:lnSpc>
@@ -20241,7 +20689,7 @@
             <a:endParaRPr lang="en-US" sz="1000" dirty="0"/>
           </a:p>
           <a:p>
-            <a:pPr algn="l" indent="0" marL="0">
+            <a:pPr marL="0" indent="0" algn="l">
               <a:lnSpc>
                 <a:spcPts val="1350"/>
               </a:lnSpc>
@@ -20261,7 +20709,7 @@
             <a:endParaRPr lang="en-US" sz="1000" dirty="0"/>
           </a:p>
           <a:p>
-            <a:pPr algn="l" indent="0" marL="0">
+            <a:pPr marL="0" indent="0" algn="l">
               <a:lnSpc>
                 <a:spcPts val="1350"/>
               </a:lnSpc>
@@ -20281,7 +20729,7 @@
             <a:endParaRPr lang="en-US" sz="1000" dirty="0"/>
           </a:p>
           <a:p>
-            <a:pPr algn="l" indent="0" marL="0">
+            <a:pPr marL="0" indent="0" algn="l">
               <a:lnSpc>
                 <a:spcPts val="1350"/>
               </a:lnSpc>
@@ -20301,7 +20749,7 @@
             <a:endParaRPr lang="en-US" sz="1000" dirty="0"/>
           </a:p>
           <a:p>
-            <a:pPr algn="l" indent="0" marL="0">
+            <a:pPr marL="0" indent="0" algn="l">
               <a:lnSpc>
                 <a:spcPts val="1350"/>
               </a:lnSpc>
@@ -20321,7 +20769,7 @@
             <a:endParaRPr lang="en-US" sz="1000" dirty="0"/>
           </a:p>
           <a:p>
-            <a:pPr algn="l" indent="0" marL="0">
+            <a:pPr marL="0" indent="0" algn="l">
               <a:lnSpc>
                 <a:spcPts val="1350"/>
               </a:lnSpc>
@@ -20341,7 +20789,7 @@
             <a:endParaRPr lang="en-US" sz="1000" dirty="0"/>
           </a:p>
           <a:p>
-            <a:pPr algn="l" indent="0" marL="0">
+            <a:pPr marL="0" indent="0" algn="l">
               <a:lnSpc>
                 <a:spcPts val="1350"/>
               </a:lnSpc>
@@ -20361,7 +20809,7 @@
             <a:endParaRPr lang="en-US" sz="1000" dirty="0"/>
           </a:p>
           <a:p>
-            <a:pPr algn="l" indent="0" marL="0">
+            <a:pPr marL="0" indent="0" algn="l">
               <a:lnSpc>
                 <a:spcPts val="1350"/>
               </a:lnSpc>
@@ -20381,7 +20829,7 @@
             <a:endParaRPr lang="en-US" sz="1000" dirty="0"/>
           </a:p>
           <a:p>
-            <a:pPr algn="l" indent="0" marL="0">
+            <a:pPr marL="0" indent="0" algn="l">
               <a:lnSpc>
                 <a:spcPts val="1350"/>
               </a:lnSpc>
@@ -20401,7 +20849,7 @@
             <a:endParaRPr lang="en-US" sz="1000" dirty="0"/>
           </a:p>
           <a:p>
-            <a:pPr algn="l" indent="0" marL="0">
+            <a:pPr marL="0" indent="0" algn="l">
               <a:lnSpc>
                 <a:spcPts val="1350"/>
               </a:lnSpc>
@@ -20421,7 +20869,7 @@
             <a:endParaRPr lang="en-US" sz="1000" dirty="0"/>
           </a:p>
           <a:p>
-            <a:pPr algn="l" indent="0" marL="0">
+            <a:pPr marL="0" indent="0" algn="l">
               <a:lnSpc>
                 <a:spcPts val="1350"/>
               </a:lnSpc>
@@ -20441,7 +20889,7 @@
             <a:endParaRPr lang="en-US" sz="1000" dirty="0"/>
           </a:p>
           <a:p>
-            <a:pPr algn="l" indent="0" marL="0">
+            <a:pPr marL="0" indent="0" algn="l">
               <a:lnSpc>
                 <a:spcPts val="1350"/>
               </a:lnSpc>
@@ -20461,7 +20909,7 @@
             <a:endParaRPr lang="en-US" sz="1000" dirty="0"/>
           </a:p>
           <a:p>
-            <a:pPr algn="l" indent="0" marL="0">
+            <a:pPr marL="0" indent="0" algn="l">
               <a:lnSpc>
                 <a:spcPts val="1350"/>
               </a:lnSpc>
@@ -20470,7 +20918,7 @@
             <a:endParaRPr lang="en-US" sz="1000" dirty="0"/>
           </a:p>
           <a:p>
-            <a:pPr algn="l" indent="0" marL="0">
+            <a:pPr marL="0" indent="0" algn="l">
               <a:lnSpc>
                 <a:spcPts val="1350"/>
               </a:lnSpc>
@@ -20490,7 +20938,7 @@
             <a:endParaRPr lang="en-US" sz="1000" dirty="0"/>
           </a:p>
           <a:p>
-            <a:pPr algn="l" indent="0" marL="0">
+            <a:pPr marL="0" indent="0" algn="l">
               <a:lnSpc>
                 <a:spcPts val="1350"/>
               </a:lnSpc>
@@ -20510,7 +20958,7 @@
             <a:endParaRPr lang="en-US" sz="1000" dirty="0"/>
           </a:p>
           <a:p>
-            <a:pPr algn="l" indent="0" marL="0">
+            <a:pPr marL="0" indent="0" algn="l">
               <a:lnSpc>
                 <a:spcPts val="1350"/>
               </a:lnSpc>
@@ -20530,7 +20978,7 @@
             <a:endParaRPr lang="en-US" sz="1000" dirty="0"/>
           </a:p>
           <a:p>
-            <a:pPr algn="l" indent="0" marL="0">
+            <a:pPr marL="0" indent="0" algn="l">
               <a:lnSpc>
                 <a:spcPts val="1350"/>
               </a:lnSpc>
@@ -20550,7 +20998,7 @@
             <a:endParaRPr lang="en-US" sz="1000" dirty="0"/>
           </a:p>
           <a:p>
-            <a:pPr algn="l" indent="0" marL="0">
+            <a:pPr marL="0" indent="0" algn="l">
               <a:lnSpc>
                 <a:spcPts val="1350"/>
               </a:lnSpc>
@@ -20693,6 +21141,7 @@
         <a:solidFill>
           <a:srgbClr val="0C0C0C"/>
         </a:solidFill>
+        <a:effectLst/>
       </p:bgPr>
     </p:bg>
     <p:spTree>
@@ -20728,6 +21177,13 @@
           </a:solidFill>
           <a:ln/>
         </p:spPr>
+        <p:txBody>
+          <a:bodyPr/>
+          <a:lstStyle/>
+          <a:p>
+            <a:endParaRPr lang="en-GB"/>
+          </a:p>
+        </p:txBody>
       </p:sp>
       <p:sp>
         <p:nvSpPr>
@@ -20750,11 +21206,11 @@
           <a:bodyPr wrap="square" rtlCol="0" anchor="ctr"/>
           <a:lstStyle/>
           <a:p>
-            <a:pPr indent="0" marL="0">
-              <a:buNone/>
-            </a:pPr>
-            <a:r>
-              <a:rPr lang="en-US" sz="1050" spc="400" kern="0" dirty="0">
+            <a:pPr marL="0" indent="0">
+              <a:buNone/>
+            </a:pPr>
+            <a:r>
+              <a:rPr lang="en-US" sz="1050" kern="0" spc="400" dirty="0">
                 <a:solidFill>
                   <a:srgbClr val="A8A29E"/>
                 </a:solidFill>
@@ -20789,7 +21245,7 @@
           <a:bodyPr wrap="square" rtlCol="0" anchor="ctr"/>
           <a:lstStyle/>
           <a:p>
-            <a:pPr indent="0" marL="0">
+            <a:pPr marL="0" indent="0">
               <a:buNone/>
             </a:pPr>
             <a:r>
@@ -20828,11 +21284,11 @@
           <a:bodyPr wrap="square" rtlCol="0" anchor="ctr"/>
           <a:lstStyle/>
           <a:p>
-            <a:pPr indent="0" marL="0">
-              <a:buNone/>
-            </a:pPr>
-            <a:r>
-              <a:rPr lang="en-US" sz="850" spc="200" kern="0" dirty="0">
+            <a:pPr marL="0" indent="0">
+              <a:buNone/>
+            </a:pPr>
+            <a:r>
+              <a:rPr lang="en-US" sz="850" kern="0" spc="200" dirty="0">
                 <a:solidFill>
                   <a:srgbClr val="6B6560"/>
                 </a:solidFill>
@@ -20867,7 +21323,7 @@
           <a:bodyPr wrap="square" rtlCol="0" anchor="ctr"/>
           <a:lstStyle/>
           <a:p>
-            <a:pPr algn="r" indent="0" marL="0">
+            <a:pPr marL="0" indent="0" algn="r">
               <a:buNone/>
             </a:pPr>
             <a:r>
@@ -20912,7 +21368,7 @@
           <a:bodyPr wrap="square" lIns="127000" tIns="127000" rIns="127000" bIns="127000" rtlCol="0" anchor="t"/>
           <a:lstStyle/>
           <a:p>
-            <a:pPr algn="l" indent="0" marL="0">
+            <a:pPr marL="0" indent="0" algn="l">
               <a:lnSpc>
                 <a:spcPts val="1350"/>
               </a:lnSpc>
@@ -20932,7 +21388,7 @@
             <a:endParaRPr lang="en-US" sz="1000" dirty="0"/>
           </a:p>
           <a:p>
-            <a:pPr algn="l" indent="0" marL="0">
+            <a:pPr marL="0" indent="0" algn="l">
               <a:lnSpc>
                 <a:spcPts val="1350"/>
               </a:lnSpc>
@@ -20952,7 +21408,7 @@
             <a:endParaRPr lang="en-US" sz="1000" dirty="0"/>
           </a:p>
           <a:p>
-            <a:pPr algn="l" indent="0" marL="0">
+            <a:pPr marL="0" indent="0" algn="l">
               <a:lnSpc>
                 <a:spcPts val="1350"/>
               </a:lnSpc>
@@ -20972,7 +21428,7 @@
             <a:endParaRPr lang="en-US" sz="1000" dirty="0"/>
           </a:p>
           <a:p>
-            <a:pPr algn="l" indent="0" marL="0">
+            <a:pPr marL="0" indent="0" algn="l">
               <a:lnSpc>
                 <a:spcPts val="1350"/>
               </a:lnSpc>
@@ -20981,7 +21437,7 @@
             <a:endParaRPr lang="en-US" sz="1000" dirty="0"/>
           </a:p>
           <a:p>
-            <a:pPr algn="l" indent="0" marL="0">
+            <a:pPr marL="0" indent="0" algn="l">
               <a:lnSpc>
                 <a:spcPts val="1350"/>
               </a:lnSpc>
@@ -21001,7 +21457,7 @@
             <a:endParaRPr lang="en-US" sz="1000" dirty="0"/>
           </a:p>
           <a:p>
-            <a:pPr algn="l" indent="0" marL="0">
+            <a:pPr marL="0" indent="0" algn="l">
               <a:lnSpc>
                 <a:spcPts val="1350"/>
               </a:lnSpc>
@@ -21021,7 +21477,7 @@
             <a:endParaRPr lang="en-US" sz="1000" dirty="0"/>
           </a:p>
           <a:p>
-            <a:pPr algn="l" indent="0" marL="0">
+            <a:pPr marL="0" indent="0" algn="l">
               <a:lnSpc>
                 <a:spcPts val="1350"/>
               </a:lnSpc>
@@ -21041,7 +21497,7 @@
             <a:endParaRPr lang="en-US" sz="1000" dirty="0"/>
           </a:p>
           <a:p>
-            <a:pPr algn="l" indent="0" marL="0">
+            <a:pPr marL="0" indent="0" algn="l">
               <a:lnSpc>
                 <a:spcPts val="1350"/>
               </a:lnSpc>
@@ -21061,7 +21517,7 @@
             <a:endParaRPr lang="en-US" sz="1000" dirty="0"/>
           </a:p>
           <a:p>
-            <a:pPr algn="l" indent="0" marL="0">
+            <a:pPr marL="0" indent="0" algn="l">
               <a:lnSpc>
                 <a:spcPts val="1350"/>
               </a:lnSpc>
@@ -21081,7 +21537,7 @@
             <a:endParaRPr lang="en-US" sz="1000" dirty="0"/>
           </a:p>
           <a:p>
-            <a:pPr algn="l" indent="0" marL="0">
+            <a:pPr marL="0" indent="0" algn="l">
               <a:lnSpc>
                 <a:spcPts val="1350"/>
               </a:lnSpc>
@@ -21090,7 +21546,7 @@
             <a:endParaRPr lang="en-US" sz="1000" dirty="0"/>
           </a:p>
           <a:p>
-            <a:pPr algn="l" indent="0" marL="0">
+            <a:pPr marL="0" indent="0" algn="l">
               <a:lnSpc>
                 <a:spcPts val="1350"/>
               </a:lnSpc>
@@ -21110,7 +21566,7 @@
             <a:endParaRPr lang="en-US" sz="1000" dirty="0"/>
           </a:p>
           <a:p>
-            <a:pPr algn="l" indent="0" marL="0">
+            <a:pPr marL="0" indent="0" algn="l">
               <a:lnSpc>
                 <a:spcPts val="1350"/>
               </a:lnSpc>
@@ -21130,7 +21586,7 @@
             <a:endParaRPr lang="en-US" sz="1000" dirty="0"/>
           </a:p>
           <a:p>
-            <a:pPr algn="l" indent="0" marL="0">
+            <a:pPr marL="0" indent="0" algn="l">
               <a:lnSpc>
                 <a:spcPts val="1350"/>
               </a:lnSpc>
@@ -21150,7 +21606,7 @@
             <a:endParaRPr lang="en-US" sz="1000" dirty="0"/>
           </a:p>
           <a:p>
-            <a:pPr algn="l" indent="0" marL="0">
+            <a:pPr marL="0" indent="0" algn="l">
               <a:lnSpc>
                 <a:spcPts val="1350"/>
               </a:lnSpc>
@@ -21275,6 +21731,13 @@
           </a:solidFill>
           <a:ln/>
         </p:spPr>
+        <p:txBody>
+          <a:bodyPr/>
+          <a:lstStyle/>
+          <a:p>
+            <a:endParaRPr lang="en-GB"/>
+          </a:p>
+        </p:txBody>
       </p:sp>
       <p:sp>
         <p:nvSpPr>
@@ -21297,7 +21760,7 @@
           <a:bodyPr wrap="square" rtlCol="0" anchor="ctr"/>
           <a:lstStyle/>
           <a:p>
-            <a:pPr indent="0" marL="0">
+            <a:pPr marL="0" indent="0">
               <a:buNone/>
             </a:pPr>
             <a:r>
@@ -21331,6 +21794,7 @@
         <a:solidFill>
           <a:srgbClr val="0C0C0C"/>
         </a:solidFill>
+        <a:effectLst/>
       </p:bgPr>
     </p:bg>
     <p:spTree>
@@ -21366,6 +21830,13 @@
           </a:solidFill>
           <a:ln/>
         </p:spPr>
+        <p:txBody>
+          <a:bodyPr/>
+          <a:lstStyle/>
+          <a:p>
+            <a:endParaRPr lang="en-GB"/>
+          </a:p>
+        </p:txBody>
       </p:sp>
       <p:sp>
         <p:nvSpPr>
@@ -21388,11 +21859,11 @@
           <a:bodyPr wrap="square" rtlCol="0" anchor="ctr"/>
           <a:lstStyle/>
           <a:p>
-            <a:pPr indent="0" marL="0">
-              <a:buNone/>
-            </a:pPr>
-            <a:r>
-              <a:rPr lang="en-US" sz="1050" spc="400" kern="0" dirty="0">
+            <a:pPr marL="0" indent="0">
+              <a:buNone/>
+            </a:pPr>
+            <a:r>
+              <a:rPr lang="en-US" sz="1050" kern="0" spc="400" dirty="0">
                 <a:solidFill>
                   <a:srgbClr val="A8A29E"/>
                 </a:solidFill>
@@ -21427,7 +21898,7 @@
           <a:bodyPr wrap="square" rtlCol="0" anchor="ctr"/>
           <a:lstStyle/>
           <a:p>
-            <a:pPr indent="0" marL="0">
+            <a:pPr marL="0" indent="0">
               <a:buNone/>
             </a:pPr>
             <a:r>
@@ -21466,11 +21937,11 @@
           <a:bodyPr wrap="square" rtlCol="0" anchor="ctr"/>
           <a:lstStyle/>
           <a:p>
-            <a:pPr indent="0" marL="0">
-              <a:buNone/>
-            </a:pPr>
-            <a:r>
-              <a:rPr lang="en-US" sz="850" spc="200" kern="0" dirty="0">
+            <a:pPr marL="0" indent="0">
+              <a:buNone/>
+            </a:pPr>
+            <a:r>
+              <a:rPr lang="en-US" sz="850" kern="0" spc="200" dirty="0">
                 <a:solidFill>
                   <a:srgbClr val="6B6560"/>
                 </a:solidFill>
@@ -21505,7 +21976,7 @@
           <a:bodyPr wrap="square" rtlCol="0" anchor="ctr"/>
           <a:lstStyle/>
           <a:p>
-            <a:pPr algn="r" indent="0" marL="0">
+            <a:pPr marL="0" indent="0" algn="r">
               <a:buNone/>
             </a:pPr>
             <a:r>
@@ -21539,16 +22010,34 @@
         </p:nvGraphicFramePr>
         <p:xfrm>
           <a:off x="548640" y="1737360"/>
-          <a:ext cx="11064240" cy="914400"/>
+          <a:ext cx="11064240" cy="1828800"/>
         </p:xfrm>
         <a:graphic>
           <a:graphicData uri="http://schemas.openxmlformats.org/drawingml/2006/table">
             <a:tbl>
               <a:tblPr/>
               <a:tblGrid>
-                <a:gridCol w="2194560"/>
-                <a:gridCol w="2743200"/>
-                <a:gridCol w="6126480"/>
+                <a:gridCol w="2194560">
+                  <a:extLst>
+                    <a:ext uri="{9D8B030D-6E8A-4147-A177-3AD203B41FA5}">
+                      <a16:colId xmlns:a16="http://schemas.microsoft.com/office/drawing/2014/main" val="20000"/>
+                    </a:ext>
+                  </a:extLst>
+                </a:gridCol>
+                <a:gridCol w="2743200">
+                  <a:extLst>
+                    <a:ext uri="{9D8B030D-6E8A-4147-A177-3AD203B41FA5}">
+                      <a16:colId xmlns:a16="http://schemas.microsoft.com/office/drawing/2014/main" val="20001"/>
+                    </a:ext>
+                  </a:extLst>
+                </a:gridCol>
+                <a:gridCol w="6126480">
+                  <a:extLst>
+                    <a:ext uri="{9D8B030D-6E8A-4147-A177-3AD203B41FA5}">
+                      <a16:colId xmlns:a16="http://schemas.microsoft.com/office/drawing/2014/main" val="20002"/>
+                    </a:ext>
+                  </a:extLst>
+                </a:gridCol>
               </a:tblGrid>
               <a:tr h="457200">
                 <a:tc>
@@ -21556,11 +22045,11 @@
                     <a:bodyPr/>
                     <a:lstStyle/>
                     <a:p>
-                      <a:pPr indent="0" marL="0">
+                      <a:pPr marL="0" indent="0">
                         <a:buNone/>
                       </a:pPr>
                       <a:r>
-                        <a:rPr lang="en-US" sz="1000" b="1" spc="200" kern="0" dirty="0">
+                        <a:rPr lang="en-US" sz="1000" b="1" kern="0" spc="200" dirty="0">
                           <a:solidFill>
                             <a:srgbClr val="D4FF00"/>
                           </a:solidFill>
@@ -21624,11 +22113,11 @@
                     <a:bodyPr/>
                     <a:lstStyle/>
                     <a:p>
-                      <a:pPr indent="0" marL="0">
+                      <a:pPr marL="0" indent="0">
                         <a:buNone/>
                       </a:pPr>
                       <a:r>
-                        <a:rPr lang="en-US" sz="1000" b="1" spc="200" kern="0" dirty="0">
+                        <a:rPr lang="en-US" sz="1000" b="1" kern="0" spc="200" dirty="0">
                           <a:solidFill>
                             <a:srgbClr val="D4FF00"/>
                           </a:solidFill>
@@ -21692,11 +22181,11 @@
                     <a:bodyPr/>
                     <a:lstStyle/>
                     <a:p>
-                      <a:pPr indent="0" marL="0">
+                      <a:pPr marL="0" indent="0">
                         <a:buNone/>
                       </a:pPr>
                       <a:r>
-                        <a:rPr lang="en-US" sz="1000" b="1" spc="200" kern="0" dirty="0">
+                        <a:rPr lang="en-US" sz="1000" b="1" kern="0" spc="200" dirty="0">
                           <a:solidFill>
                             <a:srgbClr val="D4FF00"/>
                           </a:solidFill>
@@ -21755,6 +22244,11 @@
                     </a:solidFill>
                   </a:tcPr>
                 </a:tc>
+                <a:extLst>
+                  <a:ext uri="{0D108BD9-81ED-4DB2-BD59-A6C34878D82A}">
+                    <a16:rowId xmlns:a16="http://schemas.microsoft.com/office/drawing/2014/main" val="10000"/>
+                  </a:ext>
+                </a:extLst>
               </a:tr>
               <a:tr h="457200">
                 <a:tc>
@@ -21762,7 +22256,7 @@
                     <a:bodyPr/>
                     <a:lstStyle/>
                     <a:p>
-                      <a:pPr indent="0" marL="0">
+                      <a:pPr marL="0" indent="0">
                         <a:buNone/>
                       </a:pPr>
                       <a:r>
@@ -21830,7 +22324,7 @@
                     <a:bodyPr/>
                     <a:lstStyle/>
                     <a:p>
-                      <a:pPr indent="0" marL="0">
+                      <a:pPr marL="0" indent="0">
                         <a:buNone/>
                       </a:pPr>
                       <a:r>
@@ -21898,7 +22392,7 @@
                     <a:bodyPr/>
                     <a:lstStyle/>
                     <a:p>
-                      <a:pPr indent="0" marL="0">
+                      <a:pPr marL="0" indent="0">
                         <a:buNone/>
                       </a:pPr>
                       <a:r>
@@ -21961,6 +22455,11 @@
                     </a:solidFill>
                   </a:tcPr>
                 </a:tc>
+                <a:extLst>
+                  <a:ext uri="{0D108BD9-81ED-4DB2-BD59-A6C34878D82A}">
+                    <a16:rowId xmlns:a16="http://schemas.microsoft.com/office/drawing/2014/main" val="10001"/>
+                  </a:ext>
+                </a:extLst>
               </a:tr>
               <a:tr h="457200">
                 <a:tc>
@@ -21968,7 +22467,7 @@
                     <a:bodyPr/>
                     <a:lstStyle/>
                     <a:p>
-                      <a:pPr indent="0" marL="0">
+                      <a:pPr marL="0" indent="0">
                         <a:buNone/>
                       </a:pPr>
                       <a:r>
@@ -22036,7 +22535,7 @@
                     <a:bodyPr/>
                     <a:lstStyle/>
                     <a:p>
-                      <a:pPr indent="0" marL="0">
+                      <a:pPr marL="0" indent="0">
                         <a:buNone/>
                       </a:pPr>
                       <a:r>
@@ -22104,7 +22603,7 @@
                     <a:bodyPr/>
                     <a:lstStyle/>
                     <a:p>
-                      <a:pPr indent="0" marL="0">
+                      <a:pPr marL="0" indent="0">
                         <a:buNone/>
                       </a:pPr>
                       <a:r>
@@ -22167,6 +22666,11 @@
                     </a:solidFill>
                   </a:tcPr>
                 </a:tc>
+                <a:extLst>
+                  <a:ext uri="{0D108BD9-81ED-4DB2-BD59-A6C34878D82A}">
+                    <a16:rowId xmlns:a16="http://schemas.microsoft.com/office/drawing/2014/main" val="10002"/>
+                  </a:ext>
+                </a:extLst>
               </a:tr>
               <a:tr h="457200">
                 <a:tc>
@@ -22174,7 +22678,7 @@
                     <a:bodyPr/>
                     <a:lstStyle/>
                     <a:p>
-                      <a:pPr indent="0" marL="0">
+                      <a:pPr marL="0" indent="0">
                         <a:buNone/>
                       </a:pPr>
                       <a:r>
@@ -22242,7 +22746,7 @@
                     <a:bodyPr/>
                     <a:lstStyle/>
                     <a:p>
-                      <a:pPr indent="0" marL="0">
+                      <a:pPr marL="0" indent="0">
                         <a:buNone/>
                       </a:pPr>
                       <a:r>
@@ -22310,7 +22814,7 @@
                     <a:bodyPr/>
                     <a:lstStyle/>
                     <a:p>
-                      <a:pPr indent="0" marL="0">
+                      <a:pPr marL="0" indent="0">
                         <a:buNone/>
                       </a:pPr>
                       <a:r>
@@ -22373,6 +22877,11 @@
                     </a:solidFill>
                   </a:tcPr>
                 </a:tc>
+                <a:extLst>
+                  <a:ext uri="{0D108BD9-81ED-4DB2-BD59-A6C34878D82A}">
+                    <a16:rowId xmlns:a16="http://schemas.microsoft.com/office/drawing/2014/main" val="10003"/>
+                  </a:ext>
+                </a:extLst>
               </a:tr>
             </a:tbl>
           </a:graphicData>
@@ -22785,4 +23294,325 @@
     </a:ext>
   </a:extLst>
 </a:theme>
+</file>
+
+<file path=ppt/theme/theme2.xml><?xml version="1.0" encoding="utf-8"?>
+<a:theme xmlns:a="http://schemas.openxmlformats.org/drawingml/2006/main" name="Office Theme">
+  <a:themeElements>
+    <a:clrScheme name="Office">
+      <a:dk1>
+        <a:sysClr val="windowText" lastClr="000000"/>
+      </a:dk1>
+      <a:lt1>
+        <a:sysClr val="window" lastClr="FFFFFF"/>
+      </a:lt1>
+      <a:dk2>
+        <a:srgbClr val="0E2841"/>
+      </a:dk2>
+      <a:lt2>
+        <a:srgbClr val="E8E8E8"/>
+      </a:lt2>
+      <a:accent1>
+        <a:srgbClr val="156082"/>
+      </a:accent1>
+      <a:accent2>
+        <a:srgbClr val="E97132"/>
+      </a:accent2>
+      <a:accent3>
+        <a:srgbClr val="196B24"/>
+      </a:accent3>
+      <a:accent4>
+        <a:srgbClr val="0F9ED5"/>
+      </a:accent4>
+      <a:accent5>
+        <a:srgbClr val="A02B93"/>
+      </a:accent5>
+      <a:accent6>
+        <a:srgbClr val="4EA72E"/>
+      </a:accent6>
+      <a:hlink>
+        <a:srgbClr val="467886"/>
+      </a:hlink>
+      <a:folHlink>
+        <a:srgbClr val="96607D"/>
+      </a:folHlink>
+    </a:clrScheme>
+    <a:fontScheme name="Office">
+      <a:majorFont>
+        <a:latin typeface="Aptos Display" panose="02110004020202020204"/>
+        <a:ea typeface=""/>
+        <a:cs typeface=""/>
+        <a:font script="Jpan" typeface="游ゴシック Light"/>
+        <a:font script="Hang" typeface="맑은 고딕"/>
+        <a:font script="Hans" typeface="等线 Light"/>
+        <a:font script="Hant" typeface="新細明體"/>
+        <a:font script="Arab" typeface="Times New Roman"/>
+        <a:font script="Hebr" typeface="Times New Roman"/>
+        <a:font script="Thai" typeface="Angsana New"/>
+        <a:font script="Ethi" typeface="Nyala"/>
+        <a:font script="Beng" typeface="Vrinda"/>
+        <a:font script="Gujr" typeface="Shruti"/>
+        <a:font script="Khmr" typeface="MoolBoran"/>
+        <a:font script="Knda" typeface="Tunga"/>
+        <a:font script="Guru" typeface="Raavi"/>
+        <a:font script="Cans" typeface="Euphemia"/>
+        <a:font script="Cher" typeface="Plantagenet Cherokee"/>
+        <a:font script="Yiii" typeface="Microsoft Yi Baiti"/>
+        <a:font script="Tibt" typeface="Microsoft Himalaya"/>
+        <a:font script="Thaa" typeface="MV Boli"/>
+        <a:font script="Deva" typeface="Mangal"/>
+        <a:font script="Telu" typeface="Gautami"/>
+        <a:font script="Taml" typeface="Latha"/>
+        <a:font script="Syrc" typeface="Estrangelo Edessa"/>
+        <a:font script="Orya" typeface="Kalinga"/>
+        <a:font script="Mlym" typeface="Kartika"/>
+        <a:font script="Laoo" typeface="DokChampa"/>
+        <a:font script="Sinh" typeface="Iskoola Pota"/>
+        <a:font script="Mong" typeface="Mongolian Baiti"/>
+        <a:font script="Viet" typeface="Times New Roman"/>
+        <a:font script="Uigh" typeface="Microsoft Uighur"/>
+        <a:font script="Geor" typeface="Sylfaen"/>
+        <a:font script="Armn" typeface="Arial"/>
+        <a:font script="Bugi" typeface="Leelawadee UI"/>
+        <a:font script="Bopo" typeface="Microsoft JhengHei"/>
+        <a:font script="Java" typeface="Javanese Text"/>
+        <a:font script="Lisu" typeface="Segoe UI"/>
+        <a:font script="Mymr" typeface="Myanmar Text"/>
+        <a:font script="Nkoo" typeface="Ebrima"/>
+        <a:font script="Olck" typeface="Nirmala UI"/>
+        <a:font script="Osma" typeface="Ebrima"/>
+        <a:font script="Phag" typeface="Phagspa"/>
+        <a:font script="Syrn" typeface="Estrangelo Edessa"/>
+        <a:font script="Syrj" typeface="Estrangelo Edessa"/>
+        <a:font script="Syre" typeface="Estrangelo Edessa"/>
+        <a:font script="Sora" typeface="Nirmala UI"/>
+        <a:font script="Tale" typeface="Microsoft Tai Le"/>
+        <a:font script="Talu" typeface="Microsoft New Tai Lue"/>
+        <a:font script="Tfng" typeface="Ebrima"/>
+      </a:majorFont>
+      <a:minorFont>
+        <a:latin typeface="Aptos" panose="02110004020202020204"/>
+        <a:ea typeface=""/>
+        <a:cs typeface=""/>
+        <a:font script="Jpan" typeface="游ゴシック"/>
+        <a:font script="Hang" typeface="맑은 고딕"/>
+        <a:font script="Hans" typeface="等线"/>
+        <a:font script="Hant" typeface="新細明體"/>
+        <a:font script="Arab" typeface="Arial"/>
+        <a:font script="Hebr" typeface="Arial"/>
+        <a:font script="Thai" typeface="Cordia New"/>
+        <a:font script="Ethi" typeface="Nyala"/>
+        <a:font script="Beng" typeface="Vrinda"/>
+        <a:font script="Gujr" typeface="Shruti"/>
+        <a:font script="Khmr" typeface="DaunPenh"/>
+        <a:font script="Knda" typeface="Tunga"/>
+        <a:font script="Guru" typeface="Raavi"/>
+        <a:font script="Cans" typeface="Euphemia"/>
+        <a:font script="Cher" typeface="Plantagenet Cherokee"/>
+        <a:font script="Yiii" typeface="Microsoft Yi Baiti"/>
+        <a:font script="Tibt" typeface="Microsoft Himalaya"/>
+        <a:font script="Thaa" typeface="MV Boli"/>
+        <a:font script="Deva" typeface="Mangal"/>
+        <a:font script="Telu" typeface="Gautami"/>
+        <a:font script="Taml" typeface="Latha"/>
+        <a:font script="Syrc" typeface="Estrangelo Edessa"/>
+        <a:font script="Orya" typeface="Kalinga"/>
+        <a:font script="Mlym" typeface="Kartika"/>
+        <a:font script="Laoo" typeface="DokChampa"/>
+        <a:font script="Sinh" typeface="Iskoola Pota"/>
+        <a:font script="Mong" typeface="Mongolian Baiti"/>
+        <a:font script="Viet" typeface="Arial"/>
+        <a:font script="Uigh" typeface="Microsoft Uighur"/>
+        <a:font script="Geor" typeface="Sylfaen"/>
+        <a:font script="Armn" typeface="Arial"/>
+        <a:font script="Bugi" typeface="Leelawadee UI"/>
+        <a:font script="Bopo" typeface="Microsoft JhengHei"/>
+        <a:font script="Java" typeface="Javanese Text"/>
+        <a:font script="Lisu" typeface="Segoe UI"/>
+        <a:font script="Mymr" typeface="Myanmar Text"/>
+        <a:font script="Nkoo" typeface="Ebrima"/>
+        <a:font script="Olck" typeface="Nirmala UI"/>
+        <a:font script="Osma" typeface="Ebrima"/>
+        <a:font script="Phag" typeface="Phagspa"/>
+        <a:font script="Syrn" typeface="Estrangelo Edessa"/>
+        <a:font script="Syrj" typeface="Estrangelo Edessa"/>
+        <a:font script="Syre" typeface="Estrangelo Edessa"/>
+        <a:font script="Sora" typeface="Nirmala UI"/>
+        <a:font script="Tale" typeface="Microsoft Tai Le"/>
+        <a:font script="Talu" typeface="Microsoft New Tai Lue"/>
+        <a:font script="Tfng" typeface="Ebrima"/>
+      </a:minorFont>
+    </a:fontScheme>
+    <a:fmtScheme name="Office">
+      <a:fillStyleLst>
+        <a:solidFill>
+          <a:schemeClr val="phClr"/>
+        </a:solidFill>
+        <a:gradFill rotWithShape="1">
+          <a:gsLst>
+            <a:gs pos="0">
+              <a:schemeClr val="phClr">
+                <a:lumMod val="110000"/>
+                <a:satMod val="105000"/>
+                <a:tint val="67000"/>
+              </a:schemeClr>
+            </a:gs>
+            <a:gs pos="50000">
+              <a:schemeClr val="phClr">
+                <a:lumMod val="105000"/>
+                <a:satMod val="103000"/>
+                <a:tint val="73000"/>
+              </a:schemeClr>
+            </a:gs>
+            <a:gs pos="100000">
+              <a:schemeClr val="phClr">
+                <a:lumMod val="105000"/>
+                <a:satMod val="109000"/>
+                <a:tint val="81000"/>
+              </a:schemeClr>
+            </a:gs>
+          </a:gsLst>
+          <a:lin ang="5400000" scaled="0"/>
+        </a:gradFill>
+        <a:gradFill rotWithShape="1">
+          <a:gsLst>
+            <a:gs pos="0">
+              <a:schemeClr val="phClr">
+                <a:satMod val="103000"/>
+                <a:lumMod val="102000"/>
+                <a:tint val="94000"/>
+              </a:schemeClr>
+            </a:gs>
+            <a:gs pos="50000">
+              <a:schemeClr val="phClr">
+                <a:satMod val="110000"/>
+                <a:lumMod val="100000"/>
+                <a:shade val="100000"/>
+              </a:schemeClr>
+            </a:gs>
+            <a:gs pos="100000">
+              <a:schemeClr val="phClr">
+                <a:lumMod val="99000"/>
+                <a:satMod val="120000"/>
+                <a:shade val="78000"/>
+              </a:schemeClr>
+            </a:gs>
+          </a:gsLst>
+          <a:lin ang="5400000" scaled="0"/>
+        </a:gradFill>
+      </a:fillStyleLst>
+      <a:lnStyleLst>
+        <a:ln w="12700" cap="flat" cmpd="sng" algn="ctr">
+          <a:solidFill>
+            <a:schemeClr val="phClr"/>
+          </a:solidFill>
+          <a:prstDash val="solid"/>
+          <a:miter lim="800000"/>
+        </a:ln>
+        <a:ln w="19050" cap="flat" cmpd="sng" algn="ctr">
+          <a:solidFill>
+            <a:schemeClr val="phClr"/>
+          </a:solidFill>
+          <a:prstDash val="solid"/>
+          <a:miter lim="800000"/>
+        </a:ln>
+        <a:ln w="25400" cap="flat" cmpd="sng" algn="ctr">
+          <a:solidFill>
+            <a:schemeClr val="phClr"/>
+          </a:solidFill>
+          <a:prstDash val="solid"/>
+          <a:miter lim="800000"/>
+        </a:ln>
+      </a:lnStyleLst>
+      <a:effectStyleLst>
+        <a:effectStyle>
+          <a:effectLst/>
+        </a:effectStyle>
+        <a:effectStyle>
+          <a:effectLst/>
+        </a:effectStyle>
+        <a:effectStyle>
+          <a:effectLst>
+            <a:outerShdw blurRad="57150" dist="19050" dir="5400000" algn="ctr" rotWithShape="0">
+              <a:srgbClr val="000000">
+                <a:alpha val="63000"/>
+              </a:srgbClr>
+            </a:outerShdw>
+          </a:effectLst>
+        </a:effectStyle>
+      </a:effectStyleLst>
+      <a:bgFillStyleLst>
+        <a:solidFill>
+          <a:schemeClr val="phClr"/>
+        </a:solidFill>
+        <a:solidFill>
+          <a:schemeClr val="phClr">
+            <a:tint val="95000"/>
+            <a:satMod val="170000"/>
+          </a:schemeClr>
+        </a:solidFill>
+        <a:gradFill rotWithShape="1">
+          <a:gsLst>
+            <a:gs pos="0">
+              <a:schemeClr val="phClr">
+                <a:tint val="93000"/>
+                <a:satMod val="150000"/>
+                <a:shade val="98000"/>
+                <a:lumMod val="102000"/>
+              </a:schemeClr>
+            </a:gs>
+            <a:gs pos="50000">
+              <a:schemeClr val="phClr">
+                <a:tint val="98000"/>
+                <a:satMod val="130000"/>
+                <a:shade val="90000"/>
+                <a:lumMod val="103000"/>
+              </a:schemeClr>
+            </a:gs>
+            <a:gs pos="100000">
+              <a:schemeClr val="phClr">
+                <a:shade val="63000"/>
+                <a:satMod val="120000"/>
+              </a:schemeClr>
+            </a:gs>
+          </a:gsLst>
+          <a:lin ang="5400000" scaled="0"/>
+        </a:gradFill>
+      </a:bgFillStyleLst>
+    </a:fmtScheme>
+  </a:themeElements>
+  <a:objectDefaults>
+    <a:lnDef>
+      <a:spPr/>
+      <a:bodyPr/>
+      <a:lstStyle/>
+      <a:style>
+        <a:lnRef idx="2">
+          <a:schemeClr val="accent1"/>
+        </a:lnRef>
+        <a:fillRef idx="0">
+          <a:schemeClr val="accent1"/>
+        </a:fillRef>
+        <a:effectRef idx="1">
+          <a:schemeClr val="accent1"/>
+        </a:effectRef>
+        <a:fontRef idx="minor">
+          <a:schemeClr val="tx1"/>
+        </a:fontRef>
+      </a:style>
+    </a:lnDef>
+  </a:objectDefaults>
+  <a:extraClrSchemeLst/>
+  <a:extLst>
+    <a:ext uri="{05A4C25C-085E-4340-85A3-A5531E510DB2}">
+      <thm15:themeFamily xmlns:thm15="http://schemas.microsoft.com/office/thememl/2012/main" name="Office Theme" id="{2E142A2C-CD16-42D6-873A-C26D2A0506FA}" vid="{1BDDFF52-6CD6-40A5-AB3C-68EB2F1E4D0A}"/>
+    </a:ext>
+  </a:extLst>
+</a:theme>
+</file>
+
+<file path=docMetadata/LabelInfo.xml><?xml version="1.0" encoding="utf-8"?>
+<clbl:labelList xmlns:clbl="http://schemas.microsoft.com/office/2020/mipLabelMetadata">
+  <clbl:label id="{48141450-2387-4aca-b41f-19cd6be9dd3c}" enabled="1" method="Standard" siteId="{adf10e2b-b6e9-41d6-be2f-c12bb566019c}" contentBits="0" removed="0"/>
+</clbl:labelList>
 </file>